--- a/docs/WG立ち上げガイド/01_リポジトリの作り方と運用.pptx
+++ b/docs/WG立ち上げガイド/01_リポジトリの作り方と運用.pptx
@@ -687,7 +687,7 @@
           <a:p>
             <a:r>
               <a:rPr lang="en-US" dirty="0"/>
-              <a:t>1〜4 は WG が立ち上がったときに一度だけ行います。メンバーが増えたら 3 を、卒業・退部や WG の終了のときは 5 を行います。</a:t>
+              <a:t>1〜4 は WG が立ち上がったときに一度だけ行います。メンバーが増えたらチームに足し、卒業・退部や WG の終了のときは 5 を行います。</a:t>
             </a:r>
             <a:endParaRPr lang="en-US" dirty="0"/>
           </a:p>
@@ -1039,7 +1039,7 @@
           <a:p>
             <a:r>
               <a:rPr lang="en-US" dirty="0"/>
-              <a:t>Write があれば、ブランチを作って送り、プルリクエストを出してマージできます。リポジトリの設定を変えられる Maintain や Admin は付けません。</a:t>
+              <a:t>Write があれば、ブランチを作って送り、プルリクエストを出してマージできます。リポジトリの設定を変えられる Maintain や Admin は付けません。チームの名前はリポジトリと同じ wg-&lt;名前&gt; にそろえます。</a:t>
             </a:r>
             <a:endParaRPr lang="en-US" dirty="0"/>
           </a:p>
@@ -1807,7 +1807,7 @@
                 <a:ea typeface="Meiryo" pitchFamily="34" charset="-122"/>
                 <a:cs typeface="Meiryo" pitchFamily="34" charset="-120"/>
               </a:rPr>
-              <a:t>WG のリポジトリの作り方、main を守るルールと権限、サイトへの掲載、メンバーの交代と終了。</a:t>
+              <a:t>WG のリポジトリの作り方、main を守るルール、WG のチーム、サイトへの掲載、メンバーの交代と終了。</a:t>
             </a:r>
             <a:endParaRPr lang="en-US" sz="1300" dirty="0"/>
           </a:p>
@@ -3907,7 +3907,7 @@
                 <a:ea typeface="Meiryo" pitchFamily="34" charset="-122"/>
                 <a:cs typeface="Meiryo" pitchFamily="34" charset="-120"/>
               </a:rPr>
-              <a:t>権限</a:t>
+              <a:t>チーム</a:t>
             </a:r>
             <a:endParaRPr lang="en-US" sz="1600" dirty="0"/>
           </a:p>
@@ -3949,7 +3949,7 @@
                 <a:ea typeface="Meiryo" pitchFamily="34" charset="-122"/>
                 <a:cs typeface="Meiryo" pitchFamily="34" charset="-120"/>
               </a:rPr>
-              <a:t>WG のメンバーに書き込み権限を付ける</a:t>
+              <a:t>WG のチームを作り、リポジトリに Write を付ける</a:t>
             </a:r>
             <a:endParaRPr lang="en-US" sz="1100" dirty="0"/>
           </a:p>
@@ -4015,7 +4015,7 @@
                 <a:ea typeface="Meiryo" pitchFamily="34" charset="-122"/>
                 <a:cs typeface="Meiryo" pitchFamily="34" charset="-120"/>
               </a:rPr>
-              <a:t>人が入るたび</a:t>
+              <a:t>一度だけ</a:t>
             </a:r>
             <a:endParaRPr lang="en-US" sz="900" dirty="0"/>
           </a:p>
@@ -4483,7 +4483,7 @@
                 <a:ea typeface="Meiryo" pitchFamily="34" charset="-122"/>
                 <a:cs typeface="Meiryo" pitchFamily="34" charset="-120"/>
               </a:rPr>
-              <a:t>交代で権限を外し、終わったらアーカイブ</a:t>
+              <a:t>人の出入りはチームで。終わったらアーカイブ</a:t>
             </a:r>
             <a:endParaRPr lang="en-US" sz="1100" dirty="0"/>
           </a:p>
@@ -8961,7 +8961,7 @@
                 <a:ea typeface="Consolas" pitchFamily="34" charset="-122"/>
                 <a:cs typeface="Consolas" pitchFamily="34" charset="-120"/>
               </a:rPr>
-              <a:t>// 01  ·  手順 3  ·  権限</a:t>
+              <a:t>// 01  ·  手順 3  ·  チーム</a:t>
             </a:r>
             <a:endParaRPr lang="en-US" sz="1100" dirty="0"/>
           </a:p>
@@ -9000,7 +9000,7 @@
                 <a:ea typeface="Meiryo" pitchFamily="34" charset="-122"/>
                 <a:cs typeface="Meiryo" pitchFamily="34" charset="-120"/>
               </a:rPr>
-              <a:t>メンバーに書き込み権限を付ける</a:t>
+              <a:t>WG のチームを作って権限を付ける</a:t>
             </a:r>
             <a:endParaRPr lang="en-US" sz="2600" dirty="0"/>
           </a:p>
@@ -9103,7 +9103,7 @@
                 <a:ea typeface="Meiryo" pitchFamily="34" charset="-122"/>
                 <a:cs typeface="Meiryo" pitchFamily="34" charset="-120"/>
               </a:rPr>
-              <a:t>先に org へ招待しておく</a:t>
+              <a:t>メンバーを org に招待する</a:t>
             </a:r>
             <a:endParaRPr lang="en-US" sz="1250" dirty="0"/>
           </a:p>
@@ -9245,7 +9245,7 @@
                 <a:ea typeface="Meiryo" pitchFamily="34" charset="-122"/>
                 <a:cs typeface="Meiryo" pitchFamily="34" charset="-120"/>
               </a:rPr>
-              <a:t>リポジトリの「Settings」</a:t>
+              <a:t>チームを作る</a:t>
             </a:r>
             <a:endParaRPr lang="en-US" sz="1250" dirty="0"/>
           </a:p>
@@ -9284,7 +9284,7 @@
                 <a:ea typeface="Meiryo" pitchFamily="34" charset="-122"/>
                 <a:cs typeface="Meiryo" pitchFamily="34" charset="-120"/>
               </a:rPr>
-              <a:t>左の「Collaborators and teams」</a:t>
+              <a:t>org の「Teams」→「New team」。名前は wg-&lt;名前&gt;</a:t>
             </a:r>
             <a:endParaRPr lang="en-US" sz="1050" dirty="0"/>
           </a:p>
@@ -9387,7 +9387,7 @@
                 <a:ea typeface="Meiryo" pitchFamily="34" charset="-122"/>
                 <a:cs typeface="Meiryo" pitchFamily="34" charset="-120"/>
               </a:rPr>
-              <a:t>「Add people」を押す</a:t>
+              <a:t>メンバーをチームに入れる</a:t>
             </a:r>
             <a:endParaRPr lang="en-US" sz="1250" dirty="0"/>
           </a:p>
@@ -9395,7 +9395,46 @@
       </p:sp>
       <p:sp>
         <p:nvSpPr>
-          <p:cNvPr id="15" name="Shape 13"/>
+          <p:cNvPr id="15" name="Text 13"/>
+          <p:cNvSpPr txBox="1"/>
+          <p:nvPr/>
+        </p:nvSpPr>
+        <p:spPr>
+          <a:xfrm>
+            <a:off x="896112" y="2926080"/>
+            <a:ext cx="3767328" cy="347472"/>
+          </a:xfrm>
+          <a:prstGeom prst="rect">
+            <a:avLst/>
+          </a:prstGeom>
+          <a:noFill/>
+          <a:ln/>
+        </p:spPr>
+        <p:txBody>
+          <a:bodyPr wrap="square" lIns="0" tIns="0" rIns="0" bIns="0" rtlCol="0" anchor="t"/>
+          <a:lstStyle/>
+          <a:p>
+            <a:pPr indent="0" marL="0">
+              <a:buNone/>
+            </a:pPr>
+            <a:r>
+              <a:rPr lang="en-US" sz="1050" dirty="0">
+                <a:solidFill>
+                  <a:srgbClr val="1B2B3A"/>
+                </a:solidFill>
+                <a:latin typeface="Meiryo" pitchFamily="34" charset="0"/>
+                <a:ea typeface="Meiryo" pitchFamily="34" charset="-122"/>
+                <a:cs typeface="Meiryo" pitchFamily="34" charset="-120"/>
+              </a:rPr>
+              <a:t>チームの「Members」→「Add a member」</a:t>
+            </a:r>
+            <a:endParaRPr lang="en-US" sz="1050" dirty="0"/>
+          </a:p>
+        </p:txBody>
+      </p:sp>
+      <p:sp>
+        <p:nvSpPr>
+          <p:cNvPr id="16" name="Shape 14"/>
           <p:cNvSpPr/>
           <p:nvPr/>
         </p:nvSpPr>
@@ -9420,7 +9459,7 @@
       </p:sp>
       <p:sp>
         <p:nvSpPr>
-          <p:cNvPr id="16" name="Text 14"/>
+          <p:cNvPr id="17" name="Text 15"/>
           <p:cNvSpPr txBox="1"/>
           <p:nvPr/>
         </p:nvSpPr>
@@ -9459,7 +9498,7 @@
       </p:sp>
       <p:sp>
         <p:nvSpPr>
-          <p:cNvPr id="17" name="Text 15"/>
+          <p:cNvPr id="18" name="Text 16"/>
           <p:cNvSpPr txBox="1"/>
           <p:nvPr/>
         </p:nvSpPr>
@@ -9490,7 +9529,7 @@
                 <a:ea typeface="Meiryo" pitchFamily="34" charset="-122"/>
                 <a:cs typeface="Meiryo" pitchFamily="34" charset="-120"/>
               </a:rPr>
-              <a:t>ユーザー名で探して選ぶ</a:t>
+              <a:t>リポジトリにチームを付ける</a:t>
             </a:r>
             <a:endParaRPr lang="en-US" sz="1250" dirty="0"/>
           </a:p>
@@ -9498,7 +9537,7 @@
       </p:sp>
       <p:sp>
         <p:nvSpPr>
-          <p:cNvPr id="18" name="Text 16"/>
+          <p:cNvPr id="19" name="Text 17"/>
           <p:cNvSpPr txBox="1"/>
           <p:nvPr/>
         </p:nvSpPr>
@@ -9529,7 +9568,7 @@
                 <a:ea typeface="Meiryo" pitchFamily="34" charset="-122"/>
                 <a:cs typeface="Meiryo" pitchFamily="34" charset="-120"/>
               </a:rPr>
-              <a:t>メンバーから聞いた GitHub のユーザー名</a:t>
+              <a:t>Settings →「Collaborators and teams」→「Add teams」</a:t>
             </a:r>
             <a:endParaRPr lang="en-US" sz="1050" dirty="0"/>
           </a:p>
@@ -9537,7 +9576,7 @@
       </p:sp>
       <p:sp>
         <p:nvSpPr>
-          <p:cNvPr id="19" name="Shape 17"/>
+          <p:cNvPr id="20" name="Shape 18"/>
           <p:cNvSpPr/>
           <p:nvPr/>
         </p:nvSpPr>
@@ -9562,7 +9601,7 @@
       </p:sp>
       <p:sp>
         <p:nvSpPr>
-          <p:cNvPr id="20" name="Text 18"/>
+          <p:cNvPr id="21" name="Text 19"/>
           <p:cNvSpPr txBox="1"/>
           <p:nvPr/>
         </p:nvSpPr>
@@ -9601,7 +9640,7 @@
       </p:sp>
       <p:sp>
         <p:nvSpPr>
-          <p:cNvPr id="21" name="Text 19"/>
+          <p:cNvPr id="22" name="Text 20"/>
           <p:cNvSpPr txBox="1"/>
           <p:nvPr/>
         </p:nvSpPr>
@@ -9640,7 +9679,7 @@
       </p:sp>
       <p:sp>
         <p:nvSpPr>
-          <p:cNvPr id="22" name="Text 20"/>
+          <p:cNvPr id="23" name="Text 21"/>
           <p:cNvSpPr txBox="1"/>
           <p:nvPr/>
         </p:nvSpPr>
@@ -9671,7 +9710,7 @@
                 <a:ea typeface="Meiryo" pitchFamily="34" charset="-122"/>
                 <a:cs typeface="Meiryo" pitchFamily="34" charset="-120"/>
               </a:rPr>
-              <a:t>「Add … to this repository」で完了</a:t>
+              <a:t>チームを選び、Write で追加する（右の画面）</a:t>
             </a:r>
             <a:endParaRPr lang="en-US" sz="1050" dirty="0"/>
           </a:p>
@@ -9679,7 +9718,7 @@
       </p:sp>
       <p:sp>
         <p:nvSpPr>
-          <p:cNvPr id="23" name="Shape 21"/>
+          <p:cNvPr id="24" name="Shape 22"/>
           <p:cNvSpPr/>
           <p:nvPr/>
         </p:nvSpPr>
@@ -9711,7 +9750,7 @@
       </p:sp>
       <p:sp>
         <p:nvSpPr>
-          <p:cNvPr id="24" name="Shape 22"/>
+          <p:cNvPr id="25" name="Shape 23"/>
           <p:cNvSpPr/>
           <p:nvPr/>
         </p:nvSpPr>
@@ -9736,7 +9775,7 @@
       </p:sp>
       <p:sp>
         <p:nvSpPr>
-          <p:cNvPr id="25" name="Shape 23"/>
+          <p:cNvPr id="26" name="Shape 24"/>
           <p:cNvSpPr/>
           <p:nvPr/>
         </p:nvSpPr>
@@ -9761,7 +9800,7 @@
       </p:sp>
       <p:sp>
         <p:nvSpPr>
-          <p:cNvPr id="26" name="Shape 24"/>
+          <p:cNvPr id="27" name="Shape 25"/>
           <p:cNvSpPr/>
           <p:nvPr/>
         </p:nvSpPr>
@@ -9786,7 +9825,7 @@
       </p:sp>
       <p:sp>
         <p:nvSpPr>
-          <p:cNvPr id="27" name="Shape 25"/>
+          <p:cNvPr id="28" name="Shape 26"/>
           <p:cNvSpPr/>
           <p:nvPr/>
         </p:nvSpPr>
@@ -9811,7 +9850,7 @@
       </p:sp>
       <p:sp>
         <p:nvSpPr>
-          <p:cNvPr id="28" name="Text 26"/>
+          <p:cNvPr id="29" name="Text 27"/>
           <p:cNvSpPr txBox="1"/>
           <p:nvPr/>
         </p:nvSpPr>
@@ -9850,14 +9889,14 @@
       </p:sp>
       <p:sp>
         <p:nvSpPr>
-          <p:cNvPr id="29" name="Text 27"/>
+          <p:cNvPr id="30" name="Text 28"/>
           <p:cNvSpPr txBox="1"/>
           <p:nvPr/>
         </p:nvSpPr>
         <p:spPr>
           <a:xfrm>
             <a:off x="5120640" y="1783080"/>
-            <a:ext cx="2743200" cy="274320"/>
+            <a:ext cx="1828800" cy="274320"/>
           </a:xfrm>
           <a:prstGeom prst="rect">
             <a:avLst/>
@@ -9881,7 +9920,7 @@
                 <a:ea typeface="Arial" pitchFamily="34" charset="-122"/>
                 <a:cs typeface="Arial" pitchFamily="34" charset="-120"/>
               </a:rPr>
-              <a:t>Choose a role</a:t>
+              <a:t>Manage access</a:t>
             </a:r>
             <a:endParaRPr lang="en-US" sz="1100" dirty="0"/>
           </a:p>
@@ -9889,14 +9928,269 @@
       </p:sp>
       <p:sp>
         <p:nvSpPr>
-          <p:cNvPr id="30" name="Shape 28"/>
+          <p:cNvPr id="31" name="Shape 29"/>
           <p:cNvSpPr/>
           <p:nvPr/>
         </p:nvSpPr>
         <p:spPr>
           <a:xfrm>
-            <a:off x="5120640" y="2194560"/>
-            <a:ext cx="3337560" cy="292608"/>
+            <a:off x="6903720" y="1783080"/>
+            <a:ext cx="749808" cy="256032"/>
+          </a:xfrm>
+          <a:prstGeom prst="rect">
+            <a:avLst/>
+          </a:prstGeom>
+          <a:solidFill>
+            <a:srgbClr val="F6F8FA"/>
+          </a:solidFill>
+          <a:ln w="12700">
+            <a:solidFill>
+              <a:srgbClr val="D0D7DE"/>
+            </a:solidFill>
+            <a:prstDash val="solid"/>
+          </a:ln>
+        </p:spPr>
+      </p:sp>
+      <p:sp>
+        <p:nvSpPr>
+          <p:cNvPr id="32" name="Text 30"/>
+          <p:cNvSpPr txBox="1"/>
+          <p:nvPr/>
+        </p:nvSpPr>
+        <p:spPr>
+          <a:xfrm>
+            <a:off x="6903720" y="1783080"/>
+            <a:ext cx="749808" cy="256032"/>
+          </a:xfrm>
+          <a:prstGeom prst="rect">
+            <a:avLst/>
+          </a:prstGeom>
+          <a:noFill/>
+          <a:ln/>
+        </p:spPr>
+        <p:txBody>
+          <a:bodyPr wrap="square" lIns="0" tIns="0" rIns="0" bIns="0" rtlCol="0" anchor="ctr"/>
+          <a:lstStyle/>
+          <a:p>
+            <a:pPr algn="ctr" indent="0" marL="0">
+              <a:buNone/>
+            </a:pPr>
+            <a:r>
+              <a:rPr lang="en-US" sz="800" b="1" dirty="0">
+                <a:solidFill>
+                  <a:srgbClr val="1F2328"/>
+                </a:solidFill>
+                <a:latin typeface="Arial" pitchFamily="34" charset="0"/>
+                <a:ea typeface="Arial" pitchFamily="34" charset="-122"/>
+                <a:cs typeface="Arial" pitchFamily="34" charset="-120"/>
+              </a:rPr>
+              <a:t>Add people</a:t>
+            </a:r>
+            <a:endParaRPr lang="en-US" sz="800" dirty="0"/>
+          </a:p>
+        </p:txBody>
+      </p:sp>
+      <p:sp>
+        <p:nvSpPr>
+          <p:cNvPr id="33" name="Shape 31"/>
+          <p:cNvSpPr/>
+          <p:nvPr/>
+        </p:nvSpPr>
+        <p:spPr>
+          <a:xfrm>
+            <a:off x="7726680" y="1783080"/>
+            <a:ext cx="749808" cy="256032"/>
+          </a:xfrm>
+          <a:prstGeom prst="rect">
+            <a:avLst/>
+          </a:prstGeom>
+          <a:solidFill>
+            <a:srgbClr val="1F883D"/>
+          </a:solidFill>
+          <a:ln w="12700">
+            <a:solidFill>
+              <a:srgbClr val="1F883D"/>
+            </a:solidFill>
+            <a:prstDash val="solid"/>
+          </a:ln>
+        </p:spPr>
+      </p:sp>
+      <p:sp>
+        <p:nvSpPr>
+          <p:cNvPr id="34" name="Text 32"/>
+          <p:cNvSpPr txBox="1"/>
+          <p:nvPr/>
+        </p:nvSpPr>
+        <p:spPr>
+          <a:xfrm>
+            <a:off x="7726680" y="1783080"/>
+            <a:ext cx="749808" cy="256032"/>
+          </a:xfrm>
+          <a:prstGeom prst="rect">
+            <a:avLst/>
+          </a:prstGeom>
+          <a:noFill/>
+          <a:ln/>
+        </p:spPr>
+        <p:txBody>
+          <a:bodyPr wrap="square" lIns="0" tIns="0" rIns="0" bIns="0" rtlCol="0" anchor="ctr"/>
+          <a:lstStyle/>
+          <a:p>
+            <a:pPr algn="ctr" indent="0" marL="0">
+              <a:buNone/>
+            </a:pPr>
+            <a:r>
+              <a:rPr lang="en-US" sz="800" b="1" dirty="0">
+                <a:solidFill>
+                  <a:srgbClr val="FFFFFF"/>
+                </a:solidFill>
+                <a:latin typeface="Arial" pitchFamily="34" charset="0"/>
+                <a:ea typeface="Arial" pitchFamily="34" charset="-122"/>
+                <a:cs typeface="Arial" pitchFamily="34" charset="-120"/>
+              </a:rPr>
+              <a:t>Add teams</a:t>
+            </a:r>
+            <a:endParaRPr lang="en-US" sz="800" dirty="0"/>
+          </a:p>
+        </p:txBody>
+      </p:sp>
+      <p:sp>
+        <p:nvSpPr>
+          <p:cNvPr id="35" name="Shape 33"/>
+          <p:cNvSpPr/>
+          <p:nvPr/>
+        </p:nvSpPr>
+        <p:spPr>
+          <a:xfrm>
+            <a:off x="5120640" y="2240280"/>
+            <a:ext cx="3337560" cy="658368"/>
+          </a:xfrm>
+          <a:prstGeom prst="rect">
+            <a:avLst/>
+          </a:prstGeom>
+          <a:solidFill>
+            <a:srgbClr val="DDF4FF"/>
+          </a:solidFill>
+          <a:ln w="12700">
+            <a:solidFill>
+              <a:srgbClr val="54AEFF"/>
+            </a:solidFill>
+            <a:prstDash val="solid"/>
+          </a:ln>
+        </p:spPr>
+      </p:sp>
+      <p:pic>
+        <p:nvPicPr>
+          <p:cNvPr id="36" name="Image 0" descr="preencoded.png">    </p:cNvPr>
+          <p:cNvPicPr>
+            <a:picLocks noChangeAspect="1"/>
+          </p:cNvPicPr>
+          <p:nvPr/>
+        </p:nvPicPr>
+        <p:blipFill>
+          <a:blip r:embed="rId1"/>
+          <a:stretch>
+            <a:fillRect/>
+          </a:stretch>
+        </p:blipFill>
+        <p:spPr>
+          <a:xfrm>
+            <a:off x="5239512" y="2404872"/>
+            <a:ext cx="274320" cy="274320"/>
+          </a:xfrm>
+          <a:prstGeom prst="rect">
+            <a:avLst/>
+          </a:prstGeom>
+        </p:spPr>
+      </p:pic>
+      <p:sp>
+        <p:nvSpPr>
+          <p:cNvPr id="37" name="Text 34"/>
+          <p:cNvSpPr txBox="1"/>
+          <p:nvPr/>
+        </p:nvSpPr>
+        <p:spPr>
+          <a:xfrm>
+            <a:off x="5623560" y="2304288"/>
+            <a:ext cx="1645920" cy="256032"/>
+          </a:xfrm>
+          <a:prstGeom prst="rect">
+            <a:avLst/>
+          </a:prstGeom>
+          <a:noFill/>
+          <a:ln/>
+        </p:spPr>
+        <p:txBody>
+          <a:bodyPr wrap="square" lIns="0" tIns="0" rIns="0" bIns="0" rtlCol="0" anchor="t"/>
+          <a:lstStyle/>
+          <a:p>
+            <a:pPr indent="0" marL="0">
+              <a:buNone/>
+            </a:pPr>
+            <a:r>
+              <a:rPr lang="en-US" sz="1000" b="1" dirty="0">
+                <a:solidFill>
+                  <a:srgbClr val="1F2328"/>
+                </a:solidFill>
+                <a:latin typeface="Arial" pitchFamily="34" charset="0"/>
+                <a:ea typeface="Arial" pitchFamily="34" charset="-122"/>
+                <a:cs typeface="Arial" pitchFamily="34" charset="-120"/>
+              </a:rPr>
+              <a:t>wg-countdown</a:t>
+            </a:r>
+            <a:endParaRPr lang="en-US" sz="1000" dirty="0"/>
+          </a:p>
+        </p:txBody>
+      </p:sp>
+      <p:sp>
+        <p:nvSpPr>
+          <p:cNvPr id="38" name="Text 35"/>
+          <p:cNvSpPr txBox="1"/>
+          <p:nvPr/>
+        </p:nvSpPr>
+        <p:spPr>
+          <a:xfrm>
+            <a:off x="5623560" y="2560320"/>
+            <a:ext cx="1645920" cy="237744"/>
+          </a:xfrm>
+          <a:prstGeom prst="rect">
+            <a:avLst/>
+          </a:prstGeom>
+          <a:noFill/>
+          <a:ln/>
+        </p:spPr>
+        <p:txBody>
+          <a:bodyPr wrap="square" lIns="0" tIns="0" rIns="0" bIns="0" rtlCol="0" anchor="t"/>
+          <a:lstStyle/>
+          <a:p>
+            <a:pPr indent="0" marL="0">
+              <a:buNone/>
+            </a:pPr>
+            <a:r>
+              <a:rPr lang="en-US" sz="850" dirty="0">
+                <a:solidFill>
+                  <a:srgbClr val="59636E"/>
+                </a:solidFill>
+                <a:latin typeface="Arial" pitchFamily="34" charset="0"/>
+                <a:ea typeface="Arial" pitchFamily="34" charset="-122"/>
+                <a:cs typeface="Arial" pitchFamily="34" charset="-120"/>
+              </a:rPr>
+              <a:t>Team · 3 members</a:t>
+            </a:r>
+            <a:endParaRPr lang="en-US" sz="850" dirty="0"/>
+          </a:p>
+        </p:txBody>
+      </p:sp>
+      <p:sp>
+        <p:nvSpPr>
+          <p:cNvPr id="39" name="Shape 36"/>
+          <p:cNvSpPr/>
+          <p:nvPr/>
+        </p:nvSpPr>
+        <p:spPr>
+          <a:xfrm>
+            <a:off x="7452360" y="2432304"/>
+            <a:ext cx="914400" cy="274320"/>
           </a:xfrm>
           <a:prstGeom prst="rect">
             <a:avLst/>
@@ -9914,39 +10208,14 @@
       </p:sp>
       <p:sp>
         <p:nvSpPr>
-          <p:cNvPr id="31" name="Shape 29"/>
-          <p:cNvSpPr/>
-          <p:nvPr/>
-        </p:nvSpPr>
-        <p:spPr>
-          <a:xfrm>
-            <a:off x="5212080" y="2276856"/>
-            <a:ext cx="128016" cy="128016"/>
-          </a:xfrm>
-          <a:prstGeom prst="ellipse">
-            <a:avLst/>
-          </a:prstGeom>
-          <a:solidFill>
-            <a:srgbClr val="FFFFFF"/>
-          </a:solidFill>
-          <a:ln w="12700">
-            <a:solidFill>
-              <a:srgbClr val="D0D7DE"/>
-            </a:solidFill>
-            <a:prstDash val="solid"/>
-          </a:ln>
-        </p:spPr>
-      </p:sp>
-      <p:sp>
-        <p:nvSpPr>
-          <p:cNvPr id="32" name="Text 30"/>
-          <p:cNvSpPr txBox="1"/>
-          <p:nvPr/>
-        </p:nvSpPr>
-        <p:spPr>
-          <a:xfrm>
-            <a:off x="5440680" y="2194560"/>
-            <a:ext cx="1828800" cy="292608"/>
+          <p:cNvPr id="40" name="Text 37"/>
+          <p:cNvSpPr txBox="1"/>
+          <p:nvPr/>
+        </p:nvSpPr>
+        <p:spPr>
+          <a:xfrm>
+            <a:off x="7452360" y="2432304"/>
+            <a:ext cx="914400" cy="274320"/>
           </a:xfrm>
           <a:prstGeom prst="rect">
             <a:avLst/>
@@ -9958,11 +10227,11 @@
           <a:bodyPr wrap="square" lIns="0" tIns="0" rIns="0" bIns="0" rtlCol="0" anchor="ctr"/>
           <a:lstStyle/>
           <a:p>
-            <a:pPr indent="0" marL="0">
-              <a:buNone/>
-            </a:pPr>
-            <a:r>
-              <a:rPr lang="en-US" sz="950" dirty="0">
+            <a:pPr algn="ctr" indent="0" marL="0">
+              <a:buNone/>
+            </a:pPr>
+            <a:r>
+              <a:rPr lang="en-US" sz="850" b="1" dirty="0">
                 <a:solidFill>
                   <a:srgbClr val="1F2328"/>
                 </a:solidFill>
@@ -9970,446 +10239,26 @@
                 <a:ea typeface="Arial" pitchFamily="34" charset="-122"/>
                 <a:cs typeface="Arial" pitchFamily="34" charset="-120"/>
               </a:rPr>
-              <a:t>Read</a:t>
-            </a:r>
-            <a:endParaRPr lang="en-US" sz="950" dirty="0"/>
-          </a:p>
-        </p:txBody>
-      </p:sp>
-      <p:sp>
-        <p:nvSpPr>
-          <p:cNvPr id="33" name="Shape 31"/>
-          <p:cNvSpPr/>
-          <p:nvPr/>
-        </p:nvSpPr>
-        <p:spPr>
-          <a:xfrm>
-            <a:off x="5120640" y="2523744"/>
-            <a:ext cx="3337560" cy="292608"/>
-          </a:xfrm>
-          <a:prstGeom prst="rect">
-            <a:avLst/>
-          </a:prstGeom>
-          <a:solidFill>
-            <a:srgbClr val="FFFFFF"/>
-          </a:solidFill>
-          <a:ln w="12700">
-            <a:solidFill>
-              <a:srgbClr val="D0D7DE"/>
-            </a:solidFill>
-            <a:prstDash val="solid"/>
-          </a:ln>
-        </p:spPr>
-      </p:sp>
-      <p:sp>
-        <p:nvSpPr>
-          <p:cNvPr id="34" name="Shape 32"/>
-          <p:cNvSpPr/>
-          <p:nvPr/>
-        </p:nvSpPr>
-        <p:spPr>
-          <a:xfrm>
-            <a:off x="5212080" y="2606040"/>
-            <a:ext cx="128016" cy="128016"/>
-          </a:xfrm>
-          <a:prstGeom prst="ellipse">
-            <a:avLst/>
-          </a:prstGeom>
-          <a:solidFill>
-            <a:srgbClr val="FFFFFF"/>
-          </a:solidFill>
-          <a:ln w="12700">
-            <a:solidFill>
-              <a:srgbClr val="D0D7DE"/>
-            </a:solidFill>
-            <a:prstDash val="solid"/>
-          </a:ln>
-        </p:spPr>
-      </p:sp>
-      <p:sp>
-        <p:nvSpPr>
-          <p:cNvPr id="35" name="Text 33"/>
-          <p:cNvSpPr txBox="1"/>
-          <p:nvPr/>
-        </p:nvSpPr>
-        <p:spPr>
-          <a:xfrm>
-            <a:off x="5440680" y="2523744"/>
-            <a:ext cx="1828800" cy="292608"/>
-          </a:xfrm>
-          <a:prstGeom prst="rect">
-            <a:avLst/>
-          </a:prstGeom>
-          <a:noFill/>
-          <a:ln/>
-        </p:spPr>
-        <p:txBody>
-          <a:bodyPr wrap="square" lIns="0" tIns="0" rIns="0" bIns="0" rtlCol="0" anchor="ctr"/>
-          <a:lstStyle/>
-          <a:p>
-            <a:pPr indent="0" marL="0">
-              <a:buNone/>
-            </a:pPr>
-            <a:r>
-              <a:rPr lang="en-US" sz="950" dirty="0">
-                <a:solidFill>
-                  <a:srgbClr val="1F2328"/>
-                </a:solidFill>
-                <a:latin typeface="Arial" pitchFamily="34" charset="0"/>
-                <a:ea typeface="Arial" pitchFamily="34" charset="-122"/>
-                <a:cs typeface="Arial" pitchFamily="34" charset="-120"/>
-              </a:rPr>
-              <a:t>Triage</a:t>
-            </a:r>
-            <a:endParaRPr lang="en-US" sz="950" dirty="0"/>
-          </a:p>
-        </p:txBody>
-      </p:sp>
-      <p:sp>
-        <p:nvSpPr>
-          <p:cNvPr id="36" name="Shape 34"/>
-          <p:cNvSpPr/>
-          <p:nvPr/>
-        </p:nvSpPr>
-        <p:spPr>
-          <a:xfrm>
-            <a:off x="5120640" y="2852928"/>
-            <a:ext cx="3337560" cy="292608"/>
-          </a:xfrm>
-          <a:prstGeom prst="rect">
-            <a:avLst/>
-          </a:prstGeom>
-          <a:solidFill>
-            <a:srgbClr val="DDF4FF"/>
-          </a:solidFill>
-          <a:ln w="12700">
-            <a:solidFill>
-              <a:srgbClr val="54AEFF"/>
-            </a:solidFill>
-            <a:prstDash val="solid"/>
-          </a:ln>
-        </p:spPr>
-      </p:sp>
-      <p:sp>
-        <p:nvSpPr>
-          <p:cNvPr id="37" name="Shape 35"/>
-          <p:cNvSpPr/>
-          <p:nvPr/>
-        </p:nvSpPr>
-        <p:spPr>
-          <a:xfrm>
-            <a:off x="5212080" y="2935224"/>
-            <a:ext cx="128016" cy="128016"/>
-          </a:xfrm>
-          <a:prstGeom prst="ellipse">
-            <a:avLst/>
-          </a:prstGeom>
-          <a:solidFill>
-            <a:srgbClr val="FFFFFF"/>
-          </a:solidFill>
-          <a:ln w="50800">
-            <a:solidFill>
-              <a:srgbClr val="0078D4"/>
-            </a:solidFill>
-            <a:prstDash val="solid"/>
-          </a:ln>
-        </p:spPr>
-      </p:sp>
-      <p:sp>
-        <p:nvSpPr>
-          <p:cNvPr id="38" name="Text 36"/>
-          <p:cNvSpPr txBox="1"/>
-          <p:nvPr/>
-        </p:nvSpPr>
-        <p:spPr>
-          <a:xfrm>
-            <a:off x="5440680" y="2852928"/>
-            <a:ext cx="1828800" cy="292608"/>
-          </a:xfrm>
-          <a:prstGeom prst="rect">
-            <a:avLst/>
-          </a:prstGeom>
-          <a:noFill/>
-          <a:ln/>
-        </p:spPr>
-        <p:txBody>
-          <a:bodyPr wrap="square" lIns="0" tIns="0" rIns="0" bIns="0" rtlCol="0" anchor="ctr"/>
-          <a:lstStyle/>
-          <a:p>
-            <a:pPr indent="0" marL="0">
-              <a:buNone/>
-            </a:pPr>
-            <a:r>
-              <a:rPr lang="en-US" sz="950" b="1" dirty="0">
-                <a:solidFill>
-                  <a:srgbClr val="1F2328"/>
-                </a:solidFill>
-                <a:latin typeface="Arial" pitchFamily="34" charset="0"/>
-                <a:ea typeface="Arial" pitchFamily="34" charset="-122"/>
-                <a:cs typeface="Arial" pitchFamily="34" charset="-120"/>
-              </a:rPr>
-              <a:t>Write</a:t>
-            </a:r>
-            <a:endParaRPr lang="en-US" sz="950" dirty="0"/>
-          </a:p>
-        </p:txBody>
-      </p:sp>
-      <p:sp>
-        <p:nvSpPr>
-          <p:cNvPr id="39" name="Shape 37"/>
-          <p:cNvSpPr/>
-          <p:nvPr/>
-        </p:nvSpPr>
-        <p:spPr>
-          <a:xfrm>
-            <a:off x="5120640" y="3182112"/>
-            <a:ext cx="3337560" cy="292608"/>
-          </a:xfrm>
-          <a:prstGeom prst="rect">
-            <a:avLst/>
-          </a:prstGeom>
-          <a:solidFill>
-            <a:srgbClr val="FFFFFF"/>
-          </a:solidFill>
-          <a:ln w="12700">
-            <a:solidFill>
-              <a:srgbClr val="D0D7DE"/>
-            </a:solidFill>
-            <a:prstDash val="solid"/>
-          </a:ln>
-        </p:spPr>
-      </p:sp>
-      <p:sp>
-        <p:nvSpPr>
-          <p:cNvPr id="40" name="Shape 38"/>
-          <p:cNvSpPr/>
-          <p:nvPr/>
-        </p:nvSpPr>
-        <p:spPr>
-          <a:xfrm>
-            <a:off x="5212080" y="3264408"/>
-            <a:ext cx="128016" cy="128016"/>
-          </a:xfrm>
-          <a:prstGeom prst="ellipse">
-            <a:avLst/>
-          </a:prstGeom>
-          <a:solidFill>
-            <a:srgbClr val="FFFFFF"/>
-          </a:solidFill>
-          <a:ln w="12700">
-            <a:solidFill>
-              <a:srgbClr val="D0D7DE"/>
-            </a:solidFill>
-            <a:prstDash val="solid"/>
-          </a:ln>
-        </p:spPr>
-      </p:sp>
-      <p:sp>
-        <p:nvSpPr>
-          <p:cNvPr id="41" name="Text 39"/>
-          <p:cNvSpPr txBox="1"/>
-          <p:nvPr/>
-        </p:nvSpPr>
-        <p:spPr>
-          <a:xfrm>
-            <a:off x="5440680" y="3182112"/>
-            <a:ext cx="1828800" cy="292608"/>
-          </a:xfrm>
-          <a:prstGeom prst="rect">
-            <a:avLst/>
-          </a:prstGeom>
-          <a:noFill/>
-          <a:ln/>
-        </p:spPr>
-        <p:txBody>
-          <a:bodyPr wrap="square" lIns="0" tIns="0" rIns="0" bIns="0" rtlCol="0" anchor="ctr"/>
-          <a:lstStyle/>
-          <a:p>
-            <a:pPr indent="0" marL="0">
-              <a:buNone/>
-            </a:pPr>
-            <a:r>
-              <a:rPr lang="en-US" sz="950" dirty="0">
-                <a:solidFill>
-                  <a:srgbClr val="1F2328"/>
-                </a:solidFill>
-                <a:latin typeface="Arial" pitchFamily="34" charset="0"/>
-                <a:ea typeface="Arial" pitchFamily="34" charset="-122"/>
-                <a:cs typeface="Arial" pitchFamily="34" charset="-120"/>
-              </a:rPr>
-              <a:t>Maintain</a:t>
-            </a:r>
-            <a:endParaRPr lang="en-US" sz="950" dirty="0"/>
-          </a:p>
-        </p:txBody>
-      </p:sp>
-      <p:sp>
-        <p:nvSpPr>
-          <p:cNvPr id="42" name="Shape 40"/>
-          <p:cNvSpPr/>
-          <p:nvPr/>
-        </p:nvSpPr>
-        <p:spPr>
-          <a:xfrm>
-            <a:off x="5120640" y="3511296"/>
-            <a:ext cx="3337560" cy="292608"/>
-          </a:xfrm>
-          <a:prstGeom prst="rect">
-            <a:avLst/>
-          </a:prstGeom>
-          <a:solidFill>
-            <a:srgbClr val="FFFFFF"/>
-          </a:solidFill>
-          <a:ln w="12700">
-            <a:solidFill>
-              <a:srgbClr val="D0D7DE"/>
-            </a:solidFill>
-            <a:prstDash val="solid"/>
-          </a:ln>
-        </p:spPr>
-      </p:sp>
-      <p:sp>
-        <p:nvSpPr>
-          <p:cNvPr id="43" name="Shape 41"/>
-          <p:cNvSpPr/>
-          <p:nvPr/>
-        </p:nvSpPr>
-        <p:spPr>
-          <a:xfrm>
-            <a:off x="5212080" y="3593592"/>
-            <a:ext cx="128016" cy="128016"/>
-          </a:xfrm>
-          <a:prstGeom prst="ellipse">
-            <a:avLst/>
-          </a:prstGeom>
-          <a:solidFill>
-            <a:srgbClr val="FFFFFF"/>
-          </a:solidFill>
-          <a:ln w="12700">
-            <a:solidFill>
-              <a:srgbClr val="D0D7DE"/>
-            </a:solidFill>
-            <a:prstDash val="solid"/>
-          </a:ln>
-        </p:spPr>
-      </p:sp>
-      <p:sp>
-        <p:nvSpPr>
-          <p:cNvPr id="44" name="Text 42"/>
-          <p:cNvSpPr txBox="1"/>
-          <p:nvPr/>
-        </p:nvSpPr>
-        <p:spPr>
-          <a:xfrm>
-            <a:off x="5440680" y="3511296"/>
-            <a:ext cx="1828800" cy="292608"/>
-          </a:xfrm>
-          <a:prstGeom prst="rect">
-            <a:avLst/>
-          </a:prstGeom>
-          <a:noFill/>
-          <a:ln/>
-        </p:spPr>
-        <p:txBody>
-          <a:bodyPr wrap="square" lIns="0" tIns="0" rIns="0" bIns="0" rtlCol="0" anchor="ctr"/>
-          <a:lstStyle/>
-          <a:p>
-            <a:pPr indent="0" marL="0">
-              <a:buNone/>
-            </a:pPr>
-            <a:r>
-              <a:rPr lang="en-US" sz="950" dirty="0">
-                <a:solidFill>
-                  <a:srgbClr val="1F2328"/>
-                </a:solidFill>
-                <a:latin typeface="Arial" pitchFamily="34" charset="0"/>
-                <a:ea typeface="Arial" pitchFamily="34" charset="-122"/>
-                <a:cs typeface="Arial" pitchFamily="34" charset="-120"/>
-              </a:rPr>
-              <a:t>Admin</a:t>
-            </a:r>
-            <a:endParaRPr lang="en-US" sz="950" dirty="0"/>
-          </a:p>
-        </p:txBody>
-      </p:sp>
-      <p:sp>
-        <p:nvSpPr>
-          <p:cNvPr id="45" name="Shape 43"/>
-          <p:cNvSpPr/>
-          <p:nvPr/>
-        </p:nvSpPr>
-        <p:spPr>
-          <a:xfrm>
-            <a:off x="5120640" y="3886200"/>
+              <a:t>Role: Write  ▾</a:t>
+            </a:r>
+            <a:endParaRPr lang="en-US" sz="850" dirty="0"/>
+          </a:p>
+        </p:txBody>
+      </p:sp>
+      <p:sp>
+        <p:nvSpPr>
+          <p:cNvPr id="41" name="Text 38"/>
+          <p:cNvSpPr txBox="1"/>
+          <p:nvPr/>
+        </p:nvSpPr>
+        <p:spPr>
+          <a:xfrm>
+            <a:off x="5120640" y="3063240"/>
             <a:ext cx="3337560" cy="274320"/>
           </a:xfrm>
           <a:prstGeom prst="rect">
             <a:avLst/>
           </a:prstGeom>
-          <a:solidFill>
-            <a:srgbClr val="1F883D"/>
-          </a:solidFill>
-          <a:ln w="12700">
-            <a:solidFill>
-              <a:srgbClr val="1F883D"/>
-            </a:solidFill>
-            <a:prstDash val="solid"/>
-          </a:ln>
-        </p:spPr>
-      </p:sp>
-      <p:sp>
-        <p:nvSpPr>
-          <p:cNvPr id="46" name="Text 44"/>
-          <p:cNvSpPr txBox="1"/>
-          <p:nvPr/>
-        </p:nvSpPr>
-        <p:spPr>
-          <a:xfrm>
-            <a:off x="5120640" y="3886200"/>
-            <a:ext cx="3337560" cy="274320"/>
-          </a:xfrm>
-          <a:prstGeom prst="rect">
-            <a:avLst/>
-          </a:prstGeom>
-          <a:noFill/>
-          <a:ln/>
-        </p:spPr>
-        <p:txBody>
-          <a:bodyPr wrap="square" lIns="0" tIns="0" rIns="0" bIns="0" rtlCol="0" anchor="ctr"/>
-          <a:lstStyle/>
-          <a:p>
-            <a:pPr algn="ctr" indent="0" marL="0">
-              <a:buNone/>
-            </a:pPr>
-            <a:r>
-              <a:rPr lang="en-US" sz="900" b="1" dirty="0">
-                <a:solidFill>
-                  <a:srgbClr val="FFFFFF"/>
-                </a:solidFill>
-                <a:latin typeface="Arial" pitchFamily="34" charset="0"/>
-                <a:ea typeface="Arial" pitchFamily="34" charset="-122"/>
-                <a:cs typeface="Arial" pitchFamily="34" charset="-120"/>
-              </a:rPr>
-              <a:t>Add name to this repository</a:t>
-            </a:r>
-            <a:endParaRPr lang="en-US" sz="900" dirty="0"/>
-          </a:p>
-        </p:txBody>
-      </p:sp>
-      <p:sp>
-        <p:nvSpPr>
-          <p:cNvPr id="47" name="Text 45"/>
-          <p:cNvSpPr txBox="1"/>
-          <p:nvPr/>
-        </p:nvSpPr>
-        <p:spPr>
-          <a:xfrm>
-            <a:off x="457200" y="4480560"/>
-            <a:ext cx="8229600" cy="365760"/>
-          </a:xfrm>
-          <a:prstGeom prst="rect">
-            <a:avLst/>
-          </a:prstGeom>
           <a:noFill/>
           <a:ln/>
         </p:spPr>
@@ -10421,15 +10270,96 @@
               <a:buNone/>
             </a:pPr>
             <a:r>
-              <a:rPr lang="en-US" sz="1050" dirty="0">
-                <a:solidFill>
-                  <a:srgbClr val="5A6B7B"/>
+              <a:rPr lang="en-US" sz="1000" b="1" dirty="0">
+                <a:solidFill>
+                  <a:srgbClr val="1A4A70"/>
                 </a:solidFill>
                 <a:latin typeface="Meiryo" pitchFamily="34" charset="0"/>
                 <a:ea typeface="Meiryo" pitchFamily="34" charset="-122"/>
                 <a:cs typeface="Meiryo" pitchFamily="34" charset="-120"/>
               </a:rPr>
-              <a:t>卒業・退部したら、この画面と org の「People」から外す（手順 5）。</a:t>
+              <a:t>人ごとではなく、チームに 1 回だけ付ける</a:t>
+            </a:r>
+            <a:endParaRPr lang="en-US" sz="1000" dirty="0"/>
+          </a:p>
+        </p:txBody>
+      </p:sp>
+      <p:sp>
+        <p:nvSpPr>
+          <p:cNvPr id="42" name="Text 39"/>
+          <p:cNvSpPr txBox="1"/>
+          <p:nvPr/>
+        </p:nvSpPr>
+        <p:spPr>
+          <a:xfrm>
+            <a:off x="5120640" y="3383280"/>
+            <a:ext cx="3337560" cy="548640"/>
+          </a:xfrm>
+          <a:prstGeom prst="rect">
+            <a:avLst/>
+          </a:prstGeom>
+          <a:noFill/>
+          <a:ln/>
+        </p:spPr>
+        <p:txBody>
+          <a:bodyPr wrap="square" lIns="0" tIns="0" rIns="0" bIns="0" rtlCol="0" anchor="t"/>
+          <a:lstStyle/>
+          <a:p>
+            <a:pPr indent="0" marL="0">
+              <a:lnSpc>
+                <a:spcPct val="120000"/>
+              </a:lnSpc>
+              <a:buNone/>
+            </a:pPr>
+            <a:r>
+              <a:rPr lang="en-US" sz="950" dirty="0">
+                <a:solidFill>
+                  <a:srgbClr val="1B2B3A"/>
+                </a:solidFill>
+                <a:latin typeface="Meiryo" pitchFamily="34" charset="0"/>
+                <a:ea typeface="Meiryo" pitchFamily="34" charset="-122"/>
+                <a:cs typeface="Meiryo" pitchFamily="34" charset="-120"/>
+              </a:rPr>
+              <a:t>メンバーの出入りはチームの「Members」で増減するだけ。リポジトリの設定は触らない。</a:t>
+            </a:r>
+            <a:endParaRPr lang="en-US" sz="950" dirty="0"/>
+          </a:p>
+        </p:txBody>
+      </p:sp>
+      <p:sp>
+        <p:nvSpPr>
+          <p:cNvPr id="43" name="Text 40"/>
+          <p:cNvSpPr txBox="1"/>
+          <p:nvPr/>
+        </p:nvSpPr>
+        <p:spPr>
+          <a:xfrm>
+            <a:off x="457200" y="4480560"/>
+            <a:ext cx="8229600" cy="365760"/>
+          </a:xfrm>
+          <a:prstGeom prst="rect">
+            <a:avLst/>
+          </a:prstGeom>
+          <a:noFill/>
+          <a:ln/>
+        </p:spPr>
+        <p:txBody>
+          <a:bodyPr wrap="square" lIns="0" tIns="0" rIns="0" bIns="0" rtlCol="0" anchor="t"/>
+          <a:lstStyle/>
+          <a:p>
+            <a:pPr indent="0" marL="0">
+              <a:buNone/>
+            </a:pPr>
+            <a:r>
+              <a:rPr lang="en-US" sz="1050" dirty="0">
+                <a:solidFill>
+                  <a:srgbClr val="5A6B7B"/>
+                </a:solidFill>
+                <a:latin typeface="Meiryo" pitchFamily="34" charset="0"/>
+                <a:ea typeface="Meiryo" pitchFamily="34" charset="-122"/>
+                <a:cs typeface="Meiryo" pitchFamily="34" charset="-120"/>
+              </a:rPr>
+              <a:t>卒業・退部したら org から外す。すべてのチームからも外れる（手順 5）。</a:t>
             </a:r>
             <a:endParaRPr lang="en-US" sz="1050" dirty="0"/>
           </a:p>
@@ -12484,7 +12414,7 @@
                 <a:ea typeface="Meiryo" pitchFamily="34" charset="-122"/>
                 <a:cs typeface="Meiryo" pitchFamily="34" charset="-120"/>
               </a:rPr>
-              <a:t>メンバーが卒業・退部したら</a:t>
+              <a:t>メンバーが抜けたら</a:t>
             </a:r>
             <a:endParaRPr lang="en-US" sz="1400" dirty="0"/>
           </a:p>
@@ -12498,7 +12428,7 @@
         </p:nvSpPr>
         <p:spPr>
           <a:xfrm>
-            <a:off x="685800" y="2331720"/>
+            <a:off x="685800" y="2286000"/>
             <a:ext cx="310896" cy="310896"/>
           </a:xfrm>
           <a:prstGeom prst="ellipse">
@@ -12523,7 +12453,7 @@
         </p:nvSpPr>
         <p:spPr>
           <a:xfrm>
-            <a:off x="685800" y="2331720"/>
+            <a:off x="685800" y="2286000"/>
             <a:ext cx="310896" cy="310896"/>
           </a:xfrm>
           <a:prstGeom prst="rect">
@@ -12562,7 +12492,7 @@
         </p:nvSpPr>
         <p:spPr>
           <a:xfrm>
-            <a:off x="1124712" y="2340864"/>
+            <a:off x="1124712" y="2295144"/>
             <a:ext cx="3172968" cy="274320"/>
           </a:xfrm>
           <a:prstGeom prst="rect">
@@ -12587,7 +12517,7 @@
                 <a:ea typeface="Meiryo" pitchFamily="34" charset="-122"/>
                 <a:cs typeface="Meiryo" pitchFamily="34" charset="-120"/>
               </a:rPr>
-              <a:t>リポジトリから外す</a:t>
+              <a:t>WG を抜けるだけなら</a:t>
             </a:r>
             <a:endParaRPr lang="en-US" sz="1200" dirty="0"/>
           </a:p>
@@ -12601,8 +12531,8 @@
         </p:nvSpPr>
         <p:spPr>
           <a:xfrm>
-            <a:off x="1124712" y="2606040"/>
-            <a:ext cx="3172968" cy="438912"/>
+            <a:off x="1124712" y="2560320"/>
+            <a:ext cx="3172968" cy="512064"/>
           </a:xfrm>
           <a:prstGeom prst="rect">
             <a:avLst/>
@@ -12626,7 +12556,7 @@
                 <a:ea typeface="Meiryo" pitchFamily="34" charset="-122"/>
                 <a:cs typeface="Meiryo" pitchFamily="34" charset="-120"/>
               </a:rPr>
-              <a:t>Settings → Collaborators and teams → その人の行のゴミ箱</a:t>
+              <a:t>チームの「Members」から外す</a:t>
             </a:r>
             <a:endParaRPr lang="en-US" sz="1000" dirty="0"/>
           </a:p>
@@ -12640,7 +12570,7 @@
         </p:nvSpPr>
         <p:spPr>
           <a:xfrm>
-            <a:off x="685800" y="3063240"/>
+            <a:off x="685800" y="3090672"/>
             <a:ext cx="310896" cy="310896"/>
           </a:xfrm>
           <a:prstGeom prst="ellipse">
@@ -12665,7 +12595,7 @@
         </p:nvSpPr>
         <p:spPr>
           <a:xfrm>
-            <a:off x="685800" y="3063240"/>
+            <a:off x="685800" y="3090672"/>
             <a:ext cx="310896" cy="310896"/>
           </a:xfrm>
           <a:prstGeom prst="rect">
@@ -12704,7 +12634,7 @@
         </p:nvSpPr>
         <p:spPr>
           <a:xfrm>
-            <a:off x="1124712" y="3072384"/>
+            <a:off x="1124712" y="3099816"/>
             <a:ext cx="3172968" cy="274320"/>
           </a:xfrm>
           <a:prstGeom prst="rect">
@@ -12729,7 +12659,7 @@
                 <a:ea typeface="Meiryo" pitchFamily="34" charset="-122"/>
                 <a:cs typeface="Meiryo" pitchFamily="34" charset="-120"/>
               </a:rPr>
-              <a:t>org から外す</a:t>
+              <a:t>卒業・退部なら org から外す</a:t>
             </a:r>
             <a:endParaRPr lang="en-US" sz="1200" dirty="0"/>
           </a:p>
@@ -12743,8 +12673,8 @@
         </p:nvSpPr>
         <p:spPr>
           <a:xfrm>
-            <a:off x="1124712" y="3337560"/>
-            <a:ext cx="3172968" cy="438912"/>
+            <a:off x="1124712" y="3364992"/>
+            <a:ext cx="3172968" cy="512064"/>
           </a:xfrm>
           <a:prstGeom prst="rect">
             <a:avLst/>
@@ -12768,7 +12698,7 @@
                 <a:ea typeface="Meiryo" pitchFamily="34" charset="-122"/>
                 <a:cs typeface="Meiryo" pitchFamily="34" charset="-120"/>
               </a:rPr>
-              <a:t>org の「People」→ その人 →「Remove from organization」</a:t>
+              <a:t>org の「People」→ その人 →「Remove from organization」。チームからも外れる</a:t>
             </a:r>
             <a:endParaRPr lang="en-US" sz="1000" dirty="0"/>
           </a:p>
@@ -12782,7 +12712,7 @@
         </p:nvSpPr>
         <p:spPr>
           <a:xfrm>
-            <a:off x="685800" y="3794760"/>
+            <a:off x="685800" y="3895344"/>
             <a:ext cx="310896" cy="310896"/>
           </a:xfrm>
           <a:prstGeom prst="ellipse">
@@ -12807,7 +12737,7 @@
         </p:nvSpPr>
         <p:spPr>
           <a:xfrm>
-            <a:off x="685800" y="3794760"/>
+            <a:off x="685800" y="3895344"/>
             <a:ext cx="310896" cy="310896"/>
           </a:xfrm>
           <a:prstGeom prst="rect">
@@ -12846,7 +12776,7 @@
         </p:nvSpPr>
         <p:spPr>
           <a:xfrm>
-            <a:off x="1124712" y="3803904"/>
+            <a:off x="1124712" y="3904488"/>
             <a:ext cx="3172968" cy="274320"/>
           </a:xfrm>
           <a:prstGeom prst="rect">
@@ -12885,8 +12815,8 @@
         </p:nvSpPr>
         <p:spPr>
           <a:xfrm>
-            <a:off x="1124712" y="4069080"/>
-            <a:ext cx="3172968" cy="438912"/>
+            <a:off x="1124712" y="4169664"/>
+            <a:ext cx="3172968" cy="512064"/>
           </a:xfrm>
           <a:prstGeom prst="rect">
             <a:avLst/>
@@ -13044,7 +12974,7 @@
         </p:nvSpPr>
         <p:spPr>
           <a:xfrm>
-            <a:off x="4892040" y="2331720"/>
+            <a:off x="4892040" y="2286000"/>
             <a:ext cx="310896" cy="310896"/>
           </a:xfrm>
           <a:prstGeom prst="ellipse">
@@ -13069,7 +12999,7 @@
         </p:nvSpPr>
         <p:spPr>
           <a:xfrm>
-            <a:off x="4892040" y="2331720"/>
+            <a:off x="4892040" y="2286000"/>
             <a:ext cx="310896" cy="310896"/>
           </a:xfrm>
           <a:prstGeom prst="rect">
@@ -13108,7 +13038,7 @@
         </p:nvSpPr>
         <p:spPr>
           <a:xfrm>
-            <a:off x="5330952" y="2340864"/>
+            <a:off x="5330952" y="2295144"/>
             <a:ext cx="3172968" cy="274320"/>
           </a:xfrm>
           <a:prstGeom prst="rect">
@@ -13147,8 +13077,8 @@
         </p:nvSpPr>
         <p:spPr>
           <a:xfrm>
-            <a:off x="5330952" y="2606040"/>
-            <a:ext cx="3172968" cy="438912"/>
+            <a:off x="5330952" y="2560320"/>
+            <a:ext cx="3172968" cy="512064"/>
           </a:xfrm>
           <a:prstGeom prst="rect">
             <a:avLst/>
@@ -13186,7 +13116,7 @@
         </p:nvSpPr>
         <p:spPr>
           <a:xfrm>
-            <a:off x="4892040" y="3063240"/>
+            <a:off x="4892040" y="3090672"/>
             <a:ext cx="310896" cy="310896"/>
           </a:xfrm>
           <a:prstGeom prst="ellipse">
@@ -13211,7 +13141,7 @@
         </p:nvSpPr>
         <p:spPr>
           <a:xfrm>
-            <a:off x="4892040" y="3063240"/>
+            <a:off x="4892040" y="3090672"/>
             <a:ext cx="310896" cy="310896"/>
           </a:xfrm>
           <a:prstGeom prst="rect">
@@ -13250,7 +13180,7 @@
         </p:nvSpPr>
         <p:spPr>
           <a:xfrm>
-            <a:off x="5330952" y="3072384"/>
+            <a:off x="5330952" y="3099816"/>
             <a:ext cx="3172968" cy="274320"/>
           </a:xfrm>
           <a:prstGeom prst="rect">
@@ -13289,8 +13219,8 @@
         </p:nvSpPr>
         <p:spPr>
           <a:xfrm>
-            <a:off x="5330952" y="3337560"/>
-            <a:ext cx="3172968" cy="438912"/>
+            <a:off x="5330952" y="3364992"/>
+            <a:ext cx="3172968" cy="512064"/>
           </a:xfrm>
           <a:prstGeom prst="rect">
             <a:avLst/>
@@ -13314,7 +13244,7 @@
                 <a:ea typeface="Meiryo" pitchFamily="34" charset="-122"/>
                 <a:cs typeface="Meiryo" pitchFamily="34" charset="-120"/>
               </a:rPr>
-              <a:t>Settings のいちばん下 →「Archive this repository」</a:t>
+              <a:t>Settings のいちばん下 →「Archive this repository」。チームは消してよい</a:t>
             </a:r>
             <a:endParaRPr lang="en-US" sz="1000" dirty="0"/>
           </a:p>
@@ -13328,7 +13258,7 @@
         </p:nvSpPr>
         <p:spPr>
           <a:xfrm>
-            <a:off x="4892040" y="3794760"/>
+            <a:off x="4892040" y="3895344"/>
             <a:ext cx="310896" cy="310896"/>
           </a:xfrm>
           <a:prstGeom prst="ellipse">
@@ -13353,7 +13283,7 @@
         </p:nvSpPr>
         <p:spPr>
           <a:xfrm>
-            <a:off x="4892040" y="3794760"/>
+            <a:off x="4892040" y="3895344"/>
             <a:ext cx="310896" cy="310896"/>
           </a:xfrm>
           <a:prstGeom prst="rect">
@@ -13392,7 +13322,7 @@
         </p:nvSpPr>
         <p:spPr>
           <a:xfrm>
-            <a:off x="5330952" y="3803904"/>
+            <a:off x="5330952" y="3904488"/>
             <a:ext cx="3172968" cy="274320"/>
           </a:xfrm>
           <a:prstGeom prst="rect">
@@ -13431,8 +13361,8 @@
         </p:nvSpPr>
         <p:spPr>
           <a:xfrm>
-            <a:off x="5330952" y="4069080"/>
-            <a:ext cx="3172968" cy="438912"/>
+            <a:off x="5330952" y="4169664"/>
+            <a:ext cx="3172968" cy="512064"/>
           </a:xfrm>
           <a:prstGeom prst="rect">
             <a:avLst/>

--- a/docs/WG立ち上げガイド/01_リポジトリの作り方と運用.pptx
+++ b/docs/WG立ち上げガイド/01_リポジトリの作り方と運用.pptx
@@ -15,9 +15,10 @@
     <p:sldId id="263" r:id="rId9"/>
     <p:sldId id="264" r:id="rId10"/>
     <p:sldId id="265" r:id="rId11"/>
+    <p:sldId id="266" r:id="rId12"/>
   </p:sldIdLst>
   <p:notesMasterIdLst>
-    <p:notesMasterId r:id="rId12"/>
+    <p:notesMasterId r:id="rId13"/>
   </p:notesMasterIdLst>
   <p:sldSz cx="9144000" cy="5143500"/>
   <p:notesSz cx="5143500" cy="9144000"/>
@@ -599,7 +600,7 @@
           <a:p>
             <a:r>
               <a:rPr lang="en-US" dirty="0"/>
-              <a:t>homepage の自動デプロイも、権限を App Service 1 つに絞り、RG の hirahira には付けていません。WG でも同じ考え方で、GitHub Actions から届く範囲を WG の RG に閉じます。</a:t>
+              <a:t>まだ用意していない構成案です。WG のアプリは Container Apps で動かし、イメージは GitHub のコンテナレジストリ（ghcr.io）に置きます。WG ごとにリソースグループ（RG）を分け、homepage と DB がある hirahira には入れません。</a:t>
             </a:r>
             <a:endParaRPr lang="en-US" dirty="0"/>
           </a:p>
@@ -623,6 +624,94 @@
             <a:fld id="{F7021451-1387-4CA6-816F-3879F97B5CBC}" type="slidenum">
               <a:rPr lang="en-US"/>
               <a:t>10</a:t>
+            </a:fld>
+            <a:endParaRPr lang="en-US"/>
+          </a:p>
+        </p:txBody>
+      </p:sp>
+    </p:spTree>
+    <p:extLst>
+      <p:ext uri="{BB962C8B-B14F-4D97-AF65-F5344CB8AC3E}">
+        <p14:creationId xmlns:p14="http://schemas.microsoft.com/office/powerpoint/2010/main" val="1024086991"/>
+      </p:ext>
+    </p:extLst>
+  </p:cSld>
+  <p:clrMapOvr>
+    <a:masterClrMapping/>
+  </p:clrMapOvr>
+</p:notes>
+</file>
+
+<file path=ppt/notesSlides/notesSlide11.xml><?xml version="1.0" encoding="utf-8"?>
+<p:notes xmlns:a="http://schemas.openxmlformats.org/drawingml/2006/main" xmlns:r="http://schemas.openxmlformats.org/officeDocument/2006/relationships" xmlns:p="http://schemas.openxmlformats.org/presentationml/2006/main">
+  <p:cSld>
+    <p:spTree>
+      <p:nvGrpSpPr>
+        <p:cNvPr id="1" name=""/>
+        <p:cNvGrpSpPr/>
+        <p:nvPr/>
+      </p:nvGrpSpPr>
+      <p:grpSpPr>
+        <a:xfrm>
+          <a:off x="0" y="0"/>
+          <a:ext cx="0" cy="0"/>
+          <a:chOff x="0" y="0"/>
+          <a:chExt cx="0" cy="0"/>
+        </a:xfrm>
+      </p:grpSpPr>
+      <p:sp>
+        <p:nvSpPr>
+          <p:cNvPr id="2" name="Slide Image Placeholder 1"/>
+          <p:cNvSpPr>
+            <a:spLocks noGrp="1" noRot="1" noChangeAspect="1"/>
+          </p:cNvSpPr>
+          <p:nvPr>
+            <p:ph type="sldImg"/>
+          </p:nvPr>
+        </p:nvSpPr>
+        <p:spPr/>
+      </p:sp>
+      <p:sp>
+        <p:nvSpPr>
+          <p:cNvPr id="3" name="Notes Placeholder 2"/>
+          <p:cNvSpPr>
+            <a:spLocks noGrp="1"/>
+          </p:cNvSpPr>
+          <p:nvPr>
+            <p:ph type="body" idx="1"/>
+          </p:nvPr>
+        </p:nvSpPr>
+        <p:spPr/>
+        <p:txBody>
+          <a:bodyPr/>
+          <a:lstStyle/>
+          <a:p>
+            <a:r>
+              <a:rPr lang="en-US" dirty="0"/>
+              <a:t>homepage の自動デプロイも、権限を App Service 1 つに絞り、RG の hirahira には付けていません。WG でも同じ考え方で、GitHub Actions から届く範囲を WG の RG に閉じます。</a:t>
+            </a:r>
+            <a:endParaRPr lang="en-US" dirty="0"/>
+          </a:p>
+        </p:txBody>
+      </p:sp>
+      <p:sp>
+        <p:nvSpPr>
+          <p:cNvPr id="4" name="Slide Number Placeholder 3"/>
+          <p:cNvSpPr>
+            <a:spLocks noGrp="1"/>
+          </p:cNvSpPr>
+          <p:nvPr>
+            <p:ph type="sldNum" sz="quarter" idx="10"/>
+          </p:nvPr>
+        </p:nvSpPr>
+        <p:spPr/>
+        <p:txBody>
+          <a:bodyPr/>
+          <a:lstStyle/>
+          <a:p>
+            <a:fld id="{F7021451-1387-4CA6-816F-3879F97B5CBC}" type="slidenum">
+              <a:rPr lang="en-US"/>
+              <a:t>11</a:t>
             </a:fld>
             <a:endParaRPr lang="en-US"/>
           </a:p>
@@ -687,7 +776,7 @@
           <a:p>
             <a:r>
               <a:rPr lang="en-US" dirty="0"/>
-              <a:t>1〜4 は WG が立ち上がったときに一度だけ行います。メンバーが増えたらチームに足し、卒業・退部や WG の終了のときは 5 を行います。</a:t>
+              <a:t>1〜4 は WG が立ち上がったときに一度だけ行います。メンバーは本人がサイトの「WG に参加」から入るので、運営がチームに人を入れる作業はありません。抜けた人や卒業・退部、WG の終了のときは 5 を行います。</a:t>
             </a:r>
             <a:endParaRPr lang="en-US" dirty="0"/>
           </a:p>
@@ -1127,7 +1216,7 @@
           <a:p>
             <a:r>
               <a:rPr lang="en-US" dirty="0"/>
-              <a:t>「活動中」の WG だけが TOP の「活動中のWG」の件数に入ります。Webアプリの URL が空欄のうちは「作成中」ページに繋がります。</a:t>
+              <a:t>「GitHub のチーム」を入れた WG にだけ「WG に参加」が出ます。「活動中」の WG だけが TOP の「活動中のWG」の件数に入ります。Webアプリの URL が空欄のうちは「作成中」ページに繋がります。</a:t>
             </a:r>
             <a:endParaRPr lang="en-US" dirty="0"/>
           </a:p>
@@ -1215,7 +1304,7 @@
           <a:p>
             <a:r>
               <a:rPr lang="en-US" dirty="0"/>
-              <a:t>メンバーは佛教大学の学生なので、卒業で入れ替わります。GitHub は学生かどうかを確かめないので、外し忘れると卒業後も書き込めるままになります。アーカイブしたリポジトリは読み取り専用で残り、あとから元に戻せます。</a:t>
+              <a:t>メンバーかどうかは Classroom のクラブのクラスの名簿で決まります。クラブに登録するときに Classroom に入れておけば、その人は自分で WG に参加できます。卒業・退部した人は Classroom からも外してください。</a:t>
             </a:r>
             <a:endParaRPr lang="en-US" dirty="0"/>
           </a:p>
@@ -1303,7 +1392,7 @@
           <a:p>
             <a:r>
               <a:rPr lang="en-US" dirty="0"/>
-              <a:t>まだ用意していない構成案です。WG のアプリは Container Apps で動かし、イメージは GitHub のコンテナレジストリ（ghcr.io）に置きます。WG ごとにリソースグループ（RG）を分け、homepage と DB がある hirahira には入れません。</a:t>
+              <a:t>メンバーは佛教大学の学生なので、卒業で入れ替わります。GitHub は学生かどうかを確かめないので、外し忘れると卒業後も書き込めるままになります。アーカイブしたリポジトリは読み取り専用で残り、あとから元に戻せます。</a:t>
             </a:r>
             <a:endParaRPr lang="en-US" dirty="0"/>
           </a:p>
@@ -2540,6 +2629,1253 @@
                 <a:ea typeface="Consolas" pitchFamily="34" charset="-122"/>
                 <a:cs typeface="Consolas" pitchFamily="34" charset="-120"/>
               </a:rPr>
+              <a:t>// 01  ·  公開</a:t>
+            </a:r>
+            <a:endParaRPr lang="en-US" sz="1100" dirty="0"/>
+          </a:p>
+        </p:txBody>
+      </p:sp>
+      <p:sp>
+        <p:nvSpPr>
+          <p:cNvPr id="3" name="Text 1"/>
+          <p:cNvSpPr txBox="1"/>
+          <p:nvPr/>
+        </p:nvSpPr>
+        <p:spPr>
+          <a:xfrm>
+            <a:off x="457200" y="594360"/>
+            <a:ext cx="8229600" cy="594360"/>
+          </a:xfrm>
+          <a:prstGeom prst="rect">
+            <a:avLst/>
+          </a:prstGeom>
+          <a:noFill/>
+          <a:ln/>
+        </p:spPr>
+        <p:txBody>
+          <a:bodyPr wrap="square" lIns="0" tIns="0" rIns="0" bIns="0" rtlCol="0" anchor="ctr"/>
+          <a:lstStyle/>
+          <a:p>
+            <a:pPr indent="0" marL="0">
+              <a:buNone/>
+            </a:pPr>
+            <a:r>
+              <a:rPr lang="en-US" sz="2600" b="1" dirty="0">
+                <a:solidFill>
+                  <a:srgbClr val="001E3C"/>
+                </a:solidFill>
+                <a:latin typeface="Meiryo" pitchFamily="34" charset="0"/>
+                <a:ea typeface="Meiryo" pitchFamily="34" charset="-122"/>
+                <a:cs typeface="Meiryo" pitchFamily="34" charset="-120"/>
+              </a:rPr>
+              <a:t>アプリを動かす場所（構成案）</a:t>
+            </a:r>
+            <a:endParaRPr lang="en-US" sz="2600" dirty="0"/>
+          </a:p>
+        </p:txBody>
+      </p:sp>
+      <p:sp>
+        <p:nvSpPr>
+          <p:cNvPr id="4" name="Shape 2"/>
+          <p:cNvSpPr/>
+          <p:nvPr/>
+        </p:nvSpPr>
+        <p:spPr>
+          <a:xfrm>
+            <a:off x="7863840" y="777240"/>
+            <a:ext cx="822960" cy="237744"/>
+          </a:xfrm>
+          <a:prstGeom prst="roundRect">
+            <a:avLst>
+              <a:gd name="adj" fmla="val 50000"/>
+            </a:avLst>
+          </a:prstGeom>
+          <a:solidFill>
+            <a:srgbClr val="5BB8FF"/>
+          </a:solidFill>
+          <a:ln w="12700">
+            <a:solidFill>
+              <a:srgbClr val="5BB8FF"/>
+            </a:solidFill>
+            <a:prstDash val="solid"/>
+          </a:ln>
+        </p:spPr>
+      </p:sp>
+      <p:sp>
+        <p:nvSpPr>
+          <p:cNvPr id="5" name="Text 3"/>
+          <p:cNvSpPr txBox="1"/>
+          <p:nvPr/>
+        </p:nvSpPr>
+        <p:spPr>
+          <a:xfrm>
+            <a:off x="7863840" y="777240"/>
+            <a:ext cx="822960" cy="237744"/>
+          </a:xfrm>
+          <a:prstGeom prst="rect">
+            <a:avLst/>
+          </a:prstGeom>
+          <a:noFill/>
+          <a:ln/>
+        </p:spPr>
+        <p:txBody>
+          <a:bodyPr wrap="square" lIns="0" tIns="0" rIns="0" bIns="0" rtlCol="0" anchor="ctr"/>
+          <a:lstStyle/>
+          <a:p>
+            <a:pPr algn="ctr" indent="0" marL="0">
+              <a:buNone/>
+            </a:pPr>
+            <a:r>
+              <a:rPr lang="en-US" sz="900" b="1" dirty="0">
+                <a:solidFill>
+                  <a:srgbClr val="001E3C"/>
+                </a:solidFill>
+                <a:latin typeface="Meiryo" pitchFamily="34" charset="0"/>
+                <a:ea typeface="Meiryo" pitchFamily="34" charset="-122"/>
+                <a:cs typeface="Meiryo" pitchFamily="34" charset="-120"/>
+              </a:rPr>
+              <a:t>準備中</a:t>
+            </a:r>
+            <a:endParaRPr lang="en-US" sz="900" dirty="0"/>
+          </a:p>
+        </p:txBody>
+      </p:sp>
+      <p:sp>
+        <p:nvSpPr>
+          <p:cNvPr id="6" name="Shape 4"/>
+          <p:cNvSpPr/>
+          <p:nvPr/>
+        </p:nvSpPr>
+        <p:spPr>
+          <a:xfrm>
+            <a:off x="457200" y="1417320"/>
+            <a:ext cx="2560320" cy="3246120"/>
+          </a:xfrm>
+          <a:prstGeom prst="rect">
+            <a:avLst/>
+          </a:prstGeom>
+          <a:solidFill>
+            <a:srgbClr val="FFFFFF"/>
+          </a:solidFill>
+          <a:ln w="12700">
+            <a:solidFill>
+              <a:srgbClr val="FFFFFF"/>
+            </a:solidFill>
+            <a:prstDash val="solid"/>
+          </a:ln>
+          <a:effectLst>
+            <a:outerShdw sx="100000" sy="100000" kx="0" ky="0" algn="bl" rotWithShape="0" blurRad="76200" dist="25400" dir="5400000">
+              <a:srgbClr val="000000">
+                <a:alpha val="12000"/>
+              </a:srgbClr>
+            </a:outerShdw>
+          </a:effectLst>
+        </p:spPr>
+      </p:sp>
+      <p:pic>
+        <p:nvPicPr>
+          <p:cNvPr id="7" name="Image 0" descr="preencoded.png">    </p:cNvPr>
+          <p:cNvPicPr>
+            <a:picLocks noChangeAspect="1"/>
+          </p:cNvPicPr>
+          <p:nvPr/>
+        </p:nvPicPr>
+        <p:blipFill>
+          <a:blip r:embed="rId1"/>
+          <a:stretch>
+            <a:fillRect/>
+          </a:stretch>
+        </p:blipFill>
+        <p:spPr>
+          <a:xfrm>
+            <a:off x="685800" y="1618488"/>
+            <a:ext cx="292608" cy="292608"/>
+          </a:xfrm>
+          <a:prstGeom prst="rect">
+            <a:avLst/>
+          </a:prstGeom>
+        </p:spPr>
+      </p:pic>
+      <p:sp>
+        <p:nvSpPr>
+          <p:cNvPr id="8" name="Text 5"/>
+          <p:cNvSpPr txBox="1"/>
+          <p:nvPr/>
+        </p:nvSpPr>
+        <p:spPr>
+          <a:xfrm>
+            <a:off x="1078992" y="1600200"/>
+            <a:ext cx="1645920" cy="329184"/>
+          </a:xfrm>
+          <a:prstGeom prst="rect">
+            <a:avLst/>
+          </a:prstGeom>
+          <a:noFill/>
+          <a:ln/>
+        </p:spPr>
+        <p:txBody>
+          <a:bodyPr wrap="square" lIns="0" tIns="0" rIns="0" bIns="0" rtlCol="0" anchor="ctr"/>
+          <a:lstStyle/>
+          <a:p>
+            <a:pPr indent="0" marL="0">
+              <a:buNone/>
+            </a:pPr>
+            <a:r>
+              <a:rPr lang="en-US" sz="1500" b="1" dirty="0">
+                <a:solidFill>
+                  <a:srgbClr val="001E3C"/>
+                </a:solidFill>
+                <a:latin typeface="Meiryo" pitchFamily="34" charset="0"/>
+                <a:ea typeface="Meiryo" pitchFamily="34" charset="-122"/>
+                <a:cs typeface="Meiryo" pitchFamily="34" charset="-120"/>
+              </a:rPr>
+              <a:t>GitHub</a:t>
+            </a:r>
+            <a:endParaRPr lang="en-US" sz="1500" dirty="0"/>
+          </a:p>
+        </p:txBody>
+      </p:sp>
+      <p:sp>
+        <p:nvSpPr>
+          <p:cNvPr id="9" name="Shape 6"/>
+          <p:cNvSpPr/>
+          <p:nvPr/>
+        </p:nvSpPr>
+        <p:spPr>
+          <a:xfrm>
+            <a:off x="685800" y="2148840"/>
+            <a:ext cx="2103120" cy="603504"/>
+          </a:xfrm>
+          <a:prstGeom prst="rect">
+            <a:avLst/>
+          </a:prstGeom>
+          <a:solidFill>
+            <a:srgbClr val="F2F5F8"/>
+          </a:solidFill>
+          <a:ln w="12700">
+            <a:solidFill>
+              <a:srgbClr val="DDDDDD"/>
+            </a:solidFill>
+            <a:prstDash val="solid"/>
+          </a:ln>
+        </p:spPr>
+      </p:sp>
+      <p:sp>
+        <p:nvSpPr>
+          <p:cNvPr id="10" name="Text 7"/>
+          <p:cNvSpPr txBox="1"/>
+          <p:nvPr/>
+        </p:nvSpPr>
+        <p:spPr>
+          <a:xfrm>
+            <a:off x="822960" y="2221992"/>
+            <a:ext cx="1828800" cy="237744"/>
+          </a:xfrm>
+          <a:prstGeom prst="rect">
+            <a:avLst/>
+          </a:prstGeom>
+          <a:noFill/>
+          <a:ln/>
+        </p:spPr>
+        <p:txBody>
+          <a:bodyPr wrap="square" lIns="0" tIns="0" rIns="0" bIns="0" rtlCol="0" anchor="t"/>
+          <a:lstStyle/>
+          <a:p>
+            <a:pPr indent="0" marL="0">
+              <a:buNone/>
+            </a:pPr>
+            <a:r>
+              <a:rPr lang="en-US" sz="1100" b="1" dirty="0">
+                <a:solidFill>
+                  <a:srgbClr val="1A4A70"/>
+                </a:solidFill>
+                <a:latin typeface="Consolas" pitchFamily="34" charset="0"/>
+                <a:ea typeface="Consolas" pitchFamily="34" charset="-122"/>
+                <a:cs typeface="Consolas" pitchFamily="34" charset="-120"/>
+              </a:rPr>
+              <a:t>wg-&lt;名前&gt;</a:t>
+            </a:r>
+            <a:endParaRPr lang="en-US" sz="1100" dirty="0"/>
+          </a:p>
+        </p:txBody>
+      </p:sp>
+      <p:sp>
+        <p:nvSpPr>
+          <p:cNvPr id="11" name="Text 8"/>
+          <p:cNvSpPr txBox="1"/>
+          <p:nvPr/>
+        </p:nvSpPr>
+        <p:spPr>
+          <a:xfrm>
+            <a:off x="822960" y="2468880"/>
+            <a:ext cx="1828800" cy="219456"/>
+          </a:xfrm>
+          <a:prstGeom prst="rect">
+            <a:avLst/>
+          </a:prstGeom>
+          <a:noFill/>
+          <a:ln/>
+        </p:spPr>
+        <p:txBody>
+          <a:bodyPr wrap="square" lIns="0" tIns="0" rIns="0" bIns="0" rtlCol="0" anchor="t"/>
+          <a:lstStyle/>
+          <a:p>
+            <a:pPr indent="0" marL="0">
+              <a:buNone/>
+            </a:pPr>
+            <a:r>
+              <a:rPr lang="en-US" sz="1000" dirty="0">
+                <a:solidFill>
+                  <a:srgbClr val="1B2B3A"/>
+                </a:solidFill>
+                <a:latin typeface="Meiryo" pitchFamily="34" charset="0"/>
+                <a:ea typeface="Meiryo" pitchFamily="34" charset="-122"/>
+                <a:cs typeface="Meiryo" pitchFamily="34" charset="-120"/>
+              </a:rPr>
+              <a:t>WG のリポジトリ</a:t>
+            </a:r>
+            <a:endParaRPr lang="en-US" sz="1000" dirty="0"/>
+          </a:p>
+        </p:txBody>
+      </p:sp>
+      <p:sp>
+        <p:nvSpPr>
+          <p:cNvPr id="12" name="Shape 9"/>
+          <p:cNvSpPr/>
+          <p:nvPr/>
+        </p:nvSpPr>
+        <p:spPr>
+          <a:xfrm>
+            <a:off x="1737360" y="2770632"/>
+            <a:ext cx="0" cy="237744"/>
+          </a:xfrm>
+          <a:prstGeom prst="line">
+            <a:avLst/>
+          </a:prstGeom>
+          <a:noFill/>
+          <a:ln w="15875">
+            <a:solidFill>
+              <a:srgbClr val="1A4A70"/>
+            </a:solidFill>
+            <a:prstDash val="solid"/>
+            <a:tailEnd type="triangle"/>
+          </a:ln>
+        </p:spPr>
+      </p:sp>
+      <p:sp>
+        <p:nvSpPr>
+          <p:cNvPr id="13" name="Shape 10"/>
+          <p:cNvSpPr/>
+          <p:nvPr/>
+        </p:nvSpPr>
+        <p:spPr>
+          <a:xfrm>
+            <a:off x="685800" y="3017520"/>
+            <a:ext cx="2103120" cy="603504"/>
+          </a:xfrm>
+          <a:prstGeom prst="rect">
+            <a:avLst/>
+          </a:prstGeom>
+          <a:solidFill>
+            <a:srgbClr val="F2F5F8"/>
+          </a:solidFill>
+          <a:ln w="12700">
+            <a:solidFill>
+              <a:srgbClr val="DDDDDD"/>
+            </a:solidFill>
+            <a:prstDash val="solid"/>
+          </a:ln>
+        </p:spPr>
+      </p:sp>
+      <p:sp>
+        <p:nvSpPr>
+          <p:cNvPr id="14" name="Text 11"/>
+          <p:cNvSpPr txBox="1"/>
+          <p:nvPr/>
+        </p:nvSpPr>
+        <p:spPr>
+          <a:xfrm>
+            <a:off x="822960" y="3090672"/>
+            <a:ext cx="1828800" cy="237744"/>
+          </a:xfrm>
+          <a:prstGeom prst="rect">
+            <a:avLst/>
+          </a:prstGeom>
+          <a:noFill/>
+          <a:ln/>
+        </p:spPr>
+        <p:txBody>
+          <a:bodyPr wrap="square" lIns="0" tIns="0" rIns="0" bIns="0" rtlCol="0" anchor="t"/>
+          <a:lstStyle/>
+          <a:p>
+            <a:pPr indent="0" marL="0">
+              <a:buNone/>
+            </a:pPr>
+            <a:r>
+              <a:rPr lang="en-US" sz="1100" b="1" dirty="0">
+                <a:solidFill>
+                  <a:srgbClr val="1A4A70"/>
+                </a:solidFill>
+                <a:latin typeface="Consolas" pitchFamily="34" charset="0"/>
+                <a:ea typeface="Consolas" pitchFamily="34" charset="-122"/>
+                <a:cs typeface="Consolas" pitchFamily="34" charset="-120"/>
+              </a:rPr>
+              <a:t>GitHub Actions</a:t>
+            </a:r>
+            <a:endParaRPr lang="en-US" sz="1100" dirty="0"/>
+          </a:p>
+        </p:txBody>
+      </p:sp>
+      <p:sp>
+        <p:nvSpPr>
+          <p:cNvPr id="15" name="Text 12"/>
+          <p:cNvSpPr txBox="1"/>
+          <p:nvPr/>
+        </p:nvSpPr>
+        <p:spPr>
+          <a:xfrm>
+            <a:off x="822960" y="3337560"/>
+            <a:ext cx="1828800" cy="219456"/>
+          </a:xfrm>
+          <a:prstGeom prst="rect">
+            <a:avLst/>
+          </a:prstGeom>
+          <a:noFill/>
+          <a:ln/>
+        </p:spPr>
+        <p:txBody>
+          <a:bodyPr wrap="square" lIns="0" tIns="0" rIns="0" bIns="0" rtlCol="0" anchor="t"/>
+          <a:lstStyle/>
+          <a:p>
+            <a:pPr indent="0" marL="0">
+              <a:buNone/>
+            </a:pPr>
+            <a:r>
+              <a:rPr lang="en-US" sz="1000" dirty="0">
+                <a:solidFill>
+                  <a:srgbClr val="1B2B3A"/>
+                </a:solidFill>
+                <a:latin typeface="Meiryo" pitchFamily="34" charset="0"/>
+                <a:ea typeface="Meiryo" pitchFamily="34" charset="-122"/>
+                <a:cs typeface="Meiryo" pitchFamily="34" charset="-120"/>
+              </a:rPr>
+              <a:t>テスト・イメージを作る</a:t>
+            </a:r>
+            <a:endParaRPr lang="en-US" sz="1000" dirty="0"/>
+          </a:p>
+        </p:txBody>
+      </p:sp>
+      <p:sp>
+        <p:nvSpPr>
+          <p:cNvPr id="16" name="Shape 13"/>
+          <p:cNvSpPr/>
+          <p:nvPr/>
+        </p:nvSpPr>
+        <p:spPr>
+          <a:xfrm>
+            <a:off x="1737360" y="3639312"/>
+            <a:ext cx="0" cy="237744"/>
+          </a:xfrm>
+          <a:prstGeom prst="line">
+            <a:avLst/>
+          </a:prstGeom>
+          <a:noFill/>
+          <a:ln w="15875">
+            <a:solidFill>
+              <a:srgbClr val="1A4A70"/>
+            </a:solidFill>
+            <a:prstDash val="solid"/>
+            <a:tailEnd type="triangle"/>
+          </a:ln>
+        </p:spPr>
+      </p:sp>
+      <p:sp>
+        <p:nvSpPr>
+          <p:cNvPr id="17" name="Shape 14"/>
+          <p:cNvSpPr/>
+          <p:nvPr/>
+        </p:nvSpPr>
+        <p:spPr>
+          <a:xfrm>
+            <a:off x="685800" y="3886200"/>
+            <a:ext cx="2103120" cy="603504"/>
+          </a:xfrm>
+          <a:prstGeom prst="rect">
+            <a:avLst/>
+          </a:prstGeom>
+          <a:solidFill>
+            <a:srgbClr val="F2F5F8"/>
+          </a:solidFill>
+          <a:ln w="12700">
+            <a:solidFill>
+              <a:srgbClr val="DDDDDD"/>
+            </a:solidFill>
+            <a:prstDash val="solid"/>
+          </a:ln>
+        </p:spPr>
+      </p:sp>
+      <p:sp>
+        <p:nvSpPr>
+          <p:cNvPr id="18" name="Text 15"/>
+          <p:cNvSpPr txBox="1"/>
+          <p:nvPr/>
+        </p:nvSpPr>
+        <p:spPr>
+          <a:xfrm>
+            <a:off x="822960" y="3959352"/>
+            <a:ext cx="1828800" cy="237744"/>
+          </a:xfrm>
+          <a:prstGeom prst="rect">
+            <a:avLst/>
+          </a:prstGeom>
+          <a:noFill/>
+          <a:ln/>
+        </p:spPr>
+        <p:txBody>
+          <a:bodyPr wrap="square" lIns="0" tIns="0" rIns="0" bIns="0" rtlCol="0" anchor="t"/>
+          <a:lstStyle/>
+          <a:p>
+            <a:pPr indent="0" marL="0">
+              <a:buNone/>
+            </a:pPr>
+            <a:r>
+              <a:rPr lang="en-US" sz="1100" b="1" dirty="0">
+                <a:solidFill>
+                  <a:srgbClr val="1A4A70"/>
+                </a:solidFill>
+                <a:latin typeface="Consolas" pitchFamily="34" charset="0"/>
+                <a:ea typeface="Consolas" pitchFamily="34" charset="-122"/>
+                <a:cs typeface="Consolas" pitchFamily="34" charset="-120"/>
+              </a:rPr>
+              <a:t>ghcr.io</a:t>
+            </a:r>
+            <a:endParaRPr lang="en-US" sz="1100" dirty="0"/>
+          </a:p>
+        </p:txBody>
+      </p:sp>
+      <p:sp>
+        <p:nvSpPr>
+          <p:cNvPr id="19" name="Text 16"/>
+          <p:cNvSpPr txBox="1"/>
+          <p:nvPr/>
+        </p:nvSpPr>
+        <p:spPr>
+          <a:xfrm>
+            <a:off x="822960" y="4206240"/>
+            <a:ext cx="1828800" cy="219456"/>
+          </a:xfrm>
+          <a:prstGeom prst="rect">
+            <a:avLst/>
+          </a:prstGeom>
+          <a:noFill/>
+          <a:ln/>
+        </p:spPr>
+        <p:txBody>
+          <a:bodyPr wrap="square" lIns="0" tIns="0" rIns="0" bIns="0" rtlCol="0" anchor="t"/>
+          <a:lstStyle/>
+          <a:p>
+            <a:pPr indent="0" marL="0">
+              <a:buNone/>
+            </a:pPr>
+            <a:r>
+              <a:rPr lang="en-US" sz="1000" dirty="0">
+                <a:solidFill>
+                  <a:srgbClr val="1B2B3A"/>
+                </a:solidFill>
+                <a:latin typeface="Meiryo" pitchFamily="34" charset="0"/>
+                <a:ea typeface="Meiryo" pitchFamily="34" charset="-122"/>
+                <a:cs typeface="Meiryo" pitchFamily="34" charset="-120"/>
+              </a:rPr>
+              <a:t>コンテナイメージ</a:t>
+            </a:r>
+            <a:endParaRPr lang="en-US" sz="1000" dirty="0"/>
+          </a:p>
+        </p:txBody>
+      </p:sp>
+      <p:sp>
+        <p:nvSpPr>
+          <p:cNvPr id="20" name="Shape 17"/>
+          <p:cNvSpPr/>
+          <p:nvPr/>
+        </p:nvSpPr>
+        <p:spPr>
+          <a:xfrm>
+            <a:off x="3703320" y="1417320"/>
+            <a:ext cx="4983480" cy="3246120"/>
+          </a:xfrm>
+          <a:prstGeom prst="rect">
+            <a:avLst/>
+          </a:prstGeom>
+          <a:solidFill>
+            <a:srgbClr val="FFFFFF"/>
+          </a:solidFill>
+          <a:ln w="12700">
+            <a:solidFill>
+              <a:srgbClr val="B9CAD9"/>
+            </a:solidFill>
+            <a:prstDash val="dash"/>
+          </a:ln>
+        </p:spPr>
+      </p:sp>
+      <p:pic>
+        <p:nvPicPr>
+          <p:cNvPr id="21" name="Image 1" descr="preencoded.png">    </p:cNvPr>
+          <p:cNvPicPr>
+            <a:picLocks noChangeAspect="1"/>
+          </p:cNvPicPr>
+          <p:nvPr/>
+        </p:nvPicPr>
+        <p:blipFill>
+          <a:blip r:embed="rId2"/>
+          <a:stretch>
+            <a:fillRect/>
+          </a:stretch>
+        </p:blipFill>
+        <p:spPr>
+          <a:xfrm>
+            <a:off x="3931920" y="1618488"/>
+            <a:ext cx="310896" cy="310896"/>
+          </a:xfrm>
+          <a:prstGeom prst="rect">
+            <a:avLst/>
+          </a:prstGeom>
+        </p:spPr>
+      </p:pic>
+      <p:sp>
+        <p:nvSpPr>
+          <p:cNvPr id="22" name="Text 18"/>
+          <p:cNvSpPr txBox="1"/>
+          <p:nvPr/>
+        </p:nvSpPr>
+        <p:spPr>
+          <a:xfrm>
+            <a:off x="4343400" y="1600200"/>
+            <a:ext cx="1828800" cy="329184"/>
+          </a:xfrm>
+          <a:prstGeom prst="rect">
+            <a:avLst/>
+          </a:prstGeom>
+          <a:noFill/>
+          <a:ln/>
+        </p:spPr>
+        <p:txBody>
+          <a:bodyPr wrap="square" lIns="0" tIns="0" rIns="0" bIns="0" rtlCol="0" anchor="ctr"/>
+          <a:lstStyle/>
+          <a:p>
+            <a:pPr indent="0" marL="0">
+              <a:buNone/>
+            </a:pPr>
+            <a:r>
+              <a:rPr lang="en-US" sz="1500" b="1" dirty="0">
+                <a:solidFill>
+                  <a:srgbClr val="001E3C"/>
+                </a:solidFill>
+                <a:latin typeface="Meiryo" pitchFamily="34" charset="0"/>
+                <a:ea typeface="Meiryo" pitchFamily="34" charset="-122"/>
+                <a:cs typeface="Meiryo" pitchFamily="34" charset="-120"/>
+              </a:rPr>
+              <a:t>Azure</a:t>
+            </a:r>
+            <a:endParaRPr lang="en-US" sz="1500" dirty="0"/>
+          </a:p>
+        </p:txBody>
+      </p:sp>
+      <p:sp>
+        <p:nvSpPr>
+          <p:cNvPr id="23" name="Shape 19"/>
+          <p:cNvSpPr/>
+          <p:nvPr/>
+        </p:nvSpPr>
+        <p:spPr>
+          <a:xfrm>
+            <a:off x="4078224" y="2002536"/>
+            <a:ext cx="2331720" cy="2286000"/>
+          </a:xfrm>
+          <a:prstGeom prst="rect">
+            <a:avLst/>
+          </a:prstGeom>
+          <a:solidFill>
+            <a:srgbClr val="CFE8FC"/>
+          </a:solidFill>
+          <a:ln w="12700">
+            <a:solidFill>
+              <a:srgbClr val="5BB8FF"/>
+            </a:solidFill>
+            <a:prstDash val="solid"/>
+          </a:ln>
+        </p:spPr>
+      </p:sp>
+      <p:sp>
+        <p:nvSpPr>
+          <p:cNvPr id="24" name="Shape 20"/>
+          <p:cNvSpPr/>
+          <p:nvPr/>
+        </p:nvSpPr>
+        <p:spPr>
+          <a:xfrm>
+            <a:off x="4005072" y="2075688"/>
+            <a:ext cx="2331720" cy="2286000"/>
+          </a:xfrm>
+          <a:prstGeom prst="rect">
+            <a:avLst/>
+          </a:prstGeom>
+          <a:solidFill>
+            <a:srgbClr val="CFE8FC"/>
+          </a:solidFill>
+          <a:ln w="12700">
+            <a:solidFill>
+              <a:srgbClr val="5BB8FF"/>
+            </a:solidFill>
+            <a:prstDash val="solid"/>
+          </a:ln>
+        </p:spPr>
+      </p:sp>
+      <p:sp>
+        <p:nvSpPr>
+          <p:cNvPr id="25" name="Shape 21"/>
+          <p:cNvSpPr/>
+          <p:nvPr/>
+        </p:nvSpPr>
+        <p:spPr>
+          <a:xfrm>
+            <a:off x="3931920" y="2148840"/>
+            <a:ext cx="2331720" cy="2286000"/>
+          </a:xfrm>
+          <a:prstGeom prst="rect">
+            <a:avLst/>
+          </a:prstGeom>
+          <a:solidFill>
+            <a:srgbClr val="E4F2FF"/>
+          </a:solidFill>
+          <a:ln w="12700">
+            <a:solidFill>
+              <a:srgbClr val="5BB8FF"/>
+            </a:solidFill>
+            <a:prstDash val="solid"/>
+          </a:ln>
+        </p:spPr>
+      </p:sp>
+      <p:sp>
+        <p:nvSpPr>
+          <p:cNvPr id="26" name="Text 22"/>
+          <p:cNvSpPr txBox="1"/>
+          <p:nvPr/>
+        </p:nvSpPr>
+        <p:spPr>
+          <a:xfrm>
+            <a:off x="4096512" y="2286000"/>
+            <a:ext cx="2057400" cy="256032"/>
+          </a:xfrm>
+          <a:prstGeom prst="rect">
+            <a:avLst/>
+          </a:prstGeom>
+          <a:noFill/>
+          <a:ln/>
+        </p:spPr>
+        <p:txBody>
+          <a:bodyPr wrap="square" lIns="0" tIns="0" rIns="0" bIns="0" rtlCol="0" anchor="t"/>
+          <a:lstStyle/>
+          <a:p>
+            <a:pPr indent="0" marL="0">
+              <a:buNone/>
+            </a:pPr>
+            <a:r>
+              <a:rPr lang="en-US" sz="1000" b="1" dirty="0">
+                <a:solidFill>
+                  <a:srgbClr val="1A4A70"/>
+                </a:solidFill>
+                <a:latin typeface="Consolas" pitchFamily="34" charset="0"/>
+                <a:ea typeface="Consolas" pitchFamily="34" charset="-122"/>
+                <a:cs typeface="Consolas" pitchFamily="34" charset="-120"/>
+              </a:rPr>
+              <a:t>RG: funitclub-wg-&lt;名前&gt;</a:t>
+            </a:r>
+            <a:endParaRPr lang="en-US" sz="1000" dirty="0"/>
+          </a:p>
+        </p:txBody>
+      </p:sp>
+      <p:sp>
+        <p:nvSpPr>
+          <p:cNvPr id="27" name="Shape 23"/>
+          <p:cNvSpPr/>
+          <p:nvPr/>
+        </p:nvSpPr>
+        <p:spPr>
+          <a:xfrm>
+            <a:off x="4096512" y="2651760"/>
+            <a:ext cx="2002536" cy="822960"/>
+          </a:xfrm>
+          <a:prstGeom prst="rect">
+            <a:avLst/>
+          </a:prstGeom>
+          <a:solidFill>
+            <a:srgbClr val="FFFFFF"/>
+          </a:solidFill>
+          <a:ln w="12700">
+            <a:solidFill>
+              <a:srgbClr val="5BB8FF"/>
+            </a:solidFill>
+            <a:prstDash val="solid"/>
+          </a:ln>
+        </p:spPr>
+      </p:sp>
+      <p:sp>
+        <p:nvSpPr>
+          <p:cNvPr id="28" name="Text 24"/>
+          <p:cNvSpPr txBox="1"/>
+          <p:nvPr/>
+        </p:nvSpPr>
+        <p:spPr>
+          <a:xfrm>
+            <a:off x="4206240" y="2743200"/>
+            <a:ext cx="1783080" cy="274320"/>
+          </a:xfrm>
+          <a:prstGeom prst="rect">
+            <a:avLst/>
+          </a:prstGeom>
+          <a:noFill/>
+          <a:ln/>
+        </p:spPr>
+        <p:txBody>
+          <a:bodyPr wrap="square" lIns="0" tIns="0" rIns="0" bIns="0" rtlCol="0" anchor="t"/>
+          <a:lstStyle/>
+          <a:p>
+            <a:pPr indent="0" marL="0">
+              <a:buNone/>
+            </a:pPr>
+            <a:r>
+              <a:rPr lang="en-US" sz="1300" b="1" dirty="0">
+                <a:solidFill>
+                  <a:srgbClr val="001E3C"/>
+                </a:solidFill>
+                <a:latin typeface="Meiryo" pitchFamily="34" charset="0"/>
+                <a:ea typeface="Meiryo" pitchFamily="34" charset="-122"/>
+                <a:cs typeface="Meiryo" pitchFamily="34" charset="-120"/>
+              </a:rPr>
+              <a:t>Container App</a:t>
+            </a:r>
+            <a:endParaRPr lang="en-US" sz="1300" dirty="0"/>
+          </a:p>
+        </p:txBody>
+      </p:sp>
+      <p:sp>
+        <p:nvSpPr>
+          <p:cNvPr id="29" name="Text 25"/>
+          <p:cNvSpPr txBox="1"/>
+          <p:nvPr/>
+        </p:nvSpPr>
+        <p:spPr>
+          <a:xfrm>
+            <a:off x="4206240" y="3044952"/>
+            <a:ext cx="1783080" cy="274320"/>
+          </a:xfrm>
+          <a:prstGeom prst="rect">
+            <a:avLst/>
+          </a:prstGeom>
+          <a:noFill/>
+          <a:ln/>
+        </p:spPr>
+        <p:txBody>
+          <a:bodyPr wrap="square" lIns="0" tIns="0" rIns="0" bIns="0" rtlCol="0" anchor="t"/>
+          <a:lstStyle/>
+          <a:p>
+            <a:pPr indent="0" marL="0">
+              <a:buNone/>
+            </a:pPr>
+            <a:r>
+              <a:rPr lang="en-US" sz="950" dirty="0">
+                <a:solidFill>
+                  <a:srgbClr val="1B2B3A"/>
+                </a:solidFill>
+                <a:latin typeface="Meiryo" pitchFamily="34" charset="0"/>
+                <a:ea typeface="Meiryo" pitchFamily="34" charset="-122"/>
+                <a:cs typeface="Meiryo" pitchFamily="34" charset="-120"/>
+              </a:rPr>
+              <a:t>使われないときは 0 台まで縮む</a:t>
+            </a:r>
+            <a:endParaRPr lang="en-US" sz="950" dirty="0"/>
+          </a:p>
+        </p:txBody>
+      </p:sp>
+      <p:sp>
+        <p:nvSpPr>
+          <p:cNvPr id="30" name="Text 26"/>
+          <p:cNvSpPr txBox="1"/>
+          <p:nvPr/>
+        </p:nvSpPr>
+        <p:spPr>
+          <a:xfrm>
+            <a:off x="4096512" y="3657600"/>
+            <a:ext cx="2057400" cy="274320"/>
+          </a:xfrm>
+          <a:prstGeom prst="rect">
+            <a:avLst/>
+          </a:prstGeom>
+          <a:noFill/>
+          <a:ln/>
+        </p:spPr>
+        <p:txBody>
+          <a:bodyPr wrap="square" lIns="0" tIns="0" rIns="0" bIns="0" rtlCol="0" anchor="t"/>
+          <a:lstStyle/>
+          <a:p>
+            <a:pPr indent="0" marL="0">
+              <a:buNone/>
+            </a:pPr>
+            <a:r>
+              <a:rPr lang="en-US" sz="1100" b="1" dirty="0">
+                <a:solidFill>
+                  <a:srgbClr val="1A4A70"/>
+                </a:solidFill>
+                <a:latin typeface="Meiryo" pitchFamily="34" charset="0"/>
+                <a:ea typeface="Meiryo" pitchFamily="34" charset="-122"/>
+                <a:cs typeface="Meiryo" pitchFamily="34" charset="-120"/>
+              </a:rPr>
+              <a:t>WG ごとに 1 つ作る</a:t>
+            </a:r>
+            <a:endParaRPr lang="en-US" sz="1100" dirty="0"/>
+          </a:p>
+        </p:txBody>
+      </p:sp>
+      <p:sp>
+        <p:nvSpPr>
+          <p:cNvPr id="31" name="Text 27"/>
+          <p:cNvSpPr txBox="1"/>
+          <p:nvPr/>
+        </p:nvSpPr>
+        <p:spPr>
+          <a:xfrm>
+            <a:off x="4096512" y="3931920"/>
+            <a:ext cx="2057400" cy="274320"/>
+          </a:xfrm>
+          <a:prstGeom prst="rect">
+            <a:avLst/>
+          </a:prstGeom>
+          <a:noFill/>
+          <a:ln/>
+        </p:spPr>
+        <p:txBody>
+          <a:bodyPr wrap="square" lIns="0" tIns="0" rIns="0" bIns="0" rtlCol="0" anchor="t"/>
+          <a:lstStyle/>
+          <a:p>
+            <a:pPr indent="0" marL="0">
+              <a:buNone/>
+            </a:pPr>
+            <a:r>
+              <a:rPr lang="en-US" sz="950" dirty="0">
+                <a:solidFill>
+                  <a:srgbClr val="1B2B3A"/>
+                </a:solidFill>
+                <a:latin typeface="Meiryo" pitchFamily="34" charset="0"/>
+                <a:ea typeface="Meiryo" pitchFamily="34" charset="-122"/>
+                <a:cs typeface="Meiryo" pitchFamily="34" charset="-120"/>
+              </a:rPr>
+              <a:t>デプロイの権限はこの RG の中だけ</a:t>
+            </a:r>
+            <a:endParaRPr lang="en-US" sz="950" dirty="0"/>
+          </a:p>
+        </p:txBody>
+      </p:sp>
+      <p:sp>
+        <p:nvSpPr>
+          <p:cNvPr id="32" name="Shape 28"/>
+          <p:cNvSpPr/>
+          <p:nvPr/>
+        </p:nvSpPr>
+        <p:spPr>
+          <a:xfrm>
+            <a:off x="6537960" y="2148840"/>
+            <a:ext cx="1920240" cy="2286000"/>
+          </a:xfrm>
+          <a:prstGeom prst="rect">
+            <a:avLst/>
+          </a:prstGeom>
+          <a:solidFill>
+            <a:srgbClr val="F2F5F8"/>
+          </a:solidFill>
+          <a:ln w="12700">
+            <a:solidFill>
+              <a:srgbClr val="DDDDDD"/>
+            </a:solidFill>
+            <a:prstDash val="solid"/>
+          </a:ln>
+        </p:spPr>
+      </p:sp>
+      <p:sp>
+        <p:nvSpPr>
+          <p:cNvPr id="33" name="Text 29"/>
+          <p:cNvSpPr txBox="1"/>
+          <p:nvPr/>
+        </p:nvSpPr>
+        <p:spPr>
+          <a:xfrm>
+            <a:off x="6702552" y="2286000"/>
+            <a:ext cx="1645920" cy="256032"/>
+          </a:xfrm>
+          <a:prstGeom prst="rect">
+            <a:avLst/>
+          </a:prstGeom>
+          <a:noFill/>
+          <a:ln/>
+        </p:spPr>
+        <p:txBody>
+          <a:bodyPr wrap="square" lIns="0" tIns="0" rIns="0" bIns="0" rtlCol="0" anchor="t"/>
+          <a:lstStyle/>
+          <a:p>
+            <a:pPr indent="0" marL="0">
+              <a:buNone/>
+            </a:pPr>
+            <a:r>
+              <a:rPr lang="en-US" sz="1000" b="1" dirty="0">
+                <a:solidFill>
+                  <a:srgbClr val="5A6B7B"/>
+                </a:solidFill>
+                <a:latin typeface="Consolas" pitchFamily="34" charset="0"/>
+                <a:ea typeface="Consolas" pitchFamily="34" charset="-122"/>
+                <a:cs typeface="Consolas" pitchFamily="34" charset="-120"/>
+              </a:rPr>
+              <a:t>RG: hirahira</a:t>
+            </a:r>
+            <a:endParaRPr lang="en-US" sz="1000" dirty="0"/>
+          </a:p>
+        </p:txBody>
+      </p:sp>
+      <p:sp>
+        <p:nvSpPr>
+          <p:cNvPr id="34" name="Text 30"/>
+          <p:cNvSpPr txBox="1"/>
+          <p:nvPr/>
+        </p:nvSpPr>
+        <p:spPr>
+          <a:xfrm>
+            <a:off x="6702552" y="2651760"/>
+            <a:ext cx="1645920" cy="914400"/>
+          </a:xfrm>
+          <a:prstGeom prst="rect">
+            <a:avLst/>
+          </a:prstGeom>
+          <a:noFill/>
+          <a:ln/>
+        </p:spPr>
+        <p:txBody>
+          <a:bodyPr wrap="square" lIns="0" tIns="0" rIns="0" bIns="0" rtlCol="0" anchor="t"/>
+          <a:lstStyle/>
+          <a:p>
+            <a:pPr marL="342900" indent="-342900">
+              <a:spcAft>
+                <a:spcPts val="400"/>
+              </a:spcAft>
+              <a:buSzPct val="100000"/>
+              <a:buChar char="•"/>
+            </a:pPr>
+            <a:r>
+              <a:rPr lang="en-US" sz="1100" dirty="0">
+                <a:solidFill>
+                  <a:srgbClr val="1B2B3A"/>
+                </a:solidFill>
+                <a:latin typeface="Meiryo" pitchFamily="34" charset="0"/>
+                <a:ea typeface="Meiryo" pitchFamily="34" charset="-122"/>
+                <a:cs typeface="Meiryo" pitchFamily="34" charset="-120"/>
+              </a:rPr>
+              <a:t>homepage</a:t>
+            </a:r>
+            <a:endParaRPr lang="en-US" sz="1100" dirty="0"/>
+          </a:p>
+          <a:p>
+            <a:pPr marL="342900" indent="-342900">
+              <a:spcAft>
+                <a:spcPts val="400"/>
+              </a:spcAft>
+              <a:buSzPct val="100000"/>
+              <a:buChar char="•"/>
+            </a:pPr>
+            <a:r>
+              <a:rPr lang="en-US" sz="1100" dirty="0">
+                <a:solidFill>
+                  <a:srgbClr val="1B2B3A"/>
+                </a:solidFill>
+                <a:latin typeface="Meiryo" pitchFamily="34" charset="0"/>
+                <a:ea typeface="Meiryo" pitchFamily="34" charset="-122"/>
+                <a:cs typeface="Meiryo" pitchFamily="34" charset="-120"/>
+              </a:rPr>
+              <a:t>PostgreSQL</a:t>
+            </a:r>
+            <a:endParaRPr lang="en-US" sz="1100" dirty="0"/>
+          </a:p>
+          <a:p>
+            <a:pPr marL="342900" indent="-342900">
+              <a:spcAft>
+                <a:spcPts val="400"/>
+              </a:spcAft>
+              <a:buSzPct val="100000"/>
+              <a:buChar char="•"/>
+            </a:pPr>
+            <a:r>
+              <a:rPr lang="en-US" sz="1100" dirty="0">
+                <a:solidFill>
+                  <a:srgbClr val="1B2B3A"/>
+                </a:solidFill>
+                <a:latin typeface="Meiryo" pitchFamily="34" charset="0"/>
+                <a:ea typeface="Meiryo" pitchFamily="34" charset="-122"/>
+                <a:cs typeface="Meiryo" pitchFamily="34" charset="-120"/>
+              </a:rPr>
+              <a:t>Key Vault</a:t>
+            </a:r>
+            <a:endParaRPr lang="en-US" sz="1100" dirty="0"/>
+          </a:p>
+        </p:txBody>
+      </p:sp>
+      <p:pic>
+        <p:nvPicPr>
+          <p:cNvPr id="35" name="Image 2" descr="preencoded.png">    </p:cNvPr>
+          <p:cNvPicPr>
+            <a:picLocks noChangeAspect="1"/>
+          </p:cNvPicPr>
+          <p:nvPr/>
+        </p:nvPicPr>
+        <p:blipFill>
+          <a:blip r:embed="rId3"/>
+          <a:stretch>
+            <a:fillRect/>
+          </a:stretch>
+        </p:blipFill>
+        <p:spPr>
+          <a:xfrm>
+            <a:off x="6702552" y="3721608"/>
+            <a:ext cx="182880" cy="182880"/>
+          </a:xfrm>
+          <a:prstGeom prst="rect">
+            <a:avLst/>
+          </a:prstGeom>
+        </p:spPr>
+      </p:pic>
+      <p:sp>
+        <p:nvSpPr>
+          <p:cNvPr id="36" name="Text 31"/>
+          <p:cNvSpPr txBox="1"/>
+          <p:nvPr/>
+        </p:nvSpPr>
+        <p:spPr>
+          <a:xfrm>
+            <a:off x="6949440" y="3685032"/>
+            <a:ext cx="1417320" cy="256032"/>
+          </a:xfrm>
+          <a:prstGeom prst="rect">
+            <a:avLst/>
+          </a:prstGeom>
+          <a:noFill/>
+          <a:ln/>
+        </p:spPr>
+        <p:txBody>
+          <a:bodyPr wrap="square" lIns="0" tIns="0" rIns="0" bIns="0" rtlCol="0" anchor="ctr"/>
+          <a:lstStyle/>
+          <a:p>
+            <a:pPr indent="0" marL="0">
+              <a:buNone/>
+            </a:pPr>
+            <a:r>
+              <a:rPr lang="en-US" sz="1000" b="1" dirty="0">
+                <a:solidFill>
+                  <a:srgbClr val="5A6B7B"/>
+                </a:solidFill>
+                <a:latin typeface="Meiryo" pitchFamily="34" charset="0"/>
+                <a:ea typeface="Meiryo" pitchFamily="34" charset="-122"/>
+                <a:cs typeface="Meiryo" pitchFamily="34" charset="-120"/>
+              </a:rPr>
+              <a:t>WG からは触らない</a:t>
+            </a:r>
+            <a:endParaRPr lang="en-US" sz="1000" dirty="0"/>
+          </a:p>
+        </p:txBody>
+      </p:sp>
+      <p:sp>
+        <p:nvSpPr>
+          <p:cNvPr id="37" name="Shape 32"/>
+          <p:cNvSpPr/>
+          <p:nvPr/>
+        </p:nvSpPr>
+        <p:spPr>
+          <a:xfrm>
+            <a:off x="3035808" y="4187952"/>
+            <a:ext cx="877824" cy="0"/>
+          </a:xfrm>
+          <a:prstGeom prst="line">
+            <a:avLst/>
+          </a:prstGeom>
+          <a:noFill/>
+          <a:ln w="19050">
+            <a:solidFill>
+              <a:srgbClr val="1A4A70"/>
+            </a:solidFill>
+            <a:prstDash val="solid"/>
+            <a:tailEnd type="triangle"/>
+          </a:ln>
+        </p:spPr>
+      </p:sp>
+    </p:spTree>
+  </p:cSld>
+  <p:clrMapOvr>
+    <a:masterClrMapping/>
+  </p:clrMapOvr>
+</p:sld>
+</file>
+
+<file path=ppt/slides/slide11.xml><?xml version="1.0" encoding="utf-8"?>
+<p:sld xmlns:a="http://schemas.openxmlformats.org/drawingml/2006/main" xmlns:r="http://schemas.openxmlformats.org/officeDocument/2006/relationships" xmlns:p="http://schemas.openxmlformats.org/presentationml/2006/main">
+  <p:cSld name="Slide 11">
+    <p:bg>
+      <p:bgPr>
+        <a:solidFill>
+          <a:srgbClr val="F2F5F8"/>
+        </a:solidFill>
+      </p:bgPr>
+    </p:bg>
+    <p:spTree>
+      <p:nvGrpSpPr>
+        <p:cNvPr id="1" name=""/>
+        <p:cNvGrpSpPr/>
+        <p:nvPr/>
+      </p:nvGrpSpPr>
+      <p:grpSpPr>
+        <a:xfrm>
+          <a:off x="0" y="0"/>
+          <a:ext cx="0" cy="0"/>
+          <a:chOff x="0" y="0"/>
+          <a:chExt cx="0" cy="0"/>
+        </a:xfrm>
+      </p:grpSpPr>
+      <p:sp>
+        <p:nvSpPr>
+          <p:cNvPr id="2" name="Text 0"/>
+          <p:cNvSpPr txBox="1"/>
+          <p:nvPr/>
+        </p:nvSpPr>
+        <p:spPr>
+          <a:xfrm>
+            <a:off x="457200" y="320040"/>
+            <a:ext cx="6858000" cy="274320"/>
+          </a:xfrm>
+          <a:prstGeom prst="rect">
+            <a:avLst/>
+          </a:prstGeom>
+          <a:noFill/>
+          <a:ln/>
+        </p:spPr>
+        <p:txBody>
+          <a:bodyPr wrap="square" lIns="0" tIns="0" rIns="0" bIns="0" rtlCol="0" anchor="t"/>
+          <a:lstStyle/>
+          <a:p>
+            <a:pPr indent="0" marL="0">
+              <a:buNone/>
+            </a:pPr>
+            <a:r>
+              <a:rPr lang="en-US" sz="1100" dirty="0">
+                <a:solidFill>
+                  <a:srgbClr val="1A4A70"/>
+                </a:solidFill>
+                <a:latin typeface="Consolas" pitchFamily="34" charset="0"/>
+                <a:ea typeface="Consolas" pitchFamily="34" charset="-122"/>
+                <a:cs typeface="Consolas" pitchFamily="34" charset="-120"/>
+              </a:rPr>
               <a:t>// 01  ·  公開  ·  なぜ分けるか</a:t>
             </a:r>
             <a:endParaRPr lang="en-US" sz="1100" dirty="0"/>
@@ -4216,7 +5552,7 @@
                 <a:ea typeface="Meiryo" pitchFamily="34" charset="-122"/>
                 <a:cs typeface="Meiryo" pitchFamily="34" charset="-120"/>
               </a:rPr>
-              <a:t>サイトの WG 一覧に「準備中」で載せる</a:t>
+              <a:t>サイトの WG 紹介に載せ、チーム名を登録する</a:t>
             </a:r>
             <a:endParaRPr lang="en-US" sz="1100" dirty="0"/>
           </a:p>
@@ -4483,7 +5819,7 @@
                 <a:ea typeface="Meiryo" pitchFamily="34" charset="-122"/>
                 <a:cs typeface="Meiryo" pitchFamily="34" charset="-120"/>
               </a:rPr>
-              <a:t>人の出入りはチームで。終わったらアーカイブ</a:t>
+              <a:t>抜けた人を外し、終わったらアーカイブ</a:t>
             </a:r>
             <a:endParaRPr lang="en-US" sz="1100" dirty="0"/>
           </a:p>
@@ -9103,7 +10439,7 @@
                 <a:ea typeface="Meiryo" pitchFamily="34" charset="-122"/>
                 <a:cs typeface="Meiryo" pitchFamily="34" charset="-120"/>
               </a:rPr>
-              <a:t>メンバーを org に招待する</a:t>
+              <a:t>チームを作る</a:t>
             </a:r>
             <a:endParaRPr lang="en-US" sz="1250" dirty="0"/>
           </a:p>
@@ -9142,7 +10478,7 @@
                 <a:ea typeface="Meiryo" pitchFamily="34" charset="-122"/>
                 <a:cs typeface="Meiryo" pitchFamily="34" charset="-120"/>
               </a:rPr>
-              <a:t>org の「People」→「Invite member」</a:t>
+              <a:t>org の「Teams」→「New team」。名前は wg-&lt;名前&gt;</a:t>
             </a:r>
             <a:endParaRPr lang="en-US" sz="1050" dirty="0"/>
           </a:p>
@@ -9245,7 +10581,7 @@
                 <a:ea typeface="Meiryo" pitchFamily="34" charset="-122"/>
                 <a:cs typeface="Meiryo" pitchFamily="34" charset="-120"/>
               </a:rPr>
-              <a:t>チームを作る</a:t>
+              <a:t>公開範囲は Visible</a:t>
             </a:r>
             <a:endParaRPr lang="en-US" sz="1250" dirty="0"/>
           </a:p>
@@ -9284,7 +10620,7 @@
                 <a:ea typeface="Meiryo" pitchFamily="34" charset="-122"/>
                 <a:cs typeface="Meiryo" pitchFamily="34" charset="-120"/>
               </a:rPr>
-              <a:t>org の「Teams」→「New team」。名前は wg-&lt;名前&gt;</a:t>
+              <a:t>作った運営は maintainer で入る。そのままでよい</a:t>
             </a:r>
             <a:endParaRPr lang="en-US" sz="1050" dirty="0"/>
           </a:p>
@@ -9387,7 +10723,7 @@
                 <a:ea typeface="Meiryo" pitchFamily="34" charset="-122"/>
                 <a:cs typeface="Meiryo" pitchFamily="34" charset="-120"/>
               </a:rPr>
-              <a:t>メンバーをチームに入れる</a:t>
+              <a:t>リポジトリにチームを付ける</a:t>
             </a:r>
             <a:endParaRPr lang="en-US" sz="1250" dirty="0"/>
           </a:p>
@@ -9426,7 +10762,7 @@
                 <a:ea typeface="Meiryo" pitchFamily="34" charset="-122"/>
                 <a:cs typeface="Meiryo" pitchFamily="34" charset="-120"/>
               </a:rPr>
-              <a:t>チームの「Members」→「Add a member」</a:t>
+              <a:t>Settings →「Collaborators and teams」→「Add teams」</a:t>
             </a:r>
             <a:endParaRPr lang="en-US" sz="1050" dirty="0"/>
           </a:p>
@@ -9529,7 +10865,7 @@
                 <a:ea typeface="Meiryo" pitchFamily="34" charset="-122"/>
                 <a:cs typeface="Meiryo" pitchFamily="34" charset="-120"/>
               </a:rPr>
-              <a:t>リポジトリにチームを付ける</a:t>
+              <a:t>役割は「Write」</a:t>
             </a:r>
             <a:endParaRPr lang="en-US" sz="1250" dirty="0"/>
           </a:p>
@@ -9568,7 +10904,7 @@
                 <a:ea typeface="Meiryo" pitchFamily="34" charset="-122"/>
                 <a:cs typeface="Meiryo" pitchFamily="34" charset="-120"/>
               </a:rPr>
-              <a:t>Settings →「Collaborators and teams」→「Add teams」</a:t>
+              <a:t>チームを選び、Write で追加する（右の画面）</a:t>
             </a:r>
             <a:endParaRPr lang="en-US" sz="1050" dirty="0"/>
           </a:p>
@@ -9671,7 +11007,7 @@
                 <a:ea typeface="Meiryo" pitchFamily="34" charset="-122"/>
                 <a:cs typeface="Meiryo" pitchFamily="34" charset="-120"/>
               </a:rPr>
-              <a:t>役割は「Write」</a:t>
+              <a:t>メンバーは入れない</a:t>
             </a:r>
             <a:endParaRPr lang="en-US" sz="1250" dirty="0"/>
           </a:p>
@@ -9710,7 +11046,7 @@
                 <a:ea typeface="Meiryo" pitchFamily="34" charset="-122"/>
                 <a:cs typeface="Meiryo" pitchFamily="34" charset="-120"/>
               </a:rPr>
-              <a:t>チームを選び、Write で追加する（右の画面）</a:t>
+              <a:t>本人がサイトの「WG に参加」から入る</a:t>
             </a:r>
             <a:endParaRPr lang="en-US" sz="1050" dirty="0"/>
           </a:p>
@@ -10320,7 +11656,7 @@
                 <a:ea typeface="Meiryo" pitchFamily="34" charset="-122"/>
                 <a:cs typeface="Meiryo" pitchFamily="34" charset="-120"/>
               </a:rPr>
-              <a:t>メンバーの出入りはチームの「Members」で増減するだけ。リポジトリの設定は触らない。</a:t>
+              <a:t>メンバーは本人が「WG に参加」から入る。運営はチームに人を入れない。</a:t>
             </a:r>
             <a:endParaRPr lang="en-US" sz="950" dirty="0"/>
           </a:p>
@@ -10334,7 +11670,7 @@
         </p:nvSpPr>
         <p:spPr>
           <a:xfrm>
-            <a:off x="457200" y="4480560"/>
+            <a:off x="457200" y="4645152"/>
             <a:ext cx="8229600" cy="365760"/>
           </a:xfrm>
           <a:prstGeom prst="rect">
@@ -10359,7 +11695,7 @@
                 <a:ea typeface="Meiryo" pitchFamily="34" charset="-122"/>
                 <a:cs typeface="Meiryo" pitchFamily="34" charset="-120"/>
               </a:rPr>
-              <a:t>卒業・退部したら org から外す。すべてのチームからも外れる（手順 5）。</a:t>
+              <a:t>抜けた人・卒業した人を外すのは運営（手順 5）。</a:t>
             </a:r>
             <a:endParaRPr lang="en-US" sz="1050" dirty="0"/>
           </a:p>
@@ -10856,7 +12192,7 @@
                 <a:ea typeface="Meiryo" pitchFamily="34" charset="-122"/>
                 <a:cs typeface="Meiryo" pitchFamily="34" charset="-120"/>
               </a:rPr>
-              <a:t>最初の状態は「準備中」</a:t>
+              <a:t>「GitHub のチーム」に手順 3 のチーム名</a:t>
             </a:r>
             <a:endParaRPr lang="en-US" sz="1050" dirty="0"/>
           </a:p>
@@ -10998,7 +12334,7 @@
                 <a:ea typeface="Meiryo" pitchFamily="34" charset="-122"/>
                 <a:cs typeface="Meiryo" pitchFamily="34" charset="-120"/>
               </a:rPr>
-              <a:t>WG 一覧に「準備中」のカードが出る</a:t>
+              <a:t>カードに「WG に参加」が出る</a:t>
             </a:r>
             <a:endParaRPr lang="en-US" sz="1050" dirty="0"/>
           </a:p>
@@ -11968,7 +13304,7 @@
                 <a:ea typeface="Meiryo" pitchFamily="34" charset="-122"/>
                 <a:cs typeface="Meiryo" pitchFamily="34" charset="-120"/>
               </a:rPr>
-              <a:t>追加リンクの URL</a:t>
+              <a:t>GitHub のチーム</a:t>
             </a:r>
             <a:endParaRPr lang="en-US" sz="850" dirty="0"/>
           </a:p>
@@ -12024,7 +13360,7 @@
               <a:buNone/>
             </a:pPr>
             <a:r>
-              <a:rPr lang="en-US" sz="850" dirty="0">
+              <a:rPr lang="en-US" sz="850" b="1" dirty="0">
                 <a:solidFill>
                   <a:srgbClr val="1B2B3A"/>
                 </a:solidFill>
@@ -12032,7 +13368,7 @@
                 <a:ea typeface="Consolas" pitchFamily="34" charset="-122"/>
                 <a:cs typeface="Consolas" pitchFamily="34" charset="-120"/>
               </a:rPr>
-              <a:t>https://github.com/funITclub/wg-…</a:t>
+              <a:t>wg-countdown</a:t>
             </a:r>
             <a:endParaRPr lang="en-US" sz="850" dirty="0"/>
           </a:p>
@@ -12255,7 +13591,7 @@
                 <a:ea typeface="Consolas" pitchFamily="34" charset="-122"/>
                 <a:cs typeface="Consolas" pitchFamily="34" charset="-120"/>
               </a:rPr>
-              <a:t>// 01  ·  手順 5  ·  見守る</a:t>
+              <a:t>// 01  ·  参加のしくみ</a:t>
             </a:r>
             <a:endParaRPr lang="en-US" sz="1100" dirty="0"/>
           </a:p>
@@ -12294,7 +13630,7 @@
                 <a:ea typeface="Meiryo" pitchFamily="34" charset="-122"/>
                 <a:cs typeface="Meiryo" pitchFamily="34" charset="-120"/>
               </a:rPr>
-              <a:t>メンバーの交代と、WG の終了</a:t>
+              <a:t>メンバーの参加は自動</a:t>
             </a:r>
             <a:endParaRPr lang="en-US" sz="2600" dirty="0"/>
           </a:p>
@@ -12309,7 +13645,7 @@
         <p:spPr>
           <a:xfrm>
             <a:off x="457200" y="1417320"/>
-            <a:ext cx="4023360" cy="3154680"/>
+            <a:ext cx="1920240" cy="1828800"/>
           </a:xfrm>
           <a:prstGeom prst="rect">
             <a:avLst/>
@@ -12340,7 +13676,7 @@
         </p:nvSpPr>
         <p:spPr>
           <a:xfrm>
-            <a:off x="685800" y="1618488"/>
+            <a:off x="640080" y="1600200"/>
             <a:ext cx="457200" cy="457200"/>
           </a:xfrm>
           <a:prstGeom prst="ellipse">
@@ -12373,7 +13709,7 @@
         </p:blipFill>
         <p:spPr>
           <a:xfrm>
-            <a:off x="804672" y="1737360"/>
+            <a:off x="758952" y="1719072"/>
             <a:ext cx="219456" cy="219456"/>
           </a:xfrm>
           <a:prstGeom prst="rect">
@@ -12389,24 +13725,24 @@
         </p:nvSpPr>
         <p:spPr>
           <a:xfrm>
-            <a:off x="1280160" y="1618488"/>
-            <a:ext cx="3017520" cy="457200"/>
-          </a:xfrm>
-          <a:prstGeom prst="rect">
-            <a:avLst/>
-          </a:prstGeom>
-          <a:noFill/>
-          <a:ln/>
-        </p:spPr>
-        <p:txBody>
-          <a:bodyPr wrap="square" lIns="0" tIns="0" rIns="0" bIns="0" rtlCol="0" anchor="ctr"/>
-          <a:lstStyle/>
-          <a:p>
-            <a:pPr indent="0" marL="0">
-              <a:buNone/>
-            </a:pPr>
-            <a:r>
-              <a:rPr lang="en-US" sz="1400" b="1" dirty="0">
+            <a:off x="640080" y="2194560"/>
+            <a:ext cx="1600200" cy="292608"/>
+          </a:xfrm>
+          <a:prstGeom prst="rect">
+            <a:avLst/>
+          </a:prstGeom>
+          <a:noFill/>
+          <a:ln/>
+        </p:spPr>
+        <p:txBody>
+          <a:bodyPr wrap="square" lIns="0" tIns="0" rIns="0" bIns="0" rtlCol="0" anchor="t"/>
+          <a:lstStyle/>
+          <a:p>
+            <a:pPr indent="0" marL="0">
+              <a:buNone/>
+            </a:pPr>
+            <a:r>
+              <a:rPr lang="en-US" sz="1300" b="1" dirty="0">
                 <a:solidFill>
                   <a:srgbClr val="001E3C"/>
                 </a:solidFill>
@@ -12414,86 +13750,22 @@
                 <a:ea typeface="Meiryo" pitchFamily="34" charset="-122"/>
                 <a:cs typeface="Meiryo" pitchFamily="34" charset="-120"/>
               </a:rPr>
-              <a:t>メンバーが抜けたら</a:t>
-            </a:r>
-            <a:endParaRPr lang="en-US" sz="1400" dirty="0"/>
-          </a:p>
-        </p:txBody>
-      </p:sp>
-      <p:sp>
-        <p:nvSpPr>
-          <p:cNvPr id="8" name="Shape 5"/>
-          <p:cNvSpPr/>
-          <p:nvPr/>
-        </p:nvSpPr>
-        <p:spPr>
-          <a:xfrm>
-            <a:off x="685800" y="2286000"/>
-            <a:ext cx="310896" cy="310896"/>
-          </a:xfrm>
-          <a:prstGeom prst="ellipse">
-            <a:avLst/>
-          </a:prstGeom>
-          <a:solidFill>
-            <a:srgbClr val="001E3C"/>
-          </a:solidFill>
-          <a:ln w="12700">
-            <a:solidFill>
-              <a:srgbClr val="001E3C"/>
-            </a:solidFill>
-            <a:prstDash val="solid"/>
-          </a:ln>
-        </p:spPr>
-      </p:sp>
-      <p:sp>
-        <p:nvSpPr>
-          <p:cNvPr id="9" name="Text 6"/>
-          <p:cNvSpPr txBox="1"/>
-          <p:nvPr/>
-        </p:nvSpPr>
-        <p:spPr>
-          <a:xfrm>
-            <a:off x="685800" y="2286000"/>
-            <a:ext cx="310896" cy="310896"/>
-          </a:xfrm>
-          <a:prstGeom prst="rect">
-            <a:avLst/>
-          </a:prstGeom>
-          <a:noFill/>
-          <a:ln/>
-        </p:spPr>
-        <p:txBody>
-          <a:bodyPr wrap="square" lIns="0" tIns="0" rIns="0" bIns="0" rtlCol="0" anchor="ctr"/>
-          <a:lstStyle/>
-          <a:p>
-            <a:pPr algn="ctr" indent="0" marL="0">
-              <a:buNone/>
-            </a:pPr>
-            <a:r>
-              <a:rPr lang="en-US" sz="1100" b="1" dirty="0">
-                <a:solidFill>
-                  <a:srgbClr val="FFFFFF"/>
-                </a:solidFill>
-                <a:latin typeface="Consolas" pitchFamily="34" charset="0"/>
-                <a:ea typeface="Consolas" pitchFamily="34" charset="-122"/>
-                <a:cs typeface="Consolas" pitchFamily="34" charset="-120"/>
-              </a:rPr>
-              <a:t>1</a:t>
-            </a:r>
-            <a:endParaRPr lang="en-US" sz="1100" dirty="0"/>
-          </a:p>
-        </p:txBody>
-      </p:sp>
-      <p:sp>
-        <p:nvSpPr>
-          <p:cNvPr id="10" name="Text 7"/>
-          <p:cNvSpPr txBox="1"/>
-          <p:nvPr/>
-        </p:nvSpPr>
-        <p:spPr>
-          <a:xfrm>
-            <a:off x="1124712" y="2295144"/>
-            <a:ext cx="3172968" cy="274320"/>
+              <a:t>アドレスを入れる</a:t>
+            </a:r>
+            <a:endParaRPr lang="en-US" sz="1300" dirty="0"/>
+          </a:p>
+        </p:txBody>
+      </p:sp>
+      <p:sp>
+        <p:nvSpPr>
+          <p:cNvPr id="8" name="Text 5"/>
+          <p:cNvSpPr txBox="1"/>
+          <p:nvPr/>
+        </p:nvSpPr>
+        <p:spPr>
+          <a:xfrm>
+            <a:off x="640080" y="2514600"/>
+            <a:ext cx="1600200" cy="658368"/>
           </a:xfrm>
           <a:prstGeom prst="rect">
             <a:avLst/>
@@ -12506,356 +13778,60 @@
           <a:lstStyle/>
           <a:p>
             <a:pPr indent="0" marL="0">
-              <a:buNone/>
-            </a:pPr>
-            <a:r>
-              <a:rPr lang="en-US" sz="1200" b="1" dirty="0">
-                <a:solidFill>
-                  <a:srgbClr val="001E3C"/>
+              <a:lnSpc>
+                <a:spcPct val="120000"/>
+              </a:lnSpc>
+              <a:buNone/>
+            </a:pPr>
+            <a:r>
+              <a:rPr lang="en-US" sz="950" dirty="0">
+                <a:solidFill>
+                  <a:srgbClr val="1B2B3A"/>
                 </a:solidFill>
                 <a:latin typeface="Meiryo" pitchFamily="34" charset="0"/>
                 <a:ea typeface="Meiryo" pitchFamily="34" charset="-122"/>
                 <a:cs typeface="Meiryo" pitchFamily="34" charset="-120"/>
               </a:rPr>
-              <a:t>WG を抜けるだけなら</a:t>
-            </a:r>
-            <a:endParaRPr lang="en-US" sz="1200" dirty="0"/>
-          </a:p>
-        </p:txBody>
-      </p:sp>
-      <p:sp>
-        <p:nvSpPr>
-          <p:cNvPr id="11" name="Text 8"/>
-          <p:cNvSpPr txBox="1"/>
-          <p:nvPr/>
-        </p:nvSpPr>
-        <p:spPr>
-          <a:xfrm>
-            <a:off x="1124712" y="2560320"/>
-            <a:ext cx="3172968" cy="512064"/>
-          </a:xfrm>
-          <a:prstGeom prst="rect">
-            <a:avLst/>
-          </a:prstGeom>
-          <a:noFill/>
-          <a:ln/>
-        </p:spPr>
-        <p:txBody>
-          <a:bodyPr wrap="square" lIns="0" tIns="0" rIns="0" bIns="0" rtlCol="0" anchor="t"/>
-          <a:lstStyle/>
-          <a:p>
-            <a:pPr indent="0" marL="0">
-              <a:buNone/>
-            </a:pPr>
-            <a:r>
-              <a:rPr lang="en-US" sz="1000" dirty="0">
-                <a:solidFill>
-                  <a:srgbClr val="1B2B3A"/>
-                </a:solidFill>
-                <a:latin typeface="Meiryo" pitchFamily="34" charset="0"/>
-                <a:ea typeface="Meiryo" pitchFamily="34" charset="-122"/>
-                <a:cs typeface="Meiryo" pitchFamily="34" charset="-120"/>
-              </a:rPr>
-              <a:t>チームの「Members」から外す</a:t>
-            </a:r>
-            <a:endParaRPr lang="en-US" sz="1000" dirty="0"/>
-          </a:p>
-        </p:txBody>
-      </p:sp>
-      <p:sp>
-        <p:nvSpPr>
-          <p:cNvPr id="12" name="Shape 9"/>
+              <a:t>本人が「WG に参加」で大学のアドレスを入れる</a:t>
+            </a:r>
+            <a:endParaRPr lang="en-US" sz="950" dirty="0"/>
+          </a:p>
+        </p:txBody>
+      </p:sp>
+      <p:sp>
+        <p:nvSpPr>
+          <p:cNvPr id="9" name="Shape 6"/>
           <p:cNvSpPr/>
           <p:nvPr/>
         </p:nvSpPr>
         <p:spPr>
           <a:xfrm>
-            <a:off x="685800" y="3090672"/>
-            <a:ext cx="310896" cy="310896"/>
-          </a:xfrm>
-          <a:prstGeom prst="ellipse">
-            <a:avLst/>
-          </a:prstGeom>
-          <a:solidFill>
-            <a:srgbClr val="001E3C"/>
-          </a:solidFill>
-          <a:ln w="12700">
+            <a:off x="2404872" y="2331720"/>
+            <a:ext cx="128016" cy="0"/>
+          </a:xfrm>
+          <a:prstGeom prst="line">
+            <a:avLst/>
+          </a:prstGeom>
+          <a:noFill/>
+          <a:ln w="19050">
             <a:solidFill>
-              <a:srgbClr val="001E3C"/>
+              <a:srgbClr val="1A4A70"/>
             </a:solidFill>
             <a:prstDash val="solid"/>
+            <a:tailEnd type="triangle"/>
           </a:ln>
         </p:spPr>
       </p:sp>
       <p:sp>
         <p:nvSpPr>
-          <p:cNvPr id="13" name="Text 10"/>
-          <p:cNvSpPr txBox="1"/>
-          <p:nvPr/>
-        </p:nvSpPr>
-        <p:spPr>
-          <a:xfrm>
-            <a:off x="685800" y="3090672"/>
-            <a:ext cx="310896" cy="310896"/>
-          </a:xfrm>
-          <a:prstGeom prst="rect">
-            <a:avLst/>
-          </a:prstGeom>
-          <a:noFill/>
-          <a:ln/>
-        </p:spPr>
-        <p:txBody>
-          <a:bodyPr wrap="square" lIns="0" tIns="0" rIns="0" bIns="0" rtlCol="0" anchor="ctr"/>
-          <a:lstStyle/>
-          <a:p>
-            <a:pPr algn="ctr" indent="0" marL="0">
-              <a:buNone/>
-            </a:pPr>
-            <a:r>
-              <a:rPr lang="en-US" sz="1100" b="1" dirty="0">
-                <a:solidFill>
-                  <a:srgbClr val="FFFFFF"/>
-                </a:solidFill>
-                <a:latin typeface="Consolas" pitchFamily="34" charset="0"/>
-                <a:ea typeface="Consolas" pitchFamily="34" charset="-122"/>
-                <a:cs typeface="Consolas" pitchFamily="34" charset="-120"/>
-              </a:rPr>
-              <a:t>2</a:t>
-            </a:r>
-            <a:endParaRPr lang="en-US" sz="1100" dirty="0"/>
-          </a:p>
-        </p:txBody>
-      </p:sp>
-      <p:sp>
-        <p:nvSpPr>
-          <p:cNvPr id="14" name="Text 11"/>
-          <p:cNvSpPr txBox="1"/>
-          <p:nvPr/>
-        </p:nvSpPr>
-        <p:spPr>
-          <a:xfrm>
-            <a:off x="1124712" y="3099816"/>
-            <a:ext cx="3172968" cy="274320"/>
-          </a:xfrm>
-          <a:prstGeom prst="rect">
-            <a:avLst/>
-          </a:prstGeom>
-          <a:noFill/>
-          <a:ln/>
-        </p:spPr>
-        <p:txBody>
-          <a:bodyPr wrap="square" lIns="0" tIns="0" rIns="0" bIns="0" rtlCol="0" anchor="t"/>
-          <a:lstStyle/>
-          <a:p>
-            <a:pPr indent="0" marL="0">
-              <a:buNone/>
-            </a:pPr>
-            <a:r>
-              <a:rPr lang="en-US" sz="1200" b="1" dirty="0">
-                <a:solidFill>
-                  <a:srgbClr val="001E3C"/>
-                </a:solidFill>
-                <a:latin typeface="Meiryo" pitchFamily="34" charset="0"/>
-                <a:ea typeface="Meiryo" pitchFamily="34" charset="-122"/>
-                <a:cs typeface="Meiryo" pitchFamily="34" charset="-120"/>
-              </a:rPr>
-              <a:t>卒業・退部なら org から外す</a:t>
-            </a:r>
-            <a:endParaRPr lang="en-US" sz="1200" dirty="0"/>
-          </a:p>
-        </p:txBody>
-      </p:sp>
-      <p:sp>
-        <p:nvSpPr>
-          <p:cNvPr id="15" name="Text 12"/>
-          <p:cNvSpPr txBox="1"/>
-          <p:nvPr/>
-        </p:nvSpPr>
-        <p:spPr>
-          <a:xfrm>
-            <a:off x="1124712" y="3364992"/>
-            <a:ext cx="3172968" cy="512064"/>
-          </a:xfrm>
-          <a:prstGeom prst="rect">
-            <a:avLst/>
-          </a:prstGeom>
-          <a:noFill/>
-          <a:ln/>
-        </p:spPr>
-        <p:txBody>
-          <a:bodyPr wrap="square" lIns="0" tIns="0" rIns="0" bIns="0" rtlCol="0" anchor="t"/>
-          <a:lstStyle/>
-          <a:p>
-            <a:pPr indent="0" marL="0">
-              <a:buNone/>
-            </a:pPr>
-            <a:r>
-              <a:rPr lang="en-US" sz="1000" dirty="0">
-                <a:solidFill>
-                  <a:srgbClr val="1B2B3A"/>
-                </a:solidFill>
-                <a:latin typeface="Meiryo" pitchFamily="34" charset="0"/>
-                <a:ea typeface="Meiryo" pitchFamily="34" charset="-122"/>
-                <a:cs typeface="Meiryo" pitchFamily="34" charset="-120"/>
-              </a:rPr>
-              <a:t>org の「People」→ その人 →「Remove from organization」。チームからも外れる</a:t>
-            </a:r>
-            <a:endParaRPr lang="en-US" sz="1000" dirty="0"/>
-          </a:p>
-        </p:txBody>
-      </p:sp>
-      <p:sp>
-        <p:nvSpPr>
-          <p:cNvPr id="16" name="Shape 13"/>
+          <p:cNvPr id="10" name="Shape 7"/>
           <p:cNvSpPr/>
           <p:nvPr/>
         </p:nvSpPr>
         <p:spPr>
           <a:xfrm>
-            <a:off x="685800" y="3895344"/>
-            <a:ext cx="310896" cy="310896"/>
-          </a:xfrm>
-          <a:prstGeom prst="ellipse">
-            <a:avLst/>
-          </a:prstGeom>
-          <a:solidFill>
-            <a:srgbClr val="001E3C"/>
-          </a:solidFill>
-          <a:ln w="12700">
-            <a:solidFill>
-              <a:srgbClr val="001E3C"/>
-            </a:solidFill>
-            <a:prstDash val="solid"/>
-          </a:ln>
-        </p:spPr>
-      </p:sp>
-      <p:sp>
-        <p:nvSpPr>
-          <p:cNvPr id="17" name="Text 14"/>
-          <p:cNvSpPr txBox="1"/>
-          <p:nvPr/>
-        </p:nvSpPr>
-        <p:spPr>
-          <a:xfrm>
-            <a:off x="685800" y="3895344"/>
-            <a:ext cx="310896" cy="310896"/>
-          </a:xfrm>
-          <a:prstGeom prst="rect">
-            <a:avLst/>
-          </a:prstGeom>
-          <a:noFill/>
-          <a:ln/>
-        </p:spPr>
-        <p:txBody>
-          <a:bodyPr wrap="square" lIns="0" tIns="0" rIns="0" bIns="0" rtlCol="0" anchor="ctr"/>
-          <a:lstStyle/>
-          <a:p>
-            <a:pPr algn="ctr" indent="0" marL="0">
-              <a:buNone/>
-            </a:pPr>
-            <a:r>
-              <a:rPr lang="en-US" sz="1100" b="1" dirty="0">
-                <a:solidFill>
-                  <a:srgbClr val="FFFFFF"/>
-                </a:solidFill>
-                <a:latin typeface="Consolas" pitchFamily="34" charset="0"/>
-                <a:ea typeface="Consolas" pitchFamily="34" charset="-122"/>
-                <a:cs typeface="Consolas" pitchFamily="34" charset="-120"/>
-              </a:rPr>
-              <a:t>3</a:t>
-            </a:r>
-            <a:endParaRPr lang="en-US" sz="1100" dirty="0"/>
-          </a:p>
-        </p:txBody>
-      </p:sp>
-      <p:sp>
-        <p:nvSpPr>
-          <p:cNvPr id="18" name="Text 15"/>
-          <p:cNvSpPr txBox="1"/>
-          <p:nvPr/>
-        </p:nvSpPr>
-        <p:spPr>
-          <a:xfrm>
-            <a:off x="1124712" y="3904488"/>
-            <a:ext cx="3172968" cy="274320"/>
-          </a:xfrm>
-          <a:prstGeom prst="rect">
-            <a:avLst/>
-          </a:prstGeom>
-          <a:noFill/>
-          <a:ln/>
-        </p:spPr>
-        <p:txBody>
-          <a:bodyPr wrap="square" lIns="0" tIns="0" rIns="0" bIns="0" rtlCol="0" anchor="t"/>
-          <a:lstStyle/>
-          <a:p>
-            <a:pPr indent="0" marL="0">
-              <a:buNone/>
-            </a:pPr>
-            <a:r>
-              <a:rPr lang="en-US" sz="1200" b="1" dirty="0">
-                <a:solidFill>
-                  <a:srgbClr val="001E3C"/>
-                </a:solidFill>
-                <a:latin typeface="Meiryo" pitchFamily="34" charset="0"/>
-                <a:ea typeface="Meiryo" pitchFamily="34" charset="-122"/>
-                <a:cs typeface="Meiryo" pitchFamily="34" charset="-120"/>
-              </a:rPr>
-              <a:t>リーダーが替わるとき</a:t>
-            </a:r>
-            <a:endParaRPr lang="en-US" sz="1200" dirty="0"/>
-          </a:p>
-        </p:txBody>
-      </p:sp>
-      <p:sp>
-        <p:nvSpPr>
-          <p:cNvPr id="19" name="Text 16"/>
-          <p:cNvSpPr txBox="1"/>
-          <p:nvPr/>
-        </p:nvSpPr>
-        <p:spPr>
-          <a:xfrm>
-            <a:off x="1124712" y="4169664"/>
-            <a:ext cx="3172968" cy="512064"/>
-          </a:xfrm>
-          <a:prstGeom prst="rect">
-            <a:avLst/>
-          </a:prstGeom>
-          <a:noFill/>
-          <a:ln/>
-        </p:spPr>
-        <p:txBody>
-          <a:bodyPr wrap="square" lIns="0" tIns="0" rIns="0" bIns="0" rtlCol="0" anchor="t"/>
-          <a:lstStyle/>
-          <a:p>
-            <a:pPr indent="0" marL="0">
-              <a:buNone/>
-            </a:pPr>
-            <a:r>
-              <a:rPr lang="en-US" sz="1000" dirty="0">
-                <a:solidFill>
-                  <a:srgbClr val="1B2B3A"/>
-                </a:solidFill>
-                <a:latin typeface="Meiryo" pitchFamily="34" charset="0"/>
-                <a:ea typeface="Meiryo" pitchFamily="34" charset="-122"/>
-                <a:cs typeface="Meiryo" pitchFamily="34" charset="-120"/>
-              </a:rPr>
-              <a:t>README のメンバー欄を直す PR を出してもらう</a:t>
-            </a:r>
-            <a:endParaRPr lang="en-US" sz="1000" dirty="0"/>
-          </a:p>
-        </p:txBody>
-      </p:sp>
-      <p:sp>
-        <p:nvSpPr>
-          <p:cNvPr id="20" name="Shape 17"/>
-          <p:cNvSpPr/>
-          <p:nvPr/>
-        </p:nvSpPr>
-        <p:spPr>
-          <a:xfrm>
-            <a:off x="4663440" y="1417320"/>
-            <a:ext cx="4023360" cy="3154680"/>
+            <a:off x="2560320" y="1417320"/>
+            <a:ext cx="1920240" cy="1828800"/>
           </a:xfrm>
           <a:prstGeom prst="rect">
             <a:avLst/>
@@ -12880,13 +13856,385 @@
       </p:sp>
       <p:sp>
         <p:nvSpPr>
-          <p:cNvPr id="21" name="Shape 18"/>
+          <p:cNvPr id="11" name="Shape 8"/>
           <p:cNvSpPr/>
           <p:nvPr/>
         </p:nvSpPr>
         <p:spPr>
           <a:xfrm>
-            <a:off x="4892040" y="1618488"/>
+            <a:off x="2743200" y="1600200"/>
+            <a:ext cx="457200" cy="457200"/>
+          </a:xfrm>
+          <a:prstGeom prst="ellipse">
+            <a:avLst/>
+          </a:prstGeom>
+          <a:solidFill>
+            <a:srgbClr val="5BB8FF"/>
+          </a:solidFill>
+          <a:ln w="12700">
+            <a:solidFill>
+              <a:srgbClr val="5BB8FF"/>
+            </a:solidFill>
+            <a:prstDash val="solid"/>
+          </a:ln>
+        </p:spPr>
+      </p:sp>
+      <p:pic>
+        <p:nvPicPr>
+          <p:cNvPr id="12" name="Image 1" descr="preencoded.png">    </p:cNvPr>
+          <p:cNvPicPr>
+            <a:picLocks noChangeAspect="1"/>
+          </p:cNvPicPr>
+          <p:nvPr/>
+        </p:nvPicPr>
+        <p:blipFill>
+          <a:blip r:embed="rId2"/>
+          <a:stretch>
+            <a:fillRect/>
+          </a:stretch>
+        </p:blipFill>
+        <p:spPr>
+          <a:xfrm>
+            <a:off x="2862072" y="1719072"/>
+            <a:ext cx="219456" cy="219456"/>
+          </a:xfrm>
+          <a:prstGeom prst="rect">
+            <a:avLst/>
+          </a:prstGeom>
+        </p:spPr>
+      </p:pic>
+      <p:sp>
+        <p:nvSpPr>
+          <p:cNvPr id="13" name="Text 9"/>
+          <p:cNvSpPr txBox="1"/>
+          <p:nvPr/>
+        </p:nvSpPr>
+        <p:spPr>
+          <a:xfrm>
+            <a:off x="2743200" y="2194560"/>
+            <a:ext cx="1600200" cy="292608"/>
+          </a:xfrm>
+          <a:prstGeom prst="rect">
+            <a:avLst/>
+          </a:prstGeom>
+          <a:noFill/>
+          <a:ln/>
+        </p:spPr>
+        <p:txBody>
+          <a:bodyPr wrap="square" lIns="0" tIns="0" rIns="0" bIns="0" rtlCol="0" anchor="t"/>
+          <a:lstStyle/>
+          <a:p>
+            <a:pPr indent="0" marL="0">
+              <a:buNone/>
+            </a:pPr>
+            <a:r>
+              <a:rPr lang="en-US" sz="1300" b="1" dirty="0">
+                <a:solidFill>
+                  <a:srgbClr val="001E3C"/>
+                </a:solidFill>
+                <a:latin typeface="Meiryo" pitchFamily="34" charset="0"/>
+                <a:ea typeface="Meiryo" pitchFamily="34" charset="-122"/>
+                <a:cs typeface="Meiryo" pitchFamily="34" charset="-120"/>
+              </a:rPr>
+              <a:t>名簿で確かめる</a:t>
+            </a:r>
+            <a:endParaRPr lang="en-US" sz="1300" dirty="0"/>
+          </a:p>
+        </p:txBody>
+      </p:sp>
+      <p:sp>
+        <p:nvSpPr>
+          <p:cNvPr id="14" name="Text 10"/>
+          <p:cNvSpPr txBox="1"/>
+          <p:nvPr/>
+        </p:nvSpPr>
+        <p:spPr>
+          <a:xfrm>
+            <a:off x="2743200" y="2514600"/>
+            <a:ext cx="1600200" cy="658368"/>
+          </a:xfrm>
+          <a:prstGeom prst="rect">
+            <a:avLst/>
+          </a:prstGeom>
+          <a:noFill/>
+          <a:ln/>
+        </p:spPr>
+        <p:txBody>
+          <a:bodyPr wrap="square" lIns="0" tIns="0" rIns="0" bIns="0" rtlCol="0" anchor="t"/>
+          <a:lstStyle/>
+          <a:p>
+            <a:pPr indent="0" marL="0">
+              <a:lnSpc>
+                <a:spcPct val="120000"/>
+              </a:lnSpc>
+              <a:buNone/>
+            </a:pPr>
+            <a:r>
+              <a:rPr lang="en-US" sz="950" dirty="0">
+                <a:solidFill>
+                  <a:srgbClr val="1B2B3A"/>
+                </a:solidFill>
+                <a:latin typeface="Meiryo" pitchFamily="34" charset="0"/>
+                <a:ea typeface="Meiryo" pitchFamily="34" charset="-122"/>
+                <a:cs typeface="Meiryo" pitchFamily="34" charset="-120"/>
+              </a:rPr>
+              <a:t>Classroom のクラブのクラスにいるか（運営の許可で読む）</a:t>
+            </a:r>
+            <a:endParaRPr lang="en-US" sz="950" dirty="0"/>
+          </a:p>
+        </p:txBody>
+      </p:sp>
+      <p:sp>
+        <p:nvSpPr>
+          <p:cNvPr id="15" name="Shape 11"/>
+          <p:cNvSpPr/>
+          <p:nvPr/>
+        </p:nvSpPr>
+        <p:spPr>
+          <a:xfrm>
+            <a:off x="4507992" y="2331720"/>
+            <a:ext cx="128016" cy="0"/>
+          </a:xfrm>
+          <a:prstGeom prst="line">
+            <a:avLst/>
+          </a:prstGeom>
+          <a:noFill/>
+          <a:ln w="19050">
+            <a:solidFill>
+              <a:srgbClr val="1A4A70"/>
+            </a:solidFill>
+            <a:prstDash val="solid"/>
+            <a:tailEnd type="triangle"/>
+          </a:ln>
+        </p:spPr>
+      </p:sp>
+      <p:sp>
+        <p:nvSpPr>
+          <p:cNvPr id="16" name="Shape 12"/>
+          <p:cNvSpPr/>
+          <p:nvPr/>
+        </p:nvSpPr>
+        <p:spPr>
+          <a:xfrm>
+            <a:off x="4663440" y="1417320"/>
+            <a:ext cx="1920240" cy="1828800"/>
+          </a:xfrm>
+          <a:prstGeom prst="rect">
+            <a:avLst/>
+          </a:prstGeom>
+          <a:solidFill>
+            <a:srgbClr val="FFFFFF"/>
+          </a:solidFill>
+          <a:ln w="12700">
+            <a:solidFill>
+              <a:srgbClr val="FFFFFF"/>
+            </a:solidFill>
+            <a:prstDash val="solid"/>
+          </a:ln>
+          <a:effectLst>
+            <a:outerShdw sx="100000" sy="100000" kx="0" ky="0" algn="bl" rotWithShape="0" blurRad="76200" dist="25400" dir="5400000">
+              <a:srgbClr val="000000">
+                <a:alpha val="12000"/>
+              </a:srgbClr>
+            </a:outerShdw>
+          </a:effectLst>
+        </p:spPr>
+      </p:sp>
+      <p:sp>
+        <p:nvSpPr>
+          <p:cNvPr id="17" name="Shape 13"/>
+          <p:cNvSpPr/>
+          <p:nvPr/>
+        </p:nvSpPr>
+        <p:spPr>
+          <a:xfrm>
+            <a:off x="4846320" y="1600200"/>
+            <a:ext cx="457200" cy="457200"/>
+          </a:xfrm>
+          <a:prstGeom prst="ellipse">
+            <a:avLst/>
+          </a:prstGeom>
+          <a:solidFill>
+            <a:srgbClr val="5BB8FF"/>
+          </a:solidFill>
+          <a:ln w="12700">
+            <a:solidFill>
+              <a:srgbClr val="5BB8FF"/>
+            </a:solidFill>
+            <a:prstDash val="solid"/>
+          </a:ln>
+        </p:spPr>
+      </p:sp>
+      <p:pic>
+        <p:nvPicPr>
+          <p:cNvPr id="18" name="Image 2" descr="preencoded.png">    </p:cNvPr>
+          <p:cNvPicPr>
+            <a:picLocks noChangeAspect="1"/>
+          </p:cNvPicPr>
+          <p:nvPr/>
+        </p:nvPicPr>
+        <p:blipFill>
+          <a:blip r:embed="rId3"/>
+          <a:stretch>
+            <a:fillRect/>
+          </a:stretch>
+        </p:blipFill>
+        <p:spPr>
+          <a:xfrm>
+            <a:off x="4965192" y="1719072"/>
+            <a:ext cx="219456" cy="219456"/>
+          </a:xfrm>
+          <a:prstGeom prst="rect">
+            <a:avLst/>
+          </a:prstGeom>
+        </p:spPr>
+      </p:pic>
+      <p:sp>
+        <p:nvSpPr>
+          <p:cNvPr id="19" name="Text 14"/>
+          <p:cNvSpPr txBox="1"/>
+          <p:nvPr/>
+        </p:nvSpPr>
+        <p:spPr>
+          <a:xfrm>
+            <a:off x="4846320" y="2194560"/>
+            <a:ext cx="1600200" cy="292608"/>
+          </a:xfrm>
+          <a:prstGeom prst="rect">
+            <a:avLst/>
+          </a:prstGeom>
+          <a:noFill/>
+          <a:ln/>
+        </p:spPr>
+        <p:txBody>
+          <a:bodyPr wrap="square" lIns="0" tIns="0" rIns="0" bIns="0" rtlCol="0" anchor="t"/>
+          <a:lstStyle/>
+          <a:p>
+            <a:pPr indent="0" marL="0">
+              <a:buNone/>
+            </a:pPr>
+            <a:r>
+              <a:rPr lang="en-US" sz="1300" b="1" dirty="0">
+                <a:solidFill>
+                  <a:srgbClr val="001E3C"/>
+                </a:solidFill>
+                <a:latin typeface="Meiryo" pitchFamily="34" charset="0"/>
+                <a:ea typeface="Meiryo" pitchFamily="34" charset="-122"/>
+                <a:cs typeface="Meiryo" pitchFamily="34" charset="-120"/>
+              </a:rPr>
+              <a:t>メールのリンク</a:t>
+            </a:r>
+            <a:endParaRPr lang="en-US" sz="1300" dirty="0"/>
+          </a:p>
+        </p:txBody>
+      </p:sp>
+      <p:sp>
+        <p:nvSpPr>
+          <p:cNvPr id="20" name="Text 15"/>
+          <p:cNvSpPr txBox="1"/>
+          <p:nvPr/>
+        </p:nvSpPr>
+        <p:spPr>
+          <a:xfrm>
+            <a:off x="4846320" y="2514600"/>
+            <a:ext cx="1600200" cy="658368"/>
+          </a:xfrm>
+          <a:prstGeom prst="rect">
+            <a:avLst/>
+          </a:prstGeom>
+          <a:noFill/>
+          <a:ln/>
+        </p:spPr>
+        <p:txBody>
+          <a:bodyPr wrap="square" lIns="0" tIns="0" rIns="0" bIns="0" rtlCol="0" anchor="t"/>
+          <a:lstStyle/>
+          <a:p>
+            <a:pPr indent="0" marL="0">
+              <a:lnSpc>
+                <a:spcPct val="120000"/>
+              </a:lnSpc>
+              <a:buNone/>
+            </a:pPr>
+            <a:r>
+              <a:rPr lang="en-US" sz="950" dirty="0">
+                <a:solidFill>
+                  <a:srgbClr val="1B2B3A"/>
+                </a:solidFill>
+                <a:latin typeface="Meiryo" pitchFamily="34" charset="0"/>
+                <a:ea typeface="Meiryo" pitchFamily="34" charset="-122"/>
+                <a:cs typeface="Meiryo" pitchFamily="34" charset="-120"/>
+              </a:rPr>
+              <a:t>アドレスの持ち主だと確かめる</a:t>
+            </a:r>
+            <a:endParaRPr lang="en-US" sz="950" dirty="0"/>
+          </a:p>
+        </p:txBody>
+      </p:sp>
+      <p:sp>
+        <p:nvSpPr>
+          <p:cNvPr id="21" name="Shape 16"/>
+          <p:cNvSpPr/>
+          <p:nvPr/>
+        </p:nvSpPr>
+        <p:spPr>
+          <a:xfrm>
+            <a:off x="6611112" y="2331720"/>
+            <a:ext cx="128016" cy="0"/>
+          </a:xfrm>
+          <a:prstGeom prst="line">
+            <a:avLst/>
+          </a:prstGeom>
+          <a:noFill/>
+          <a:ln w="19050">
+            <a:solidFill>
+              <a:srgbClr val="1A4A70"/>
+            </a:solidFill>
+            <a:prstDash val="solid"/>
+            <a:tailEnd type="triangle"/>
+          </a:ln>
+        </p:spPr>
+      </p:sp>
+      <p:sp>
+        <p:nvSpPr>
+          <p:cNvPr id="22" name="Shape 17"/>
+          <p:cNvSpPr/>
+          <p:nvPr/>
+        </p:nvSpPr>
+        <p:spPr>
+          <a:xfrm>
+            <a:off x="6766560" y="1417320"/>
+            <a:ext cx="1920240" cy="1828800"/>
+          </a:xfrm>
+          <a:prstGeom prst="rect">
+            <a:avLst/>
+          </a:prstGeom>
+          <a:solidFill>
+            <a:srgbClr val="FFFFFF"/>
+          </a:solidFill>
+          <a:ln w="12700">
+            <a:solidFill>
+              <a:srgbClr val="FFFFFF"/>
+            </a:solidFill>
+            <a:prstDash val="solid"/>
+          </a:ln>
+          <a:effectLst>
+            <a:outerShdw sx="100000" sy="100000" kx="0" ky="0" algn="bl" rotWithShape="0" blurRad="76200" dist="25400" dir="5400000">
+              <a:srgbClr val="000000">
+                <a:alpha val="12000"/>
+              </a:srgbClr>
+            </a:outerShdw>
+          </a:effectLst>
+        </p:spPr>
+      </p:sp>
+      <p:sp>
+        <p:nvSpPr>
+          <p:cNvPr id="23" name="Shape 18"/>
+          <p:cNvSpPr/>
+          <p:nvPr/>
+        </p:nvSpPr>
+        <p:spPr>
+          <a:xfrm>
+            <a:off x="6949440" y="1600200"/>
             <a:ext cx="457200" cy="457200"/>
           </a:xfrm>
           <a:prstGeom prst="ellipse">
@@ -12905,21 +14253,21 @@
       </p:sp>
       <p:pic>
         <p:nvPicPr>
-          <p:cNvPr id="22" name="Image 1" descr="preencoded.png">    </p:cNvPr>
+          <p:cNvPr id="24" name="Image 3" descr="preencoded.png">    </p:cNvPr>
           <p:cNvPicPr>
             <a:picLocks noChangeAspect="1"/>
           </p:cNvPicPr>
           <p:nvPr/>
         </p:nvPicPr>
         <p:blipFill>
-          <a:blip r:embed="rId2"/>
+          <a:blip r:embed="rId4"/>
           <a:stretch>
             <a:fillRect/>
           </a:stretch>
         </p:blipFill>
         <p:spPr>
           <a:xfrm>
-            <a:off x="5010912" y="1737360"/>
+            <a:off x="7068312" y="1719072"/>
             <a:ext cx="219456" cy="219456"/>
           </a:xfrm>
           <a:prstGeom prst="rect">
@@ -12929,30 +14277,30 @@
       </p:pic>
       <p:sp>
         <p:nvSpPr>
-          <p:cNvPr id="23" name="Text 19"/>
-          <p:cNvSpPr txBox="1"/>
-          <p:nvPr/>
-        </p:nvSpPr>
-        <p:spPr>
-          <a:xfrm>
-            <a:off x="5486400" y="1618488"/>
-            <a:ext cx="3017520" cy="457200"/>
-          </a:xfrm>
-          <a:prstGeom prst="rect">
-            <a:avLst/>
-          </a:prstGeom>
-          <a:noFill/>
-          <a:ln/>
-        </p:spPr>
-        <p:txBody>
-          <a:bodyPr wrap="square" lIns="0" tIns="0" rIns="0" bIns="0" rtlCol="0" anchor="ctr"/>
-          <a:lstStyle/>
-          <a:p>
-            <a:pPr indent="0" marL="0">
-              <a:buNone/>
-            </a:pPr>
-            <a:r>
-              <a:rPr lang="en-US" sz="1400" b="1" dirty="0">
+          <p:cNvPr id="25" name="Text 19"/>
+          <p:cNvSpPr txBox="1"/>
+          <p:nvPr/>
+        </p:nvSpPr>
+        <p:spPr>
+          <a:xfrm>
+            <a:off x="6949440" y="2194560"/>
+            <a:ext cx="1600200" cy="292608"/>
+          </a:xfrm>
+          <a:prstGeom prst="rect">
+            <a:avLst/>
+          </a:prstGeom>
+          <a:noFill/>
+          <a:ln/>
+        </p:spPr>
+        <p:txBody>
+          <a:bodyPr wrap="square" lIns="0" tIns="0" rIns="0" bIns="0" rtlCol="0" anchor="t"/>
+          <a:lstStyle/>
+          <a:p>
+            <a:pPr indent="0" marL="0">
+              <a:buNone/>
+            </a:pPr>
+            <a:r>
+              <a:rPr lang="en-US" sz="1300" b="1" dirty="0">
                 <a:solidFill>
                   <a:srgbClr val="001E3C"/>
                 </a:solidFill>
@@ -12960,32 +14308,74 @@
                 <a:ea typeface="Meiryo" pitchFamily="34" charset="-122"/>
                 <a:cs typeface="Meiryo" pitchFamily="34" charset="-120"/>
               </a:rPr>
-              <a:t>WG が終わったら</a:t>
-            </a:r>
-            <a:endParaRPr lang="en-US" sz="1400" dirty="0"/>
-          </a:p>
-        </p:txBody>
-      </p:sp>
-      <p:sp>
-        <p:nvSpPr>
-          <p:cNvPr id="24" name="Shape 20"/>
+              <a:t>チームに追加</a:t>
+            </a:r>
+            <a:endParaRPr lang="en-US" sz="1300" dirty="0"/>
+          </a:p>
+        </p:txBody>
+      </p:sp>
+      <p:sp>
+        <p:nvSpPr>
+          <p:cNvPr id="26" name="Text 20"/>
+          <p:cNvSpPr txBox="1"/>
+          <p:nvPr/>
+        </p:nvSpPr>
+        <p:spPr>
+          <a:xfrm>
+            <a:off x="6949440" y="2514600"/>
+            <a:ext cx="1600200" cy="658368"/>
+          </a:xfrm>
+          <a:prstGeom prst="rect">
+            <a:avLst/>
+          </a:prstGeom>
+          <a:noFill/>
+          <a:ln/>
+        </p:spPr>
+        <p:txBody>
+          <a:bodyPr wrap="square" lIns="0" tIns="0" rIns="0" bIns="0" rtlCol="0" anchor="t"/>
+          <a:lstStyle/>
+          <a:p>
+            <a:pPr indent="0" marL="0">
+              <a:lnSpc>
+                <a:spcPct val="120000"/>
+              </a:lnSpc>
+              <a:buNone/>
+            </a:pPr>
+            <a:r>
+              <a:rPr lang="en-US" sz="950" dirty="0">
+                <a:solidFill>
+                  <a:srgbClr val="1B2B3A"/>
+                </a:solidFill>
+                <a:latin typeface="Meiryo" pitchFamily="34" charset="0"/>
+                <a:ea typeface="Meiryo" pitchFamily="34" charset="-122"/>
+                <a:cs typeface="Meiryo" pitchFamily="34" charset="-120"/>
+              </a:rPr>
+              <a:t>GitHub でログイン。org にいなければ招待が届く</a:t>
+            </a:r>
+            <a:endParaRPr lang="en-US" sz="950" dirty="0"/>
+          </a:p>
+        </p:txBody>
+      </p:sp>
+      <p:sp>
+        <p:nvSpPr>
+          <p:cNvPr id="27" name="Shape 21"/>
           <p:cNvSpPr/>
           <p:nvPr/>
         </p:nvSpPr>
         <p:spPr>
           <a:xfrm>
-            <a:off x="4892040" y="2286000"/>
-            <a:ext cx="310896" cy="310896"/>
-          </a:xfrm>
-          <a:prstGeom prst="ellipse">
+            <a:off x="457200" y="3429000"/>
+            <a:ext cx="2624328" cy="1234440"/>
+          </a:xfrm>
+          <a:prstGeom prst="rect">
             <a:avLst/>
           </a:prstGeom>
           <a:solidFill>
-            <a:srgbClr val="001E3C"/>
+            <a:srgbClr val="FFFFFF"/>
           </a:solidFill>
           <a:ln w="12700">
             <a:solidFill>
-              <a:srgbClr val="001E3C"/>
+              <a:srgbClr val="DDDDDD"/>
             </a:solidFill>
             <a:prstDash val="solid"/>
           </a:ln>
@@ -12993,69 +14383,30 @@
       </p:sp>
       <p:sp>
         <p:nvSpPr>
-          <p:cNvPr id="25" name="Text 21"/>
-          <p:cNvSpPr txBox="1"/>
-          <p:nvPr/>
-        </p:nvSpPr>
-        <p:spPr>
-          <a:xfrm>
-            <a:off x="4892040" y="2286000"/>
-            <a:ext cx="310896" cy="310896"/>
-          </a:xfrm>
-          <a:prstGeom prst="rect">
-            <a:avLst/>
-          </a:prstGeom>
-          <a:noFill/>
-          <a:ln/>
-        </p:spPr>
-        <p:txBody>
-          <a:bodyPr wrap="square" lIns="0" tIns="0" rIns="0" bIns="0" rtlCol="0" anchor="ctr"/>
-          <a:lstStyle/>
-          <a:p>
-            <a:pPr algn="ctr" indent="0" marL="0">
+          <p:cNvPr id="28" name="Text 22"/>
+          <p:cNvSpPr txBox="1"/>
+          <p:nvPr/>
+        </p:nvSpPr>
+        <p:spPr>
+          <a:xfrm>
+            <a:off x="640080" y="3538728"/>
+            <a:ext cx="2258568" cy="256032"/>
+          </a:xfrm>
+          <a:prstGeom prst="rect">
+            <a:avLst/>
+          </a:prstGeom>
+          <a:noFill/>
+          <a:ln/>
+        </p:spPr>
+        <p:txBody>
+          <a:bodyPr wrap="square" lIns="0" tIns="0" rIns="0" bIns="0" rtlCol="0" anchor="t"/>
+          <a:lstStyle/>
+          <a:p>
+            <a:pPr indent="0" marL="0">
               <a:buNone/>
             </a:pPr>
             <a:r>
               <a:rPr lang="en-US" sz="1100" b="1" dirty="0">
-                <a:solidFill>
-                  <a:srgbClr val="FFFFFF"/>
-                </a:solidFill>
-                <a:latin typeface="Consolas" pitchFamily="34" charset="0"/>
-                <a:ea typeface="Consolas" pitchFamily="34" charset="-122"/>
-                <a:cs typeface="Consolas" pitchFamily="34" charset="-120"/>
-              </a:rPr>
-              <a:t>1</a:t>
-            </a:r>
-            <a:endParaRPr lang="en-US" sz="1100" dirty="0"/>
-          </a:p>
-        </p:txBody>
-      </p:sp>
-      <p:sp>
-        <p:nvSpPr>
-          <p:cNvPr id="26" name="Text 22"/>
-          <p:cNvSpPr txBox="1"/>
-          <p:nvPr/>
-        </p:nvSpPr>
-        <p:spPr>
-          <a:xfrm>
-            <a:off x="5330952" y="2295144"/>
-            <a:ext cx="3172968" cy="274320"/>
-          </a:xfrm>
-          <a:prstGeom prst="rect">
-            <a:avLst/>
-          </a:prstGeom>
-          <a:noFill/>
-          <a:ln/>
-        </p:spPr>
-        <p:txBody>
-          <a:bodyPr wrap="square" lIns="0" tIns="0" rIns="0" bIns="0" rtlCol="0" anchor="t"/>
-          <a:lstStyle/>
-          <a:p>
-            <a:pPr indent="0" marL="0">
-              <a:buNone/>
-            </a:pPr>
-            <a:r>
-              <a:rPr lang="en-US" sz="1200" b="1" dirty="0">
                 <a:solidFill>
                   <a:srgbClr val="001E3C"/>
                 </a:solidFill>
@@ -13063,22 +14414,22 @@
                 <a:ea typeface="Meiryo" pitchFamily="34" charset="-122"/>
                 <a:cs typeface="Meiryo" pitchFamily="34" charset="-120"/>
               </a:rPr>
-              <a:t>サイトの WG 紹介を直す</a:t>
-            </a:r>
-            <a:endParaRPr lang="en-US" sz="1200" dirty="0"/>
-          </a:p>
-        </p:txBody>
-      </p:sp>
-      <p:sp>
-        <p:nvSpPr>
-          <p:cNvPr id="27" name="Text 23"/>
-          <p:cNvSpPr txBox="1"/>
-          <p:nvPr/>
-        </p:nvSpPr>
-        <p:spPr>
-          <a:xfrm>
-            <a:off x="5330952" y="2560320"/>
-            <a:ext cx="3172968" cy="512064"/>
+              <a:t>運営の作業はない</a:t>
+            </a:r>
+            <a:endParaRPr lang="en-US" sz="1100" dirty="0"/>
+          </a:p>
+        </p:txBody>
+      </p:sp>
+      <p:sp>
+        <p:nvSpPr>
+          <p:cNvPr id="29" name="Text 23"/>
+          <p:cNvSpPr txBox="1"/>
+          <p:nvPr/>
+        </p:nvSpPr>
+        <p:spPr>
+          <a:xfrm>
+            <a:off x="640080" y="3840480"/>
+            <a:ext cx="2304288" cy="777240"/>
           </a:xfrm>
           <a:prstGeom prst="rect">
             <a:avLst/>
@@ -13091,10 +14442,13 @@
           <a:lstStyle/>
           <a:p>
             <a:pPr indent="0" marL="0">
-              <a:buNone/>
-            </a:pPr>
-            <a:r>
-              <a:rPr lang="en-US" sz="1000" dirty="0">
+              <a:lnSpc>
+                <a:spcPct val="115000"/>
+              </a:lnSpc>
+              <a:buNone/>
+            </a:pPr>
+            <a:r>
+              <a:rPr lang="en-US" sz="900" dirty="0">
                 <a:solidFill>
                   <a:srgbClr val="1B2B3A"/>
                 </a:solidFill>
@@ -13102,32 +14456,32 @@
                 <a:ea typeface="Meiryo" pitchFamily="34" charset="-122"/>
                 <a:cs typeface="Meiryo" pitchFamily="34" charset="-120"/>
               </a:rPr>
-              <a:t>記録として残すか、「公開する」を外すか決める</a:t>
-            </a:r>
-            <a:endParaRPr lang="en-US" sz="1000" dirty="0"/>
-          </a:p>
-        </p:txBody>
-      </p:sp>
-      <p:sp>
-        <p:nvSpPr>
-          <p:cNvPr id="28" name="Shape 24"/>
+              <a:t>チームを作ってサイトに登録しておけば、あとは本人が進める。Chat は Classroom の授業のリンクから本人が入る。</a:t>
+            </a:r>
+            <a:endParaRPr lang="en-US" sz="900" dirty="0"/>
+          </a:p>
+        </p:txBody>
+      </p:sp>
+      <p:sp>
+        <p:nvSpPr>
+          <p:cNvPr id="30" name="Shape 24"/>
           <p:cNvSpPr/>
           <p:nvPr/>
         </p:nvSpPr>
         <p:spPr>
           <a:xfrm>
-            <a:off x="4892040" y="3090672"/>
-            <a:ext cx="310896" cy="310896"/>
-          </a:xfrm>
-          <a:prstGeom prst="ellipse">
+            <a:off x="3259836" y="3429000"/>
+            <a:ext cx="2624328" cy="1234440"/>
+          </a:xfrm>
+          <a:prstGeom prst="rect">
             <a:avLst/>
           </a:prstGeom>
           <a:solidFill>
-            <a:srgbClr val="001E3C"/>
+            <a:srgbClr val="FFFFFF"/>
           </a:solidFill>
           <a:ln w="12700">
             <a:solidFill>
-              <a:srgbClr val="001E3C"/>
+              <a:srgbClr val="DDDDDD"/>
             </a:solidFill>
             <a:prstDash val="solid"/>
           </a:ln>
@@ -13135,69 +14489,30 @@
       </p:sp>
       <p:sp>
         <p:nvSpPr>
-          <p:cNvPr id="29" name="Text 25"/>
-          <p:cNvSpPr txBox="1"/>
-          <p:nvPr/>
-        </p:nvSpPr>
-        <p:spPr>
-          <a:xfrm>
-            <a:off x="4892040" y="3090672"/>
-            <a:ext cx="310896" cy="310896"/>
-          </a:xfrm>
-          <a:prstGeom prst="rect">
-            <a:avLst/>
-          </a:prstGeom>
-          <a:noFill/>
-          <a:ln/>
-        </p:spPr>
-        <p:txBody>
-          <a:bodyPr wrap="square" lIns="0" tIns="0" rIns="0" bIns="0" rtlCol="0" anchor="ctr"/>
-          <a:lstStyle/>
-          <a:p>
-            <a:pPr algn="ctr" indent="0" marL="0">
+          <p:cNvPr id="31" name="Text 25"/>
+          <p:cNvSpPr txBox="1"/>
+          <p:nvPr/>
+        </p:nvSpPr>
+        <p:spPr>
+          <a:xfrm>
+            <a:off x="3442716" y="3538728"/>
+            <a:ext cx="2258568" cy="256032"/>
+          </a:xfrm>
+          <a:prstGeom prst="rect">
+            <a:avLst/>
+          </a:prstGeom>
+          <a:noFill/>
+          <a:ln/>
+        </p:spPr>
+        <p:txBody>
+          <a:bodyPr wrap="square" lIns="0" tIns="0" rIns="0" bIns="0" rtlCol="0" anchor="t"/>
+          <a:lstStyle/>
+          <a:p>
+            <a:pPr indent="0" marL="0">
               <a:buNone/>
             </a:pPr>
             <a:r>
               <a:rPr lang="en-US" sz="1100" b="1" dirty="0">
-                <a:solidFill>
-                  <a:srgbClr val="FFFFFF"/>
-                </a:solidFill>
-                <a:latin typeface="Consolas" pitchFamily="34" charset="0"/>
-                <a:ea typeface="Consolas" pitchFamily="34" charset="-122"/>
-                <a:cs typeface="Consolas" pitchFamily="34" charset="-120"/>
-              </a:rPr>
-              <a:t>2</a:t>
-            </a:r>
-            <a:endParaRPr lang="en-US" sz="1100" dirty="0"/>
-          </a:p>
-        </p:txBody>
-      </p:sp>
-      <p:sp>
-        <p:nvSpPr>
-          <p:cNvPr id="30" name="Text 26"/>
-          <p:cNvSpPr txBox="1"/>
-          <p:nvPr/>
-        </p:nvSpPr>
-        <p:spPr>
-          <a:xfrm>
-            <a:off x="5330952" y="3099816"/>
-            <a:ext cx="3172968" cy="274320"/>
-          </a:xfrm>
-          <a:prstGeom prst="rect">
-            <a:avLst/>
-          </a:prstGeom>
-          <a:noFill/>
-          <a:ln/>
-        </p:spPr>
-        <p:txBody>
-          <a:bodyPr wrap="square" lIns="0" tIns="0" rIns="0" bIns="0" rtlCol="0" anchor="t"/>
-          <a:lstStyle/>
-          <a:p>
-            <a:pPr indent="0" marL="0">
-              <a:buNone/>
-            </a:pPr>
-            <a:r>
-              <a:rPr lang="en-US" sz="1200" b="1" dirty="0">
                 <a:solidFill>
                   <a:srgbClr val="001E3C"/>
                 </a:solidFill>
@@ -13205,22 +14520,22 @@
                 <a:ea typeface="Meiryo" pitchFamily="34" charset="-122"/>
                 <a:cs typeface="Meiryo" pitchFamily="34" charset="-120"/>
               </a:rPr>
-              <a:t>リポジトリをアーカイブ</a:t>
-            </a:r>
-            <a:endParaRPr lang="en-US" sz="1200" dirty="0"/>
-          </a:p>
-        </p:txBody>
-      </p:sp>
-      <p:sp>
-        <p:nvSpPr>
-          <p:cNvPr id="31" name="Text 27"/>
-          <p:cNvSpPr txBox="1"/>
-          <p:nvPr/>
-        </p:nvSpPr>
-        <p:spPr>
-          <a:xfrm>
-            <a:off x="5330952" y="3364992"/>
-            <a:ext cx="3172968" cy="512064"/>
+              <a:t>個人の情報は残らない</a:t>
+            </a:r>
+            <a:endParaRPr lang="en-US" sz="1100" dirty="0"/>
+          </a:p>
+        </p:txBody>
+      </p:sp>
+      <p:sp>
+        <p:nvSpPr>
+          <p:cNvPr id="32" name="Text 26"/>
+          <p:cNvSpPr txBox="1"/>
+          <p:nvPr/>
+        </p:nvSpPr>
+        <p:spPr>
+          <a:xfrm>
+            <a:off x="3442716" y="3840480"/>
+            <a:ext cx="2304288" cy="777240"/>
           </a:xfrm>
           <a:prstGeom prst="rect">
             <a:avLst/>
@@ -13233,10 +14548,13 @@
           <a:lstStyle/>
           <a:p>
             <a:pPr indent="0" marL="0">
-              <a:buNone/>
-            </a:pPr>
-            <a:r>
-              <a:rPr lang="en-US" sz="1000" dirty="0">
+              <a:lnSpc>
+                <a:spcPct val="115000"/>
+              </a:lnSpc>
+              <a:buNone/>
+            </a:pPr>
+            <a:r>
+              <a:rPr lang="en-US" sz="900" dirty="0">
                 <a:solidFill>
                   <a:srgbClr val="1B2B3A"/>
                 </a:solidFill>
@@ -13244,32 +14562,32 @@
                 <a:ea typeface="Meiryo" pitchFamily="34" charset="-122"/>
                 <a:cs typeface="Meiryo" pitchFamily="34" charset="-120"/>
               </a:rPr>
-              <a:t>Settings のいちばん下 →「Archive this repository」。チームは消してよい</a:t>
-            </a:r>
-            <a:endParaRPr lang="en-US" sz="1000" dirty="0"/>
-          </a:p>
-        </p:txBody>
-      </p:sp>
-      <p:sp>
-        <p:nvSpPr>
-          <p:cNvPr id="32" name="Shape 28"/>
+              <a:t>アドレスも GitHub のユーザー名も、サイトは保存もログ出力もしない。メンバーかどうかは画面に出さず、メールで本人にだけ伝える。</a:t>
+            </a:r>
+            <a:endParaRPr lang="en-US" sz="900" dirty="0"/>
+          </a:p>
+        </p:txBody>
+      </p:sp>
+      <p:sp>
+        <p:nvSpPr>
+          <p:cNvPr id="33" name="Shape 27"/>
           <p:cNvSpPr/>
           <p:nvPr/>
         </p:nvSpPr>
         <p:spPr>
           <a:xfrm>
-            <a:off x="4892040" y="3895344"/>
-            <a:ext cx="310896" cy="310896"/>
-          </a:xfrm>
-          <a:prstGeom prst="ellipse">
+            <a:off x="6062472" y="3429000"/>
+            <a:ext cx="2624328" cy="1234440"/>
+          </a:xfrm>
+          <a:prstGeom prst="rect">
             <a:avLst/>
           </a:prstGeom>
           <a:solidFill>
-            <a:srgbClr val="001E3C"/>
+            <a:srgbClr val="FFFFFF"/>
           </a:solidFill>
           <a:ln w="12700">
             <a:solidFill>
-              <a:srgbClr val="001E3C"/>
+              <a:srgbClr val="DDDDDD"/>
             </a:solidFill>
             <a:prstDash val="solid"/>
           </a:ln>
@@ -13277,69 +14595,30 @@
       </p:sp>
       <p:sp>
         <p:nvSpPr>
-          <p:cNvPr id="33" name="Text 29"/>
-          <p:cNvSpPr txBox="1"/>
-          <p:nvPr/>
-        </p:nvSpPr>
-        <p:spPr>
-          <a:xfrm>
-            <a:off x="4892040" y="3895344"/>
-            <a:ext cx="310896" cy="310896"/>
-          </a:xfrm>
-          <a:prstGeom prst="rect">
-            <a:avLst/>
-          </a:prstGeom>
-          <a:noFill/>
-          <a:ln/>
-        </p:spPr>
-        <p:txBody>
-          <a:bodyPr wrap="square" lIns="0" tIns="0" rIns="0" bIns="0" rtlCol="0" anchor="ctr"/>
-          <a:lstStyle/>
-          <a:p>
-            <a:pPr algn="ctr" indent="0" marL="0">
+          <p:cNvPr id="34" name="Text 28"/>
+          <p:cNvSpPr txBox="1"/>
+          <p:nvPr/>
+        </p:nvSpPr>
+        <p:spPr>
+          <a:xfrm>
+            <a:off x="6245352" y="3538728"/>
+            <a:ext cx="2258568" cy="256032"/>
+          </a:xfrm>
+          <a:prstGeom prst="rect">
+            <a:avLst/>
+          </a:prstGeom>
+          <a:noFill/>
+          <a:ln/>
+        </p:spPr>
+        <p:txBody>
+          <a:bodyPr wrap="square" lIns="0" tIns="0" rIns="0" bIns="0" rtlCol="0" anchor="t"/>
+          <a:lstStyle/>
+          <a:p>
+            <a:pPr indent="0" marL="0">
               <a:buNone/>
             </a:pPr>
             <a:r>
               <a:rPr lang="en-US" sz="1100" b="1" dirty="0">
-                <a:solidFill>
-                  <a:srgbClr val="FFFFFF"/>
-                </a:solidFill>
-                <a:latin typeface="Consolas" pitchFamily="34" charset="0"/>
-                <a:ea typeface="Consolas" pitchFamily="34" charset="-122"/>
-                <a:cs typeface="Consolas" pitchFamily="34" charset="-120"/>
-              </a:rPr>
-              <a:t>3</a:t>
-            </a:r>
-            <a:endParaRPr lang="en-US" sz="1100" dirty="0"/>
-          </a:p>
-        </p:txBody>
-      </p:sp>
-      <p:sp>
-        <p:nvSpPr>
-          <p:cNvPr id="34" name="Text 30"/>
-          <p:cNvSpPr txBox="1"/>
-          <p:nvPr/>
-        </p:nvSpPr>
-        <p:spPr>
-          <a:xfrm>
-            <a:off x="5330952" y="3904488"/>
-            <a:ext cx="3172968" cy="274320"/>
-          </a:xfrm>
-          <a:prstGeom prst="rect">
-            <a:avLst/>
-          </a:prstGeom>
-          <a:noFill/>
-          <a:ln/>
-        </p:spPr>
-        <p:txBody>
-          <a:bodyPr wrap="square" lIns="0" tIns="0" rIns="0" bIns="0" rtlCol="0" anchor="t"/>
-          <a:lstStyle/>
-          <a:p>
-            <a:pPr indent="0" marL="0">
-              <a:buNone/>
-            </a:pPr>
-            <a:r>
-              <a:rPr lang="en-US" sz="1200" b="1" dirty="0">
                 <a:solidFill>
                   <a:srgbClr val="001E3C"/>
                 </a:solidFill>
@@ -13347,22 +14626,22 @@
                 <a:ea typeface="Meiryo" pitchFamily="34" charset="-122"/>
                 <a:cs typeface="Meiryo" pitchFamily="34" charset="-120"/>
               </a:rPr>
-              <a:t>アプリを止める</a:t>
-            </a:r>
-            <a:endParaRPr lang="en-US" sz="1200" dirty="0"/>
-          </a:p>
-        </p:txBody>
-      </p:sp>
-      <p:sp>
-        <p:nvSpPr>
-          <p:cNvPr id="35" name="Text 31"/>
-          <p:cNvSpPr txBox="1"/>
-          <p:nvPr/>
-        </p:nvSpPr>
-        <p:spPr>
-          <a:xfrm>
-            <a:off x="5330952" y="4169664"/>
-            <a:ext cx="3172968" cy="512064"/>
+              <a:t>運営が替わったら</a:t>
+            </a:r>
+            <a:endParaRPr lang="en-US" sz="1100" dirty="0"/>
+          </a:p>
+        </p:txBody>
+      </p:sp>
+      <p:sp>
+        <p:nvSpPr>
+          <p:cNvPr id="35" name="Text 29"/>
+          <p:cNvSpPr txBox="1"/>
+          <p:nvPr/>
+        </p:nvSpPr>
+        <p:spPr>
+          <a:xfrm>
+            <a:off x="6245352" y="3840480"/>
+            <a:ext cx="2304288" cy="777240"/>
           </a:xfrm>
           <a:prstGeom prst="rect">
             <a:avLst/>
@@ -13375,10 +14654,13 @@
           <a:lstStyle/>
           <a:p>
             <a:pPr indent="0" marL="0">
-              <a:buNone/>
-            </a:pPr>
-            <a:r>
-              <a:rPr lang="en-US" sz="1000" dirty="0">
+              <a:lnSpc>
+                <a:spcPct val="115000"/>
+              </a:lnSpc>
+              <a:buNone/>
+            </a:pPr>
+            <a:r>
+              <a:rPr lang="en-US" sz="900" dirty="0">
                 <a:solidFill>
                   <a:srgbClr val="1B2B3A"/>
                 </a:solidFill>
@@ -13386,9 +14668,9 @@
                 <a:ea typeface="Meiryo" pitchFamily="34" charset="-122"/>
                 <a:cs typeface="Meiryo" pitchFamily="34" charset="-120"/>
               </a:rPr>
-              <a:t>動かす場所ができてから。RG ごと削除する</a:t>
-            </a:r>
-            <a:endParaRPr lang="en-US" sz="1000" dirty="0"/>
+              <a:t>名簿を読む許可は運営（クラスの先生）のアカウント。替わったら許可し直す（deploy.txt）。</a:t>
+            </a:r>
+            <a:endParaRPr lang="en-US" sz="900" dirty="0"/>
           </a:p>
         </p:txBody>
       </p:sp>
@@ -13457,7 +14739,7 @@
                 <a:ea typeface="Consolas" pitchFamily="34" charset="-122"/>
                 <a:cs typeface="Consolas" pitchFamily="34" charset="-120"/>
               </a:rPr>
-              <a:t>// 01  ·  公開</a:t>
+              <a:t>// 01  ·  手順 5  ·  見守る</a:t>
             </a:r>
             <a:endParaRPr lang="en-US" sz="1100" dirty="0"/>
           </a:p>
@@ -13496,7 +14778,7 @@
                 <a:ea typeface="Meiryo" pitchFamily="34" charset="-122"/>
                 <a:cs typeface="Meiryo" pitchFamily="34" charset="-120"/>
               </a:rPr>
-              <a:t>アプリを動かす場所（構成案）</a:t>
+              <a:t>メンバーの交代と、WG の終了</a:t>
             </a:r>
             <a:endParaRPr lang="en-US" sz="2600" dirty="0"/>
           </a:p>
@@ -13510,74 +14792,8 @@
         </p:nvSpPr>
         <p:spPr>
           <a:xfrm>
-            <a:off x="7863840" y="777240"/>
-            <a:ext cx="822960" cy="237744"/>
-          </a:xfrm>
-          <a:prstGeom prst="roundRect">
-            <a:avLst>
-              <a:gd name="adj" fmla="val 50000"/>
-            </a:avLst>
-          </a:prstGeom>
-          <a:solidFill>
-            <a:srgbClr val="5BB8FF"/>
-          </a:solidFill>
-          <a:ln w="12700">
-            <a:solidFill>
-              <a:srgbClr val="5BB8FF"/>
-            </a:solidFill>
-            <a:prstDash val="solid"/>
-          </a:ln>
-        </p:spPr>
-      </p:sp>
-      <p:sp>
-        <p:nvSpPr>
-          <p:cNvPr id="5" name="Text 3"/>
-          <p:cNvSpPr txBox="1"/>
-          <p:nvPr/>
-        </p:nvSpPr>
-        <p:spPr>
-          <a:xfrm>
-            <a:off x="7863840" y="777240"/>
-            <a:ext cx="822960" cy="237744"/>
-          </a:xfrm>
-          <a:prstGeom prst="rect">
-            <a:avLst/>
-          </a:prstGeom>
-          <a:noFill/>
-          <a:ln/>
-        </p:spPr>
-        <p:txBody>
-          <a:bodyPr wrap="square" lIns="0" tIns="0" rIns="0" bIns="0" rtlCol="0" anchor="ctr"/>
-          <a:lstStyle/>
-          <a:p>
-            <a:pPr algn="ctr" indent="0" marL="0">
-              <a:buNone/>
-            </a:pPr>
-            <a:r>
-              <a:rPr lang="en-US" sz="900" b="1" dirty="0">
-                <a:solidFill>
-                  <a:srgbClr val="001E3C"/>
-                </a:solidFill>
-                <a:latin typeface="Meiryo" pitchFamily="34" charset="0"/>
-                <a:ea typeface="Meiryo" pitchFamily="34" charset="-122"/>
-                <a:cs typeface="Meiryo" pitchFamily="34" charset="-120"/>
-              </a:rPr>
-              <a:t>準備中</a:t>
-            </a:r>
-            <a:endParaRPr lang="en-US" sz="900" dirty="0"/>
-          </a:p>
-        </p:txBody>
-      </p:sp>
-      <p:sp>
-        <p:nvSpPr>
-          <p:cNvPr id="6" name="Shape 4"/>
-          <p:cNvSpPr/>
-          <p:nvPr/>
-        </p:nvSpPr>
-        <p:spPr>
-          <a:xfrm>
             <a:off x="457200" y="1417320"/>
-            <a:ext cx="2560320" cy="3246120"/>
+            <a:ext cx="4023360" cy="3154680"/>
           </a:xfrm>
           <a:prstGeom prst="rect">
             <a:avLst/>
@@ -13600,9 +14816,34 @@
           </a:effectLst>
         </p:spPr>
       </p:sp>
+      <p:sp>
+        <p:nvSpPr>
+          <p:cNvPr id="5" name="Shape 3"/>
+          <p:cNvSpPr/>
+          <p:nvPr/>
+        </p:nvSpPr>
+        <p:spPr>
+          <a:xfrm>
+            <a:off x="685800" y="1618488"/>
+            <a:ext cx="457200" cy="457200"/>
+          </a:xfrm>
+          <a:prstGeom prst="ellipse">
+            <a:avLst/>
+          </a:prstGeom>
+          <a:solidFill>
+            <a:srgbClr val="5BB8FF"/>
+          </a:solidFill>
+          <a:ln w="12700">
+            <a:solidFill>
+              <a:srgbClr val="5BB8FF"/>
+            </a:solidFill>
+            <a:prstDash val="solid"/>
+          </a:ln>
+        </p:spPr>
+      </p:sp>
       <p:pic>
         <p:nvPicPr>
-          <p:cNvPr id="7" name="Image 0" descr="preencoded.png">    </p:cNvPr>
+          <p:cNvPr id="6" name="Image 0" descr="preencoded.png">    </p:cNvPr>
           <p:cNvPicPr>
             <a:picLocks noChangeAspect="1"/>
           </p:cNvPicPr>
@@ -13616,8 +14857,8 @@
         </p:blipFill>
         <p:spPr>
           <a:xfrm>
-            <a:off x="685800" y="1618488"/>
-            <a:ext cx="292608" cy="292608"/>
+            <a:off x="804672" y="1737360"/>
+            <a:ext cx="219456" cy="219456"/>
           </a:xfrm>
           <a:prstGeom prst="rect">
             <a:avLst/>
@@ -13626,14 +14867,14 @@
       </p:pic>
       <p:sp>
         <p:nvSpPr>
-          <p:cNvPr id="8" name="Text 5"/>
-          <p:cNvSpPr txBox="1"/>
-          <p:nvPr/>
-        </p:nvSpPr>
-        <p:spPr>
-          <a:xfrm>
-            <a:off x="1078992" y="1600200"/>
-            <a:ext cx="1645920" cy="329184"/>
+          <p:cNvPr id="7" name="Text 4"/>
+          <p:cNvSpPr txBox="1"/>
+          <p:nvPr/>
+        </p:nvSpPr>
+        <p:spPr>
+          <a:xfrm>
+            <a:off x="1280160" y="1618488"/>
+            <a:ext cx="3017520" cy="457200"/>
           </a:xfrm>
           <a:prstGeom prst="rect">
             <a:avLst/>
@@ -13649,7 +14890,7 @@
               <a:buNone/>
             </a:pPr>
             <a:r>
-              <a:rPr lang="en-US" sz="1500" b="1" dirty="0">
+              <a:rPr lang="en-US" sz="1400" b="1" dirty="0">
                 <a:solidFill>
                   <a:srgbClr val="001E3C"/>
                 </a:solidFill>
@@ -13657,32 +14898,32 @@
                 <a:ea typeface="Meiryo" pitchFamily="34" charset="-122"/>
                 <a:cs typeface="Meiryo" pitchFamily="34" charset="-120"/>
               </a:rPr>
-              <a:t>GitHub</a:t>
-            </a:r>
-            <a:endParaRPr lang="en-US" sz="1500" dirty="0"/>
-          </a:p>
-        </p:txBody>
-      </p:sp>
-      <p:sp>
-        <p:nvSpPr>
-          <p:cNvPr id="9" name="Shape 6"/>
+              <a:t>メンバーが抜けたら</a:t>
+            </a:r>
+            <a:endParaRPr lang="en-US" sz="1400" dirty="0"/>
+          </a:p>
+        </p:txBody>
+      </p:sp>
+      <p:sp>
+        <p:nvSpPr>
+          <p:cNvPr id="8" name="Shape 5"/>
           <p:cNvSpPr/>
           <p:nvPr/>
         </p:nvSpPr>
         <p:spPr>
           <a:xfrm>
-            <a:off x="685800" y="2148840"/>
-            <a:ext cx="2103120" cy="603504"/>
-          </a:xfrm>
-          <a:prstGeom prst="rect">
+            <a:off x="685800" y="2286000"/>
+            <a:ext cx="310896" cy="310896"/>
+          </a:xfrm>
+          <a:prstGeom prst="ellipse">
             <a:avLst/>
           </a:prstGeom>
           <a:solidFill>
-            <a:srgbClr val="F2F5F8"/>
+            <a:srgbClr val="001E3C"/>
           </a:solidFill>
           <a:ln w="12700">
             <a:solidFill>
-              <a:srgbClr val="DDDDDD"/>
+              <a:srgbClr val="001E3C"/>
             </a:solidFill>
             <a:prstDash val="solid"/>
           </a:ln>
@@ -13690,38 +14931,38 @@
       </p:sp>
       <p:sp>
         <p:nvSpPr>
-          <p:cNvPr id="10" name="Text 7"/>
-          <p:cNvSpPr txBox="1"/>
-          <p:nvPr/>
-        </p:nvSpPr>
-        <p:spPr>
-          <a:xfrm>
-            <a:off x="822960" y="2221992"/>
-            <a:ext cx="1828800" cy="237744"/>
-          </a:xfrm>
-          <a:prstGeom prst="rect">
-            <a:avLst/>
-          </a:prstGeom>
-          <a:noFill/>
-          <a:ln/>
-        </p:spPr>
-        <p:txBody>
-          <a:bodyPr wrap="square" lIns="0" tIns="0" rIns="0" bIns="0" rtlCol="0" anchor="t"/>
-          <a:lstStyle/>
-          <a:p>
-            <a:pPr indent="0" marL="0">
+          <p:cNvPr id="9" name="Text 6"/>
+          <p:cNvSpPr txBox="1"/>
+          <p:nvPr/>
+        </p:nvSpPr>
+        <p:spPr>
+          <a:xfrm>
+            <a:off x="685800" y="2286000"/>
+            <a:ext cx="310896" cy="310896"/>
+          </a:xfrm>
+          <a:prstGeom prst="rect">
+            <a:avLst/>
+          </a:prstGeom>
+          <a:noFill/>
+          <a:ln/>
+        </p:spPr>
+        <p:txBody>
+          <a:bodyPr wrap="square" lIns="0" tIns="0" rIns="0" bIns="0" rtlCol="0" anchor="ctr"/>
+          <a:lstStyle/>
+          <a:p>
+            <a:pPr algn="ctr" indent="0" marL="0">
               <a:buNone/>
             </a:pPr>
             <a:r>
               <a:rPr lang="en-US" sz="1100" b="1" dirty="0">
                 <a:solidFill>
-                  <a:srgbClr val="1A4A70"/>
+                  <a:srgbClr val="FFFFFF"/>
                 </a:solidFill>
                 <a:latin typeface="Consolas" pitchFamily="34" charset="0"/>
                 <a:ea typeface="Consolas" pitchFamily="34" charset="-122"/>
                 <a:cs typeface="Consolas" pitchFamily="34" charset="-120"/>
               </a:rPr>
-              <a:t>wg-&lt;名前&gt;</a:t>
+              <a:t>1</a:t>
             </a:r>
             <a:endParaRPr lang="en-US" sz="1100" dirty="0"/>
           </a:p>
@@ -13729,14 +14970,14 @@
       </p:sp>
       <p:sp>
         <p:nvSpPr>
-          <p:cNvPr id="11" name="Text 8"/>
-          <p:cNvSpPr txBox="1"/>
-          <p:nvPr/>
-        </p:nvSpPr>
-        <p:spPr>
-          <a:xfrm>
-            <a:off x="822960" y="2468880"/>
-            <a:ext cx="1828800" cy="219456"/>
+          <p:cNvPr id="10" name="Text 7"/>
+          <p:cNvSpPr txBox="1"/>
+          <p:nvPr/>
+        </p:nvSpPr>
+        <p:spPr>
+          <a:xfrm>
+            <a:off x="1124712" y="2295144"/>
+            <a:ext cx="3172968" cy="274320"/>
           </a:xfrm>
           <a:prstGeom prst="rect">
             <a:avLst/>
@@ -13752,15 +14993,54 @@
               <a:buNone/>
             </a:pPr>
             <a:r>
-              <a:rPr lang="en-US" sz="1000" dirty="0">
-                <a:solidFill>
-                  <a:srgbClr val="1B2B3A"/>
+              <a:rPr lang="en-US" sz="1200" b="1" dirty="0">
+                <a:solidFill>
+                  <a:srgbClr val="001E3C"/>
                 </a:solidFill>
                 <a:latin typeface="Meiryo" pitchFamily="34" charset="0"/>
                 <a:ea typeface="Meiryo" pitchFamily="34" charset="-122"/>
                 <a:cs typeface="Meiryo" pitchFamily="34" charset="-120"/>
               </a:rPr>
-              <a:t>WG のリポジトリ</a:t>
+              <a:t>WG を抜けた人</a:t>
+            </a:r>
+            <a:endParaRPr lang="en-US" sz="1200" dirty="0"/>
+          </a:p>
+        </p:txBody>
+      </p:sp>
+      <p:sp>
+        <p:nvSpPr>
+          <p:cNvPr id="11" name="Text 8"/>
+          <p:cNvSpPr txBox="1"/>
+          <p:nvPr/>
+        </p:nvSpPr>
+        <p:spPr>
+          <a:xfrm>
+            <a:off x="1124712" y="2560320"/>
+            <a:ext cx="3172968" cy="512064"/>
+          </a:xfrm>
+          <a:prstGeom prst="rect">
+            <a:avLst/>
+          </a:prstGeom>
+          <a:noFill/>
+          <a:ln/>
+        </p:spPr>
+        <p:txBody>
+          <a:bodyPr wrap="square" lIns="0" tIns="0" rIns="0" bIns="0" rtlCol="0" anchor="t"/>
+          <a:lstStyle/>
+          <a:p>
+            <a:pPr indent="0" marL="0">
+              <a:buNone/>
+            </a:pPr>
+            <a:r>
+              <a:rPr lang="en-US" sz="1000" dirty="0">
+                <a:solidFill>
+                  <a:srgbClr val="1B2B3A"/>
+                </a:solidFill>
+                <a:latin typeface="Meiryo" pitchFamily="34" charset="0"/>
+                <a:ea typeface="Meiryo" pitchFamily="34" charset="-122"/>
+                <a:cs typeface="Meiryo" pitchFamily="34" charset="-120"/>
+              </a:rPr>
+              <a:t>チームの「Members」から外す</a:t>
             </a:r>
             <a:endParaRPr lang="en-US" sz="1000" dirty="0"/>
           </a:p>
@@ -13774,42 +15054,18 @@
         </p:nvSpPr>
         <p:spPr>
           <a:xfrm>
-            <a:off x="1737360" y="2770632"/>
-            <a:ext cx="0" cy="237744"/>
-          </a:xfrm>
-          <a:prstGeom prst="line">
-            <a:avLst/>
-          </a:prstGeom>
-          <a:noFill/>
-          <a:ln w="15875">
-            <a:solidFill>
-              <a:srgbClr val="1A4A70"/>
-            </a:solidFill>
-            <a:prstDash val="solid"/>
-            <a:tailEnd type="triangle"/>
-          </a:ln>
-        </p:spPr>
-      </p:sp>
-      <p:sp>
-        <p:nvSpPr>
-          <p:cNvPr id="13" name="Shape 10"/>
-          <p:cNvSpPr/>
-          <p:nvPr/>
-        </p:nvSpPr>
-        <p:spPr>
-          <a:xfrm>
-            <a:off x="685800" y="3017520"/>
-            <a:ext cx="2103120" cy="603504"/>
-          </a:xfrm>
-          <a:prstGeom prst="rect">
+            <a:off x="685800" y="3090672"/>
+            <a:ext cx="310896" cy="310896"/>
+          </a:xfrm>
+          <a:prstGeom prst="ellipse">
             <a:avLst/>
           </a:prstGeom>
           <a:solidFill>
-            <a:srgbClr val="F2F5F8"/>
+            <a:srgbClr val="001E3C"/>
           </a:solidFill>
           <a:ln w="12700">
             <a:solidFill>
-              <a:srgbClr val="DDDDDD"/>
+              <a:srgbClr val="001E3C"/>
             </a:solidFill>
             <a:prstDash val="solid"/>
           </a:ln>
@@ -13817,38 +15073,38 @@
       </p:sp>
       <p:sp>
         <p:nvSpPr>
-          <p:cNvPr id="14" name="Text 11"/>
-          <p:cNvSpPr txBox="1"/>
-          <p:nvPr/>
-        </p:nvSpPr>
-        <p:spPr>
-          <a:xfrm>
-            <a:off x="822960" y="3090672"/>
-            <a:ext cx="1828800" cy="237744"/>
-          </a:xfrm>
-          <a:prstGeom prst="rect">
-            <a:avLst/>
-          </a:prstGeom>
-          <a:noFill/>
-          <a:ln/>
-        </p:spPr>
-        <p:txBody>
-          <a:bodyPr wrap="square" lIns="0" tIns="0" rIns="0" bIns="0" rtlCol="0" anchor="t"/>
-          <a:lstStyle/>
-          <a:p>
-            <a:pPr indent="0" marL="0">
+          <p:cNvPr id="13" name="Text 10"/>
+          <p:cNvSpPr txBox="1"/>
+          <p:nvPr/>
+        </p:nvSpPr>
+        <p:spPr>
+          <a:xfrm>
+            <a:off x="685800" y="3090672"/>
+            <a:ext cx="310896" cy="310896"/>
+          </a:xfrm>
+          <a:prstGeom prst="rect">
+            <a:avLst/>
+          </a:prstGeom>
+          <a:noFill/>
+          <a:ln/>
+        </p:spPr>
+        <p:txBody>
+          <a:bodyPr wrap="square" lIns="0" tIns="0" rIns="0" bIns="0" rtlCol="0" anchor="ctr"/>
+          <a:lstStyle/>
+          <a:p>
+            <a:pPr algn="ctr" indent="0" marL="0">
               <a:buNone/>
             </a:pPr>
             <a:r>
               <a:rPr lang="en-US" sz="1100" b="1" dirty="0">
                 <a:solidFill>
-                  <a:srgbClr val="1A4A70"/>
+                  <a:srgbClr val="FFFFFF"/>
                 </a:solidFill>
                 <a:latin typeface="Consolas" pitchFamily="34" charset="0"/>
                 <a:ea typeface="Consolas" pitchFamily="34" charset="-122"/>
                 <a:cs typeface="Consolas" pitchFamily="34" charset="-120"/>
               </a:rPr>
-              <a:t>GitHub Actions</a:t>
+              <a:t>2</a:t>
             </a:r>
             <a:endParaRPr lang="en-US" sz="1100" dirty="0"/>
           </a:p>
@@ -13856,14 +15112,14 @@
       </p:sp>
       <p:sp>
         <p:nvSpPr>
-          <p:cNvPr id="15" name="Text 12"/>
-          <p:cNvSpPr txBox="1"/>
-          <p:nvPr/>
-        </p:nvSpPr>
-        <p:spPr>
-          <a:xfrm>
-            <a:off x="822960" y="3337560"/>
-            <a:ext cx="1828800" cy="219456"/>
+          <p:cNvPr id="14" name="Text 11"/>
+          <p:cNvSpPr txBox="1"/>
+          <p:nvPr/>
+        </p:nvSpPr>
+        <p:spPr>
+          <a:xfrm>
+            <a:off x="1124712" y="3099816"/>
+            <a:ext cx="3172968" cy="274320"/>
           </a:xfrm>
           <a:prstGeom prst="rect">
             <a:avLst/>
@@ -13879,15 +15135,54 @@
               <a:buNone/>
             </a:pPr>
             <a:r>
-              <a:rPr lang="en-US" sz="1000" dirty="0">
-                <a:solidFill>
-                  <a:srgbClr val="1B2B3A"/>
+              <a:rPr lang="en-US" sz="1200" b="1" dirty="0">
+                <a:solidFill>
+                  <a:srgbClr val="001E3C"/>
                 </a:solidFill>
                 <a:latin typeface="Meiryo" pitchFamily="34" charset="0"/>
                 <a:ea typeface="Meiryo" pitchFamily="34" charset="-122"/>
                 <a:cs typeface="Meiryo" pitchFamily="34" charset="-120"/>
               </a:rPr>
-              <a:t>テスト・イメージを作る</a:t>
+              <a:t>卒業・退部なら org から外す</a:t>
+            </a:r>
+            <a:endParaRPr lang="en-US" sz="1200" dirty="0"/>
+          </a:p>
+        </p:txBody>
+      </p:sp>
+      <p:sp>
+        <p:nvSpPr>
+          <p:cNvPr id="15" name="Text 12"/>
+          <p:cNvSpPr txBox="1"/>
+          <p:nvPr/>
+        </p:nvSpPr>
+        <p:spPr>
+          <a:xfrm>
+            <a:off x="1124712" y="3364992"/>
+            <a:ext cx="3172968" cy="512064"/>
+          </a:xfrm>
+          <a:prstGeom prst="rect">
+            <a:avLst/>
+          </a:prstGeom>
+          <a:noFill/>
+          <a:ln/>
+        </p:spPr>
+        <p:txBody>
+          <a:bodyPr wrap="square" lIns="0" tIns="0" rIns="0" bIns="0" rtlCol="0" anchor="t"/>
+          <a:lstStyle/>
+          <a:p>
+            <a:pPr indent="0" marL="0">
+              <a:buNone/>
+            </a:pPr>
+            <a:r>
+              <a:rPr lang="en-US" sz="1000" dirty="0">
+                <a:solidFill>
+                  <a:srgbClr val="1B2B3A"/>
+                </a:solidFill>
+                <a:latin typeface="Meiryo" pitchFamily="34" charset="0"/>
+                <a:ea typeface="Meiryo" pitchFamily="34" charset="-122"/>
+                <a:cs typeface="Meiryo" pitchFamily="34" charset="-120"/>
+              </a:rPr>
+              <a:t>org の「People」→ その人 →「Remove from organization」。チームからも外れる</a:t>
             </a:r>
             <a:endParaRPr lang="en-US" sz="1000" dirty="0"/>
           </a:p>
@@ -13901,42 +15196,18 @@
         </p:nvSpPr>
         <p:spPr>
           <a:xfrm>
-            <a:off x="1737360" y="3639312"/>
-            <a:ext cx="0" cy="237744"/>
-          </a:xfrm>
-          <a:prstGeom prst="line">
-            <a:avLst/>
-          </a:prstGeom>
-          <a:noFill/>
-          <a:ln w="15875">
-            <a:solidFill>
-              <a:srgbClr val="1A4A70"/>
-            </a:solidFill>
-            <a:prstDash val="solid"/>
-            <a:tailEnd type="triangle"/>
-          </a:ln>
-        </p:spPr>
-      </p:sp>
-      <p:sp>
-        <p:nvSpPr>
-          <p:cNvPr id="17" name="Shape 14"/>
-          <p:cNvSpPr/>
-          <p:nvPr/>
-        </p:nvSpPr>
-        <p:spPr>
-          <a:xfrm>
-            <a:off x="685800" y="3886200"/>
-            <a:ext cx="2103120" cy="603504"/>
-          </a:xfrm>
-          <a:prstGeom prst="rect">
+            <a:off x="685800" y="3895344"/>
+            <a:ext cx="310896" cy="310896"/>
+          </a:xfrm>
+          <a:prstGeom prst="ellipse">
             <a:avLst/>
           </a:prstGeom>
           <a:solidFill>
-            <a:srgbClr val="F2F5F8"/>
+            <a:srgbClr val="001E3C"/>
           </a:solidFill>
           <a:ln w="12700">
             <a:solidFill>
-              <a:srgbClr val="DDDDDD"/>
+              <a:srgbClr val="001E3C"/>
             </a:solidFill>
             <a:prstDash val="solid"/>
           </a:ln>
@@ -13944,38 +15215,38 @@
       </p:sp>
       <p:sp>
         <p:nvSpPr>
-          <p:cNvPr id="18" name="Text 15"/>
-          <p:cNvSpPr txBox="1"/>
-          <p:nvPr/>
-        </p:nvSpPr>
-        <p:spPr>
-          <a:xfrm>
-            <a:off x="822960" y="3959352"/>
-            <a:ext cx="1828800" cy="237744"/>
-          </a:xfrm>
-          <a:prstGeom prst="rect">
-            <a:avLst/>
-          </a:prstGeom>
-          <a:noFill/>
-          <a:ln/>
-        </p:spPr>
-        <p:txBody>
-          <a:bodyPr wrap="square" lIns="0" tIns="0" rIns="0" bIns="0" rtlCol="0" anchor="t"/>
-          <a:lstStyle/>
-          <a:p>
-            <a:pPr indent="0" marL="0">
+          <p:cNvPr id="17" name="Text 14"/>
+          <p:cNvSpPr txBox="1"/>
+          <p:nvPr/>
+        </p:nvSpPr>
+        <p:spPr>
+          <a:xfrm>
+            <a:off x="685800" y="3895344"/>
+            <a:ext cx="310896" cy="310896"/>
+          </a:xfrm>
+          <a:prstGeom prst="rect">
+            <a:avLst/>
+          </a:prstGeom>
+          <a:noFill/>
+          <a:ln/>
+        </p:spPr>
+        <p:txBody>
+          <a:bodyPr wrap="square" lIns="0" tIns="0" rIns="0" bIns="0" rtlCol="0" anchor="ctr"/>
+          <a:lstStyle/>
+          <a:p>
+            <a:pPr algn="ctr" indent="0" marL="0">
               <a:buNone/>
             </a:pPr>
             <a:r>
               <a:rPr lang="en-US" sz="1100" b="1" dirty="0">
                 <a:solidFill>
-                  <a:srgbClr val="1A4A70"/>
+                  <a:srgbClr val="FFFFFF"/>
                 </a:solidFill>
                 <a:latin typeface="Consolas" pitchFamily="34" charset="0"/>
                 <a:ea typeface="Consolas" pitchFamily="34" charset="-122"/>
                 <a:cs typeface="Consolas" pitchFamily="34" charset="-120"/>
               </a:rPr>
-              <a:t>ghcr.io</a:t>
+              <a:t>3</a:t>
             </a:r>
             <a:endParaRPr lang="en-US" sz="1100" dirty="0"/>
           </a:p>
@@ -13983,14 +15254,14 @@
       </p:sp>
       <p:sp>
         <p:nvSpPr>
-          <p:cNvPr id="19" name="Text 16"/>
-          <p:cNvSpPr txBox="1"/>
-          <p:nvPr/>
-        </p:nvSpPr>
-        <p:spPr>
-          <a:xfrm>
-            <a:off x="822960" y="4206240"/>
-            <a:ext cx="1828800" cy="219456"/>
+          <p:cNvPr id="18" name="Text 15"/>
+          <p:cNvSpPr txBox="1"/>
+          <p:nvPr/>
+        </p:nvSpPr>
+        <p:spPr>
+          <a:xfrm>
+            <a:off x="1124712" y="3904488"/>
+            <a:ext cx="3172968" cy="274320"/>
           </a:xfrm>
           <a:prstGeom prst="rect">
             <a:avLst/>
@@ -14006,15 +15277,54 @@
               <a:buNone/>
             </a:pPr>
             <a:r>
-              <a:rPr lang="en-US" sz="1000" dirty="0">
-                <a:solidFill>
-                  <a:srgbClr val="1B2B3A"/>
+              <a:rPr lang="en-US" sz="1200" b="1" dirty="0">
+                <a:solidFill>
+                  <a:srgbClr val="001E3C"/>
                 </a:solidFill>
                 <a:latin typeface="Meiryo" pitchFamily="34" charset="0"/>
                 <a:ea typeface="Meiryo" pitchFamily="34" charset="-122"/>
                 <a:cs typeface="Meiryo" pitchFamily="34" charset="-120"/>
               </a:rPr>
-              <a:t>コンテナイメージ</a:t>
+              <a:t>Classroom からも外す</a:t>
+            </a:r>
+            <a:endParaRPr lang="en-US" sz="1200" dirty="0"/>
+          </a:p>
+        </p:txBody>
+      </p:sp>
+      <p:sp>
+        <p:nvSpPr>
+          <p:cNvPr id="19" name="Text 16"/>
+          <p:cNvSpPr txBox="1"/>
+          <p:nvPr/>
+        </p:nvSpPr>
+        <p:spPr>
+          <a:xfrm>
+            <a:off x="1124712" y="4169664"/>
+            <a:ext cx="3172968" cy="512064"/>
+          </a:xfrm>
+          <a:prstGeom prst="rect">
+            <a:avLst/>
+          </a:prstGeom>
+          <a:noFill/>
+          <a:ln/>
+        </p:spPr>
+        <p:txBody>
+          <a:bodyPr wrap="square" lIns="0" tIns="0" rIns="0" bIns="0" rtlCol="0" anchor="t"/>
+          <a:lstStyle/>
+          <a:p>
+            <a:pPr indent="0" marL="0">
+              <a:buNone/>
+            </a:pPr>
+            <a:r>
+              <a:rPr lang="en-US" sz="1000" dirty="0">
+                <a:solidFill>
+                  <a:srgbClr val="1B2B3A"/>
+                </a:solidFill>
+                <a:latin typeface="Meiryo" pitchFamily="34" charset="0"/>
+                <a:ea typeface="Meiryo" pitchFamily="34" charset="-122"/>
+                <a:cs typeface="Meiryo" pitchFamily="34" charset="-120"/>
+              </a:rPr>
+              <a:t>外さないと「WG に参加」を通れてしまう</a:t>
             </a:r>
             <a:endParaRPr lang="en-US" sz="1000" dirty="0"/>
           </a:p>
@@ -14028,8 +15338,8 @@
         </p:nvSpPr>
         <p:spPr>
           <a:xfrm>
-            <a:off x="3703320" y="1417320"/>
-            <a:ext cx="4983480" cy="3246120"/>
+            <a:off x="4663440" y="1417320"/>
+            <a:ext cx="4023360" cy="3154680"/>
           </a:xfrm>
           <a:prstGeom prst="rect">
             <a:avLst/>
@@ -14039,15 +15349,47 @@
           </a:solidFill>
           <a:ln w="12700">
             <a:solidFill>
-              <a:srgbClr val="B9CAD9"/>
+              <a:srgbClr val="FFFFFF"/>
             </a:solidFill>
-            <a:prstDash val="dash"/>
+            <a:prstDash val="solid"/>
+          </a:ln>
+          <a:effectLst>
+            <a:outerShdw sx="100000" sy="100000" kx="0" ky="0" algn="bl" rotWithShape="0" blurRad="76200" dist="25400" dir="5400000">
+              <a:srgbClr val="000000">
+                <a:alpha val="12000"/>
+              </a:srgbClr>
+            </a:outerShdw>
+          </a:effectLst>
+        </p:spPr>
+      </p:sp>
+      <p:sp>
+        <p:nvSpPr>
+          <p:cNvPr id="21" name="Shape 18"/>
+          <p:cNvSpPr/>
+          <p:nvPr/>
+        </p:nvSpPr>
+        <p:spPr>
+          <a:xfrm>
+            <a:off x="4892040" y="1618488"/>
+            <a:ext cx="457200" cy="457200"/>
+          </a:xfrm>
+          <a:prstGeom prst="ellipse">
+            <a:avLst/>
+          </a:prstGeom>
+          <a:solidFill>
+            <a:srgbClr val="001E3C"/>
+          </a:solidFill>
+          <a:ln w="12700">
+            <a:solidFill>
+              <a:srgbClr val="001E3C"/>
+            </a:solidFill>
+            <a:prstDash val="solid"/>
           </a:ln>
         </p:spPr>
       </p:sp>
       <p:pic>
         <p:nvPicPr>
-          <p:cNvPr id="21" name="Image 1" descr="preencoded.png">    </p:cNvPr>
+          <p:cNvPr id="22" name="Image 1" descr="preencoded.png">    </p:cNvPr>
           <p:cNvPicPr>
             <a:picLocks noChangeAspect="1"/>
           </p:cNvPicPr>
@@ -14061,8 +15403,8 @@
         </p:blipFill>
         <p:spPr>
           <a:xfrm>
-            <a:off x="3931920" y="1618488"/>
-            <a:ext cx="310896" cy="310896"/>
+            <a:off x="5010912" y="1737360"/>
+            <a:ext cx="219456" cy="219456"/>
           </a:xfrm>
           <a:prstGeom prst="rect">
             <a:avLst/>
@@ -14071,14 +15413,14 @@
       </p:pic>
       <p:sp>
         <p:nvSpPr>
-          <p:cNvPr id="22" name="Text 18"/>
-          <p:cNvSpPr txBox="1"/>
-          <p:nvPr/>
-        </p:nvSpPr>
-        <p:spPr>
-          <a:xfrm>
-            <a:off x="4343400" y="1600200"/>
-            <a:ext cx="1828800" cy="329184"/>
+          <p:cNvPr id="23" name="Text 19"/>
+          <p:cNvSpPr txBox="1"/>
+          <p:nvPr/>
+        </p:nvSpPr>
+        <p:spPr>
+          <a:xfrm>
+            <a:off x="5486400" y="1618488"/>
+            <a:ext cx="3017520" cy="457200"/>
           </a:xfrm>
           <a:prstGeom prst="rect">
             <a:avLst/>
@@ -14094,7 +15436,7 @@
               <a:buNone/>
             </a:pPr>
             <a:r>
-              <a:rPr lang="en-US" sz="1500" b="1" dirty="0">
+              <a:rPr lang="en-US" sz="1400" b="1" dirty="0">
                 <a:solidFill>
                   <a:srgbClr val="001E3C"/>
                 </a:solidFill>
@@ -14102,32 +15444,32 @@
                 <a:ea typeface="Meiryo" pitchFamily="34" charset="-122"/>
                 <a:cs typeface="Meiryo" pitchFamily="34" charset="-120"/>
               </a:rPr>
-              <a:t>Azure</a:t>
-            </a:r>
-            <a:endParaRPr lang="en-US" sz="1500" dirty="0"/>
-          </a:p>
-        </p:txBody>
-      </p:sp>
-      <p:sp>
-        <p:nvSpPr>
-          <p:cNvPr id="23" name="Shape 19"/>
+              <a:t>WG が終わったら</a:t>
+            </a:r>
+            <a:endParaRPr lang="en-US" sz="1400" dirty="0"/>
+          </a:p>
+        </p:txBody>
+      </p:sp>
+      <p:sp>
+        <p:nvSpPr>
+          <p:cNvPr id="24" name="Shape 20"/>
           <p:cNvSpPr/>
           <p:nvPr/>
         </p:nvSpPr>
         <p:spPr>
           <a:xfrm>
-            <a:off x="4078224" y="2002536"/>
-            <a:ext cx="2331720" cy="2286000"/>
-          </a:xfrm>
-          <a:prstGeom prst="rect">
+            <a:off x="4892040" y="2286000"/>
+            <a:ext cx="310896" cy="310896"/>
+          </a:xfrm>
+          <a:prstGeom prst="ellipse">
             <a:avLst/>
           </a:prstGeom>
           <a:solidFill>
-            <a:srgbClr val="CFE8FC"/>
+            <a:srgbClr val="001E3C"/>
           </a:solidFill>
           <a:ln w="12700">
             <a:solidFill>
-              <a:srgbClr val="5BB8FF"/>
+              <a:srgbClr val="001E3C"/>
             </a:solidFill>
             <a:prstDash val="solid"/>
           </a:ln>
@@ -14135,24 +15477,141 @@
       </p:sp>
       <p:sp>
         <p:nvSpPr>
-          <p:cNvPr id="24" name="Shape 20"/>
+          <p:cNvPr id="25" name="Text 21"/>
+          <p:cNvSpPr txBox="1"/>
+          <p:nvPr/>
+        </p:nvSpPr>
+        <p:spPr>
+          <a:xfrm>
+            <a:off x="4892040" y="2286000"/>
+            <a:ext cx="310896" cy="310896"/>
+          </a:xfrm>
+          <a:prstGeom prst="rect">
+            <a:avLst/>
+          </a:prstGeom>
+          <a:noFill/>
+          <a:ln/>
+        </p:spPr>
+        <p:txBody>
+          <a:bodyPr wrap="square" lIns="0" tIns="0" rIns="0" bIns="0" rtlCol="0" anchor="ctr"/>
+          <a:lstStyle/>
+          <a:p>
+            <a:pPr algn="ctr" indent="0" marL="0">
+              <a:buNone/>
+            </a:pPr>
+            <a:r>
+              <a:rPr lang="en-US" sz="1100" b="1" dirty="0">
+                <a:solidFill>
+                  <a:srgbClr val="FFFFFF"/>
+                </a:solidFill>
+                <a:latin typeface="Consolas" pitchFamily="34" charset="0"/>
+                <a:ea typeface="Consolas" pitchFamily="34" charset="-122"/>
+                <a:cs typeface="Consolas" pitchFamily="34" charset="-120"/>
+              </a:rPr>
+              <a:t>1</a:t>
+            </a:r>
+            <a:endParaRPr lang="en-US" sz="1100" dirty="0"/>
+          </a:p>
+        </p:txBody>
+      </p:sp>
+      <p:sp>
+        <p:nvSpPr>
+          <p:cNvPr id="26" name="Text 22"/>
+          <p:cNvSpPr txBox="1"/>
+          <p:nvPr/>
+        </p:nvSpPr>
+        <p:spPr>
+          <a:xfrm>
+            <a:off x="5330952" y="2295144"/>
+            <a:ext cx="3172968" cy="274320"/>
+          </a:xfrm>
+          <a:prstGeom prst="rect">
+            <a:avLst/>
+          </a:prstGeom>
+          <a:noFill/>
+          <a:ln/>
+        </p:spPr>
+        <p:txBody>
+          <a:bodyPr wrap="square" lIns="0" tIns="0" rIns="0" bIns="0" rtlCol="0" anchor="t"/>
+          <a:lstStyle/>
+          <a:p>
+            <a:pPr indent="0" marL="0">
+              <a:buNone/>
+            </a:pPr>
+            <a:r>
+              <a:rPr lang="en-US" sz="1200" b="1" dirty="0">
+                <a:solidFill>
+                  <a:srgbClr val="001E3C"/>
+                </a:solidFill>
+                <a:latin typeface="Meiryo" pitchFamily="34" charset="0"/>
+                <a:ea typeface="Meiryo" pitchFamily="34" charset="-122"/>
+                <a:cs typeface="Meiryo" pitchFamily="34" charset="-120"/>
+              </a:rPr>
+              <a:t>サイトの WG 紹介を直す</a:t>
+            </a:r>
+            <a:endParaRPr lang="en-US" sz="1200" dirty="0"/>
+          </a:p>
+        </p:txBody>
+      </p:sp>
+      <p:sp>
+        <p:nvSpPr>
+          <p:cNvPr id="27" name="Text 23"/>
+          <p:cNvSpPr txBox="1"/>
+          <p:nvPr/>
+        </p:nvSpPr>
+        <p:spPr>
+          <a:xfrm>
+            <a:off x="5330952" y="2560320"/>
+            <a:ext cx="3172968" cy="512064"/>
+          </a:xfrm>
+          <a:prstGeom prst="rect">
+            <a:avLst/>
+          </a:prstGeom>
+          <a:noFill/>
+          <a:ln/>
+        </p:spPr>
+        <p:txBody>
+          <a:bodyPr wrap="square" lIns="0" tIns="0" rIns="0" bIns="0" rtlCol="0" anchor="t"/>
+          <a:lstStyle/>
+          <a:p>
+            <a:pPr indent="0" marL="0">
+              <a:buNone/>
+            </a:pPr>
+            <a:r>
+              <a:rPr lang="en-US" sz="1000" dirty="0">
+                <a:solidFill>
+                  <a:srgbClr val="1B2B3A"/>
+                </a:solidFill>
+                <a:latin typeface="Meiryo" pitchFamily="34" charset="0"/>
+                <a:ea typeface="Meiryo" pitchFamily="34" charset="-122"/>
+                <a:cs typeface="Meiryo" pitchFamily="34" charset="-120"/>
+              </a:rPr>
+              <a:t>記録として残すか、「公開する」を外すか決める</a:t>
+            </a:r>
+            <a:endParaRPr lang="en-US" sz="1000" dirty="0"/>
+          </a:p>
+        </p:txBody>
+      </p:sp>
+      <p:sp>
+        <p:nvSpPr>
+          <p:cNvPr id="28" name="Shape 24"/>
           <p:cNvSpPr/>
           <p:nvPr/>
         </p:nvSpPr>
         <p:spPr>
           <a:xfrm>
-            <a:off x="4005072" y="2075688"/>
-            <a:ext cx="2331720" cy="2286000"/>
-          </a:xfrm>
-          <a:prstGeom prst="rect">
+            <a:off x="4892040" y="3090672"/>
+            <a:ext cx="310896" cy="310896"/>
+          </a:xfrm>
+          <a:prstGeom prst="ellipse">
             <a:avLst/>
           </a:prstGeom>
           <a:solidFill>
-            <a:srgbClr val="CFE8FC"/>
+            <a:srgbClr val="001E3C"/>
           </a:solidFill>
           <a:ln w="12700">
             <a:solidFill>
-              <a:srgbClr val="5BB8FF"/>
+              <a:srgbClr val="001E3C"/>
             </a:solidFill>
             <a:prstDash val="solid"/>
           </a:ln>
@@ -14160,24 +15619,141 @@
       </p:sp>
       <p:sp>
         <p:nvSpPr>
-          <p:cNvPr id="25" name="Shape 21"/>
+          <p:cNvPr id="29" name="Text 25"/>
+          <p:cNvSpPr txBox="1"/>
+          <p:nvPr/>
+        </p:nvSpPr>
+        <p:spPr>
+          <a:xfrm>
+            <a:off x="4892040" y="3090672"/>
+            <a:ext cx="310896" cy="310896"/>
+          </a:xfrm>
+          <a:prstGeom prst="rect">
+            <a:avLst/>
+          </a:prstGeom>
+          <a:noFill/>
+          <a:ln/>
+        </p:spPr>
+        <p:txBody>
+          <a:bodyPr wrap="square" lIns="0" tIns="0" rIns="0" bIns="0" rtlCol="0" anchor="ctr"/>
+          <a:lstStyle/>
+          <a:p>
+            <a:pPr algn="ctr" indent="0" marL="0">
+              <a:buNone/>
+            </a:pPr>
+            <a:r>
+              <a:rPr lang="en-US" sz="1100" b="1" dirty="0">
+                <a:solidFill>
+                  <a:srgbClr val="FFFFFF"/>
+                </a:solidFill>
+                <a:latin typeface="Consolas" pitchFamily="34" charset="0"/>
+                <a:ea typeface="Consolas" pitchFamily="34" charset="-122"/>
+                <a:cs typeface="Consolas" pitchFamily="34" charset="-120"/>
+              </a:rPr>
+              <a:t>2</a:t>
+            </a:r>
+            <a:endParaRPr lang="en-US" sz="1100" dirty="0"/>
+          </a:p>
+        </p:txBody>
+      </p:sp>
+      <p:sp>
+        <p:nvSpPr>
+          <p:cNvPr id="30" name="Text 26"/>
+          <p:cNvSpPr txBox="1"/>
+          <p:nvPr/>
+        </p:nvSpPr>
+        <p:spPr>
+          <a:xfrm>
+            <a:off x="5330952" y="3099816"/>
+            <a:ext cx="3172968" cy="274320"/>
+          </a:xfrm>
+          <a:prstGeom prst="rect">
+            <a:avLst/>
+          </a:prstGeom>
+          <a:noFill/>
+          <a:ln/>
+        </p:spPr>
+        <p:txBody>
+          <a:bodyPr wrap="square" lIns="0" tIns="0" rIns="0" bIns="0" rtlCol="0" anchor="t"/>
+          <a:lstStyle/>
+          <a:p>
+            <a:pPr indent="0" marL="0">
+              <a:buNone/>
+            </a:pPr>
+            <a:r>
+              <a:rPr lang="en-US" sz="1200" b="1" dirty="0">
+                <a:solidFill>
+                  <a:srgbClr val="001E3C"/>
+                </a:solidFill>
+                <a:latin typeface="Meiryo" pitchFamily="34" charset="0"/>
+                <a:ea typeface="Meiryo" pitchFamily="34" charset="-122"/>
+                <a:cs typeface="Meiryo" pitchFamily="34" charset="-120"/>
+              </a:rPr>
+              <a:t>リポジトリをアーカイブ</a:t>
+            </a:r>
+            <a:endParaRPr lang="en-US" sz="1200" dirty="0"/>
+          </a:p>
+        </p:txBody>
+      </p:sp>
+      <p:sp>
+        <p:nvSpPr>
+          <p:cNvPr id="31" name="Text 27"/>
+          <p:cNvSpPr txBox="1"/>
+          <p:nvPr/>
+        </p:nvSpPr>
+        <p:spPr>
+          <a:xfrm>
+            <a:off x="5330952" y="3364992"/>
+            <a:ext cx="3172968" cy="512064"/>
+          </a:xfrm>
+          <a:prstGeom prst="rect">
+            <a:avLst/>
+          </a:prstGeom>
+          <a:noFill/>
+          <a:ln/>
+        </p:spPr>
+        <p:txBody>
+          <a:bodyPr wrap="square" lIns="0" tIns="0" rIns="0" bIns="0" rtlCol="0" anchor="t"/>
+          <a:lstStyle/>
+          <a:p>
+            <a:pPr indent="0" marL="0">
+              <a:buNone/>
+            </a:pPr>
+            <a:r>
+              <a:rPr lang="en-US" sz="1000" dirty="0">
+                <a:solidFill>
+                  <a:srgbClr val="1B2B3A"/>
+                </a:solidFill>
+                <a:latin typeface="Meiryo" pitchFamily="34" charset="0"/>
+                <a:ea typeface="Meiryo" pitchFamily="34" charset="-122"/>
+                <a:cs typeface="Meiryo" pitchFamily="34" charset="-120"/>
+              </a:rPr>
+              <a:t>Settings のいちばん下 →「Archive this repository」。チームは消してよい</a:t>
+            </a:r>
+            <a:endParaRPr lang="en-US" sz="1000" dirty="0"/>
+          </a:p>
+        </p:txBody>
+      </p:sp>
+      <p:sp>
+        <p:nvSpPr>
+          <p:cNvPr id="32" name="Shape 28"/>
           <p:cNvSpPr/>
           <p:nvPr/>
         </p:nvSpPr>
         <p:spPr>
           <a:xfrm>
-            <a:off x="3931920" y="2148840"/>
-            <a:ext cx="2331720" cy="2286000"/>
-          </a:xfrm>
-          <a:prstGeom prst="rect">
+            <a:off x="4892040" y="3895344"/>
+            <a:ext cx="310896" cy="310896"/>
+          </a:xfrm>
+          <a:prstGeom prst="ellipse">
             <a:avLst/>
           </a:prstGeom>
           <a:solidFill>
-            <a:srgbClr val="E4F2FF"/>
+            <a:srgbClr val="001E3C"/>
           </a:solidFill>
           <a:ln w="12700">
             <a:solidFill>
-              <a:srgbClr val="5BB8FF"/>
+              <a:srgbClr val="001E3C"/>
             </a:solidFill>
             <a:prstDash val="solid"/>
           </a:ln>
@@ -14185,78 +15761,53 @@
       </p:sp>
       <p:sp>
         <p:nvSpPr>
-          <p:cNvPr id="26" name="Text 22"/>
-          <p:cNvSpPr txBox="1"/>
-          <p:nvPr/>
-        </p:nvSpPr>
-        <p:spPr>
-          <a:xfrm>
-            <a:off x="4096512" y="2286000"/>
-            <a:ext cx="2057400" cy="256032"/>
-          </a:xfrm>
-          <a:prstGeom prst="rect">
-            <a:avLst/>
-          </a:prstGeom>
-          <a:noFill/>
-          <a:ln/>
-        </p:spPr>
-        <p:txBody>
-          <a:bodyPr wrap="square" lIns="0" tIns="0" rIns="0" bIns="0" rtlCol="0" anchor="t"/>
-          <a:lstStyle/>
-          <a:p>
-            <a:pPr indent="0" marL="0">
-              <a:buNone/>
-            </a:pPr>
-            <a:r>
-              <a:rPr lang="en-US" sz="1000" b="1" dirty="0">
-                <a:solidFill>
-                  <a:srgbClr val="1A4A70"/>
+          <p:cNvPr id="33" name="Text 29"/>
+          <p:cNvSpPr txBox="1"/>
+          <p:nvPr/>
+        </p:nvSpPr>
+        <p:spPr>
+          <a:xfrm>
+            <a:off x="4892040" y="3895344"/>
+            <a:ext cx="310896" cy="310896"/>
+          </a:xfrm>
+          <a:prstGeom prst="rect">
+            <a:avLst/>
+          </a:prstGeom>
+          <a:noFill/>
+          <a:ln/>
+        </p:spPr>
+        <p:txBody>
+          <a:bodyPr wrap="square" lIns="0" tIns="0" rIns="0" bIns="0" rtlCol="0" anchor="ctr"/>
+          <a:lstStyle/>
+          <a:p>
+            <a:pPr algn="ctr" indent="0" marL="0">
+              <a:buNone/>
+            </a:pPr>
+            <a:r>
+              <a:rPr lang="en-US" sz="1100" b="1" dirty="0">
+                <a:solidFill>
+                  <a:srgbClr val="FFFFFF"/>
                 </a:solidFill>
                 <a:latin typeface="Consolas" pitchFamily="34" charset="0"/>
                 <a:ea typeface="Consolas" pitchFamily="34" charset="-122"/>
                 <a:cs typeface="Consolas" pitchFamily="34" charset="-120"/>
               </a:rPr>
-              <a:t>RG: funitclub-wg-&lt;名前&gt;</a:t>
-            </a:r>
-            <a:endParaRPr lang="en-US" sz="1000" dirty="0"/>
-          </a:p>
-        </p:txBody>
-      </p:sp>
-      <p:sp>
-        <p:nvSpPr>
-          <p:cNvPr id="27" name="Shape 23"/>
-          <p:cNvSpPr/>
-          <p:nvPr/>
-        </p:nvSpPr>
-        <p:spPr>
-          <a:xfrm>
-            <a:off x="4096512" y="2651760"/>
-            <a:ext cx="2002536" cy="822960"/>
-          </a:xfrm>
-          <a:prstGeom prst="rect">
-            <a:avLst/>
-          </a:prstGeom>
-          <a:solidFill>
-            <a:srgbClr val="FFFFFF"/>
-          </a:solidFill>
-          <a:ln w="12700">
-            <a:solidFill>
-              <a:srgbClr val="5BB8FF"/>
-            </a:solidFill>
-            <a:prstDash val="solid"/>
-          </a:ln>
-        </p:spPr>
-      </p:sp>
-      <p:sp>
-        <p:nvSpPr>
-          <p:cNvPr id="28" name="Text 24"/>
-          <p:cNvSpPr txBox="1"/>
-          <p:nvPr/>
-        </p:nvSpPr>
-        <p:spPr>
-          <a:xfrm>
-            <a:off x="4206240" y="2743200"/>
-            <a:ext cx="1783080" cy="274320"/>
+              <a:t>3</a:t>
+            </a:r>
+            <a:endParaRPr lang="en-US" sz="1100" dirty="0"/>
+          </a:p>
+        </p:txBody>
+      </p:sp>
+      <p:sp>
+        <p:nvSpPr>
+          <p:cNvPr id="34" name="Text 30"/>
+          <p:cNvSpPr txBox="1"/>
+          <p:nvPr/>
+        </p:nvSpPr>
+        <p:spPr>
+          <a:xfrm>
+            <a:off x="5330952" y="3904488"/>
+            <a:ext cx="3172968" cy="274320"/>
           </a:xfrm>
           <a:prstGeom prst="rect">
             <a:avLst/>
@@ -14272,7 +15823,7 @@
               <a:buNone/>
             </a:pPr>
             <a:r>
-              <a:rPr lang="en-US" sz="1300" b="1" dirty="0">
+              <a:rPr lang="en-US" sz="1200" b="1" dirty="0">
                 <a:solidFill>
                   <a:srgbClr val="001E3C"/>
                 </a:solidFill>
@@ -14280,22 +15831,22 @@
                 <a:ea typeface="Meiryo" pitchFamily="34" charset="-122"/>
                 <a:cs typeface="Meiryo" pitchFamily="34" charset="-120"/>
               </a:rPr>
-              <a:t>Container App</a:t>
-            </a:r>
-            <a:endParaRPr lang="en-US" sz="1300" dirty="0"/>
-          </a:p>
-        </p:txBody>
-      </p:sp>
-      <p:sp>
-        <p:nvSpPr>
-          <p:cNvPr id="29" name="Text 25"/>
-          <p:cNvSpPr txBox="1"/>
-          <p:nvPr/>
-        </p:nvSpPr>
-        <p:spPr>
-          <a:xfrm>
-            <a:off x="4206240" y="3044952"/>
-            <a:ext cx="1783080" cy="274320"/>
+              <a:t>アプリを止める</a:t>
+            </a:r>
+            <a:endParaRPr lang="en-US" sz="1200" dirty="0"/>
+          </a:p>
+        </p:txBody>
+      </p:sp>
+      <p:sp>
+        <p:nvSpPr>
+          <p:cNvPr id="35" name="Text 31"/>
+          <p:cNvSpPr txBox="1"/>
+          <p:nvPr/>
+        </p:nvSpPr>
+        <p:spPr>
+          <a:xfrm>
+            <a:off x="5330952" y="4169664"/>
+            <a:ext cx="3172968" cy="512064"/>
           </a:xfrm>
           <a:prstGeom prst="rect">
             <a:avLst/>
@@ -14311,7 +15862,7 @@
               <a:buNone/>
             </a:pPr>
             <a:r>
-              <a:rPr lang="en-US" sz="950" dirty="0">
+              <a:rPr lang="en-US" sz="1000" dirty="0">
                 <a:solidFill>
                   <a:srgbClr val="1B2B3A"/>
                 </a:solidFill>
@@ -14319,325 +15870,11 @@
                 <a:ea typeface="Meiryo" pitchFamily="34" charset="-122"/>
                 <a:cs typeface="Meiryo" pitchFamily="34" charset="-120"/>
               </a:rPr>
-              <a:t>使われないときは 0 台まで縮む</a:t>
-            </a:r>
-            <a:endParaRPr lang="en-US" sz="950" dirty="0"/>
-          </a:p>
-        </p:txBody>
-      </p:sp>
-      <p:sp>
-        <p:nvSpPr>
-          <p:cNvPr id="30" name="Text 26"/>
-          <p:cNvSpPr txBox="1"/>
-          <p:nvPr/>
-        </p:nvSpPr>
-        <p:spPr>
-          <a:xfrm>
-            <a:off x="4096512" y="3657600"/>
-            <a:ext cx="2057400" cy="274320"/>
-          </a:xfrm>
-          <a:prstGeom prst="rect">
-            <a:avLst/>
-          </a:prstGeom>
-          <a:noFill/>
-          <a:ln/>
-        </p:spPr>
-        <p:txBody>
-          <a:bodyPr wrap="square" lIns="0" tIns="0" rIns="0" bIns="0" rtlCol="0" anchor="t"/>
-          <a:lstStyle/>
-          <a:p>
-            <a:pPr indent="0" marL="0">
-              <a:buNone/>
-            </a:pPr>
-            <a:r>
-              <a:rPr lang="en-US" sz="1100" b="1" dirty="0">
-                <a:solidFill>
-                  <a:srgbClr val="1A4A70"/>
-                </a:solidFill>
-                <a:latin typeface="Meiryo" pitchFamily="34" charset="0"/>
-                <a:ea typeface="Meiryo" pitchFamily="34" charset="-122"/>
-                <a:cs typeface="Meiryo" pitchFamily="34" charset="-120"/>
-              </a:rPr>
-              <a:t>WG ごとに 1 つ作る</a:t>
-            </a:r>
-            <a:endParaRPr lang="en-US" sz="1100" dirty="0"/>
-          </a:p>
-        </p:txBody>
-      </p:sp>
-      <p:sp>
-        <p:nvSpPr>
-          <p:cNvPr id="31" name="Text 27"/>
-          <p:cNvSpPr txBox="1"/>
-          <p:nvPr/>
-        </p:nvSpPr>
-        <p:spPr>
-          <a:xfrm>
-            <a:off x="4096512" y="3931920"/>
-            <a:ext cx="2057400" cy="274320"/>
-          </a:xfrm>
-          <a:prstGeom prst="rect">
-            <a:avLst/>
-          </a:prstGeom>
-          <a:noFill/>
-          <a:ln/>
-        </p:spPr>
-        <p:txBody>
-          <a:bodyPr wrap="square" lIns="0" tIns="0" rIns="0" bIns="0" rtlCol="0" anchor="t"/>
-          <a:lstStyle/>
-          <a:p>
-            <a:pPr indent="0" marL="0">
-              <a:buNone/>
-            </a:pPr>
-            <a:r>
-              <a:rPr lang="en-US" sz="950" dirty="0">
-                <a:solidFill>
-                  <a:srgbClr val="1B2B3A"/>
-                </a:solidFill>
-                <a:latin typeface="Meiryo" pitchFamily="34" charset="0"/>
-                <a:ea typeface="Meiryo" pitchFamily="34" charset="-122"/>
-                <a:cs typeface="Meiryo" pitchFamily="34" charset="-120"/>
-              </a:rPr>
-              <a:t>デプロイの権限はこの RG の中だけ</a:t>
-            </a:r>
-            <a:endParaRPr lang="en-US" sz="950" dirty="0"/>
-          </a:p>
-        </p:txBody>
-      </p:sp>
-      <p:sp>
-        <p:nvSpPr>
-          <p:cNvPr id="32" name="Shape 28"/>
-          <p:cNvSpPr/>
-          <p:nvPr/>
-        </p:nvSpPr>
-        <p:spPr>
-          <a:xfrm>
-            <a:off x="6537960" y="2148840"/>
-            <a:ext cx="1920240" cy="2286000"/>
-          </a:xfrm>
-          <a:prstGeom prst="rect">
-            <a:avLst/>
-          </a:prstGeom>
-          <a:solidFill>
-            <a:srgbClr val="F2F5F8"/>
-          </a:solidFill>
-          <a:ln w="12700">
-            <a:solidFill>
-              <a:srgbClr val="DDDDDD"/>
-            </a:solidFill>
-            <a:prstDash val="solid"/>
-          </a:ln>
-        </p:spPr>
-      </p:sp>
-      <p:sp>
-        <p:nvSpPr>
-          <p:cNvPr id="33" name="Text 29"/>
-          <p:cNvSpPr txBox="1"/>
-          <p:nvPr/>
-        </p:nvSpPr>
-        <p:spPr>
-          <a:xfrm>
-            <a:off x="6702552" y="2286000"/>
-            <a:ext cx="1645920" cy="256032"/>
-          </a:xfrm>
-          <a:prstGeom prst="rect">
-            <a:avLst/>
-          </a:prstGeom>
-          <a:noFill/>
-          <a:ln/>
-        </p:spPr>
-        <p:txBody>
-          <a:bodyPr wrap="square" lIns="0" tIns="0" rIns="0" bIns="0" rtlCol="0" anchor="t"/>
-          <a:lstStyle/>
-          <a:p>
-            <a:pPr indent="0" marL="0">
-              <a:buNone/>
-            </a:pPr>
-            <a:r>
-              <a:rPr lang="en-US" sz="1000" b="1" dirty="0">
-                <a:solidFill>
-                  <a:srgbClr val="5A6B7B"/>
-                </a:solidFill>
-                <a:latin typeface="Consolas" pitchFamily="34" charset="0"/>
-                <a:ea typeface="Consolas" pitchFamily="34" charset="-122"/>
-                <a:cs typeface="Consolas" pitchFamily="34" charset="-120"/>
-              </a:rPr>
-              <a:t>RG: hirahira</a:t>
+              <a:t>動かす場所ができてから。RG ごと削除する</a:t>
             </a:r>
             <a:endParaRPr lang="en-US" sz="1000" dirty="0"/>
           </a:p>
         </p:txBody>
-      </p:sp>
-      <p:sp>
-        <p:nvSpPr>
-          <p:cNvPr id="34" name="Text 30"/>
-          <p:cNvSpPr txBox="1"/>
-          <p:nvPr/>
-        </p:nvSpPr>
-        <p:spPr>
-          <a:xfrm>
-            <a:off x="6702552" y="2651760"/>
-            <a:ext cx="1645920" cy="914400"/>
-          </a:xfrm>
-          <a:prstGeom prst="rect">
-            <a:avLst/>
-          </a:prstGeom>
-          <a:noFill/>
-          <a:ln/>
-        </p:spPr>
-        <p:txBody>
-          <a:bodyPr wrap="square" lIns="0" tIns="0" rIns="0" bIns="0" rtlCol="0" anchor="t"/>
-          <a:lstStyle/>
-          <a:p>
-            <a:pPr marL="342900" indent="-342900">
-              <a:spcAft>
-                <a:spcPts val="400"/>
-              </a:spcAft>
-              <a:buSzPct val="100000"/>
-              <a:buChar char="•"/>
-            </a:pPr>
-            <a:r>
-              <a:rPr lang="en-US" sz="1100" dirty="0">
-                <a:solidFill>
-                  <a:srgbClr val="1B2B3A"/>
-                </a:solidFill>
-                <a:latin typeface="Meiryo" pitchFamily="34" charset="0"/>
-                <a:ea typeface="Meiryo" pitchFamily="34" charset="-122"/>
-                <a:cs typeface="Meiryo" pitchFamily="34" charset="-120"/>
-              </a:rPr>
-              <a:t>homepage</a:t>
-            </a:r>
-            <a:endParaRPr lang="en-US" sz="1100" dirty="0"/>
-          </a:p>
-          <a:p>
-            <a:pPr marL="342900" indent="-342900">
-              <a:spcAft>
-                <a:spcPts val="400"/>
-              </a:spcAft>
-              <a:buSzPct val="100000"/>
-              <a:buChar char="•"/>
-            </a:pPr>
-            <a:r>
-              <a:rPr lang="en-US" sz="1100" dirty="0">
-                <a:solidFill>
-                  <a:srgbClr val="1B2B3A"/>
-                </a:solidFill>
-                <a:latin typeface="Meiryo" pitchFamily="34" charset="0"/>
-                <a:ea typeface="Meiryo" pitchFamily="34" charset="-122"/>
-                <a:cs typeface="Meiryo" pitchFamily="34" charset="-120"/>
-              </a:rPr>
-              <a:t>PostgreSQL</a:t>
-            </a:r>
-            <a:endParaRPr lang="en-US" sz="1100" dirty="0"/>
-          </a:p>
-          <a:p>
-            <a:pPr marL="342900" indent="-342900">
-              <a:spcAft>
-                <a:spcPts val="400"/>
-              </a:spcAft>
-              <a:buSzPct val="100000"/>
-              <a:buChar char="•"/>
-            </a:pPr>
-            <a:r>
-              <a:rPr lang="en-US" sz="1100" dirty="0">
-                <a:solidFill>
-                  <a:srgbClr val="1B2B3A"/>
-                </a:solidFill>
-                <a:latin typeface="Meiryo" pitchFamily="34" charset="0"/>
-                <a:ea typeface="Meiryo" pitchFamily="34" charset="-122"/>
-                <a:cs typeface="Meiryo" pitchFamily="34" charset="-120"/>
-              </a:rPr>
-              <a:t>Key Vault</a:t>
-            </a:r>
-            <a:endParaRPr lang="en-US" sz="1100" dirty="0"/>
-          </a:p>
-        </p:txBody>
-      </p:sp>
-      <p:pic>
-        <p:nvPicPr>
-          <p:cNvPr id="35" name="Image 2" descr="preencoded.png">    </p:cNvPr>
-          <p:cNvPicPr>
-            <a:picLocks noChangeAspect="1"/>
-          </p:cNvPicPr>
-          <p:nvPr/>
-        </p:nvPicPr>
-        <p:blipFill>
-          <a:blip r:embed="rId3"/>
-          <a:stretch>
-            <a:fillRect/>
-          </a:stretch>
-        </p:blipFill>
-        <p:spPr>
-          <a:xfrm>
-            <a:off x="6702552" y="3721608"/>
-            <a:ext cx="182880" cy="182880"/>
-          </a:xfrm>
-          <a:prstGeom prst="rect">
-            <a:avLst/>
-          </a:prstGeom>
-        </p:spPr>
-      </p:pic>
-      <p:sp>
-        <p:nvSpPr>
-          <p:cNvPr id="36" name="Text 31"/>
-          <p:cNvSpPr txBox="1"/>
-          <p:nvPr/>
-        </p:nvSpPr>
-        <p:spPr>
-          <a:xfrm>
-            <a:off x="6949440" y="3685032"/>
-            <a:ext cx="1417320" cy="256032"/>
-          </a:xfrm>
-          <a:prstGeom prst="rect">
-            <a:avLst/>
-          </a:prstGeom>
-          <a:noFill/>
-          <a:ln/>
-        </p:spPr>
-        <p:txBody>
-          <a:bodyPr wrap="square" lIns="0" tIns="0" rIns="0" bIns="0" rtlCol="0" anchor="ctr"/>
-          <a:lstStyle/>
-          <a:p>
-            <a:pPr indent="0" marL="0">
-              <a:buNone/>
-            </a:pPr>
-            <a:r>
-              <a:rPr lang="en-US" sz="1000" b="1" dirty="0">
-                <a:solidFill>
-                  <a:srgbClr val="5A6B7B"/>
-                </a:solidFill>
-                <a:latin typeface="Meiryo" pitchFamily="34" charset="0"/>
-                <a:ea typeface="Meiryo" pitchFamily="34" charset="-122"/>
-                <a:cs typeface="Meiryo" pitchFamily="34" charset="-120"/>
-              </a:rPr>
-              <a:t>WG からは触らない</a:t>
-            </a:r>
-            <a:endParaRPr lang="en-US" sz="1000" dirty="0"/>
-          </a:p>
-        </p:txBody>
-      </p:sp>
-      <p:sp>
-        <p:nvSpPr>
-          <p:cNvPr id="37" name="Shape 32"/>
-          <p:cNvSpPr/>
-          <p:nvPr/>
-        </p:nvSpPr>
-        <p:spPr>
-          <a:xfrm>
-            <a:off x="3035808" y="4187952"/>
-            <a:ext cx="877824" cy="0"/>
-          </a:xfrm>
-          <a:prstGeom prst="line">
-            <a:avLst/>
-          </a:prstGeom>
-          <a:noFill/>
-          <a:ln w="19050">
-            <a:solidFill>
-              <a:srgbClr val="1A4A70"/>
-            </a:solidFill>
-            <a:prstDash val="solid"/>
-            <a:tailEnd type="triangle"/>
-          </a:ln>
-        </p:spPr>
       </p:sp>
     </p:spTree>
   </p:cSld>
